--- a/PPT/week4.pptx
+++ b/PPT/week4.pptx
@@ -5,15 +5,16 @@
     <p:sldMasterId id="2147483648" r:id="rId1"/>
   </p:sldMasterIdLst>
   <p:notesMasterIdLst>
-    <p:notesMasterId r:id="rId8"/>
+    <p:notesMasterId r:id="rId9"/>
   </p:notesMasterIdLst>
   <p:sldIdLst>
     <p:sldId id="262" r:id="rId2"/>
     <p:sldId id="257" r:id="rId3"/>
     <p:sldId id="267" r:id="rId4"/>
-    <p:sldId id="261" r:id="rId5"/>
-    <p:sldId id="266" r:id="rId6"/>
-    <p:sldId id="265" r:id="rId7"/>
+    <p:sldId id="268" r:id="rId5"/>
+    <p:sldId id="261" r:id="rId6"/>
+    <p:sldId id="266" r:id="rId7"/>
+    <p:sldId id="265" r:id="rId8"/>
   </p:sldIdLst>
   <p:sldSz cx="12192000" cy="6858000"/>
   <p:notesSz cx="6858000" cy="9144000"/>
@@ -666,6 +667,114 @@
   <p:cSld>
     <p:spTree>
       <p:nvGrpSpPr>
+        <p:cNvPr id="1" name="">
+          <a:extLst>
+            <a:ext uri="{FF2B5EF4-FFF2-40B4-BE49-F238E27FC236}">
+              <a16:creationId xmlns:a16="http://schemas.microsoft.com/office/drawing/2014/main" id="{19A48E16-CDED-FD10-1719-F290DC758E70}"/>
+            </a:ext>
+          </a:extLst>
+        </p:cNvPr>
+        <p:cNvGrpSpPr/>
+        <p:nvPr/>
+      </p:nvGrpSpPr>
+      <p:grpSpPr>
+        <a:xfrm>
+          <a:off x="0" y="0"/>
+          <a:ext cx="0" cy="0"/>
+          <a:chOff x="0" y="0"/>
+          <a:chExt cx="0" cy="0"/>
+        </a:xfrm>
+      </p:grpSpPr>
+      <p:sp>
+        <p:nvSpPr>
+          <p:cNvPr id="2" name="슬라이드 이미지 개체 틀 1">
+            <a:extLst>
+              <a:ext uri="{FF2B5EF4-FFF2-40B4-BE49-F238E27FC236}">
+                <a16:creationId xmlns:a16="http://schemas.microsoft.com/office/drawing/2014/main" id="{9A1240DA-A7BB-AB12-A6E9-EF15BEA1BA59}"/>
+              </a:ext>
+            </a:extLst>
+          </p:cNvPr>
+          <p:cNvSpPr>
+            <a:spLocks noGrp="1" noRot="1" noChangeAspect="1"/>
+          </p:cNvSpPr>
+          <p:nvPr>
+            <p:ph type="sldImg"/>
+          </p:nvPr>
+        </p:nvSpPr>
+        <p:spPr/>
+      </p:sp>
+      <p:sp>
+        <p:nvSpPr>
+          <p:cNvPr id="3" name="슬라이드 노트 개체 틀 2">
+            <a:extLst>
+              <a:ext uri="{FF2B5EF4-FFF2-40B4-BE49-F238E27FC236}">
+                <a16:creationId xmlns:a16="http://schemas.microsoft.com/office/drawing/2014/main" id="{07580D81-178E-8FEE-30D7-0D61CC639933}"/>
+              </a:ext>
+            </a:extLst>
+          </p:cNvPr>
+          <p:cNvSpPr>
+            <a:spLocks noGrp="1"/>
+          </p:cNvSpPr>
+          <p:nvPr>
+            <p:ph type="body" idx="1"/>
+          </p:nvPr>
+        </p:nvSpPr>
+        <p:spPr/>
+        <p:txBody>
+          <a:bodyPr/>
+          <a:lstStyle/>
+          <a:p>
+            <a:endParaRPr lang="ko-KR" altLang="en-US" dirty="0"/>
+          </a:p>
+        </p:txBody>
+      </p:sp>
+      <p:sp>
+        <p:nvSpPr>
+          <p:cNvPr id="4" name="슬라이드 번호 개체 틀 3">
+            <a:extLst>
+              <a:ext uri="{FF2B5EF4-FFF2-40B4-BE49-F238E27FC236}">
+                <a16:creationId xmlns:a16="http://schemas.microsoft.com/office/drawing/2014/main" id="{027BA6A0-D020-0B15-FF2B-EE195810E0DE}"/>
+              </a:ext>
+            </a:extLst>
+          </p:cNvPr>
+          <p:cNvSpPr>
+            <a:spLocks noGrp="1"/>
+          </p:cNvSpPr>
+          <p:nvPr>
+            <p:ph type="sldNum" sz="quarter" idx="10"/>
+          </p:nvPr>
+        </p:nvSpPr>
+        <p:spPr/>
+        <p:txBody>
+          <a:bodyPr/>
+          <a:lstStyle/>
+          <a:p>
+            <a:fld id="{DB06232B-CCFA-4887-B271-B9E43E27353A}" type="slidenum">
+              <a:rPr lang="ko-KR" altLang="en-US" smtClean="0"/>
+              <a:t>4</a:t>
+            </a:fld>
+            <a:endParaRPr lang="ko-KR" altLang="en-US"/>
+          </a:p>
+        </p:txBody>
+      </p:sp>
+    </p:spTree>
+    <p:extLst>
+      <p:ext uri="{BB962C8B-B14F-4D97-AF65-F5344CB8AC3E}">
+        <p14:creationId xmlns:p14="http://schemas.microsoft.com/office/powerpoint/2010/main" val="771913654"/>
+      </p:ext>
+    </p:extLst>
+  </p:cSld>
+  <p:clrMapOvr>
+    <a:masterClrMapping/>
+  </p:clrMapOvr>
+</p:notes>
+</file>
+
+<file path=ppt/notesSlides/notesSlide4.xml><?xml version="1.0" encoding="utf-8"?>
+<p:notes xmlns:a="http://schemas.openxmlformats.org/drawingml/2006/main" xmlns:r="http://schemas.openxmlformats.org/officeDocument/2006/relationships" xmlns:p="http://schemas.openxmlformats.org/presentationml/2006/main">
+  <p:cSld>
+    <p:spTree>
+      <p:nvGrpSpPr>
         <p:cNvPr id="1" name=""/>
         <p:cNvGrpSpPr/>
         <p:nvPr/>
@@ -819,7 +928,7 @@
           <a:p>
             <a:fld id="{0F03AB99-662C-46EC-B86C-F2E227D3EFAD}" type="slidenum">
               <a:rPr lang="ko-KR" altLang="en-US" smtClean="0"/>
-              <a:t>6</a:t>
+              <a:t>7</a:t>
             </a:fld>
             <a:endParaRPr lang="ko-KR" altLang="en-US"/>
           </a:p>
@@ -4800,6 +4909,327 @@
         <p:cNvPr id="1" name="">
           <a:extLst>
             <a:ext uri="{FF2B5EF4-FFF2-40B4-BE49-F238E27FC236}">
+              <a16:creationId xmlns:a16="http://schemas.microsoft.com/office/drawing/2014/main" id="{1051CD25-4D05-9C83-5A8D-951F119768B6}"/>
+            </a:ext>
+          </a:extLst>
+        </p:cNvPr>
+        <p:cNvGrpSpPr/>
+        <p:nvPr/>
+      </p:nvGrpSpPr>
+      <p:grpSpPr>
+        <a:xfrm>
+          <a:off x="0" y="0"/>
+          <a:ext cx="0" cy="0"/>
+          <a:chOff x="0" y="0"/>
+          <a:chExt cx="0" cy="0"/>
+        </a:xfrm>
+      </p:grpSpPr>
+      <p:sp>
+        <p:nvSpPr>
+          <p:cNvPr id="8" name="TextBox 7">
+            <a:extLst>
+              <a:ext uri="{FF2B5EF4-FFF2-40B4-BE49-F238E27FC236}">
+                <a16:creationId xmlns:a16="http://schemas.microsoft.com/office/drawing/2014/main" id="{DD881128-4DD5-2D80-3307-E58F448D5923}"/>
+              </a:ext>
+            </a:extLst>
+          </p:cNvPr>
+          <p:cNvSpPr txBox="1"/>
+          <p:nvPr/>
+        </p:nvSpPr>
+        <p:spPr>
+          <a:xfrm>
+            <a:off x="302451" y="315453"/>
+            <a:ext cx="4944140" cy="369332"/>
+          </a:xfrm>
+          <a:prstGeom prst="rect">
+            <a:avLst/>
+          </a:prstGeom>
+          <a:noFill/>
+        </p:spPr>
+        <p:txBody>
+          <a:bodyPr wrap="square" rtlCol="0">
+            <a:spAutoFit/>
+          </a:bodyPr>
+          <a:lstStyle/>
+          <a:p>
+            <a:r>
+              <a:rPr lang="ko-KR" altLang="en-US" dirty="0">
+                <a:latin typeface="나눔바른고딕" panose="020B0603020101020101" pitchFamily="34" charset="-127"/>
+                <a:ea typeface="나눔바른고딕" panose="020B0603020101020101" pitchFamily="34" charset="-127"/>
+              </a:rPr>
+              <a:t>이번 주 작업 내역</a:t>
+            </a:r>
+            <a:endParaRPr lang="en-US" altLang="ko-KR" dirty="0">
+              <a:latin typeface="나눔바른고딕" panose="020B0603020101020101" pitchFamily="34" charset="-127"/>
+              <a:ea typeface="나눔바른고딕" panose="020B0603020101020101" pitchFamily="34" charset="-127"/>
+            </a:endParaRPr>
+          </a:p>
+        </p:txBody>
+      </p:sp>
+      <p:sp>
+        <p:nvSpPr>
+          <p:cNvPr id="10" name="TextBox 9">
+            <a:extLst>
+              <a:ext uri="{FF2B5EF4-FFF2-40B4-BE49-F238E27FC236}">
+                <a16:creationId xmlns:a16="http://schemas.microsoft.com/office/drawing/2014/main" id="{A166E13D-C719-30FA-6504-A188368FD586}"/>
+              </a:ext>
+            </a:extLst>
+          </p:cNvPr>
+          <p:cNvSpPr txBox="1"/>
+          <p:nvPr/>
+        </p:nvSpPr>
+        <p:spPr>
+          <a:xfrm>
+            <a:off x="302450" y="1003762"/>
+            <a:ext cx="2694247" cy="338554"/>
+          </a:xfrm>
+          <a:prstGeom prst="rect">
+            <a:avLst/>
+          </a:prstGeom>
+          <a:noFill/>
+        </p:spPr>
+        <p:txBody>
+          <a:bodyPr wrap="square" rtlCol="0">
+            <a:spAutoFit/>
+          </a:bodyPr>
+          <a:lstStyle/>
+          <a:p>
+            <a:r>
+              <a:rPr lang="ko-KR" altLang="en-US" sz="1600" dirty="0">
+                <a:latin typeface="나눔바른고딕" panose="020B0603020101020101" pitchFamily="34" charset="-127"/>
+                <a:ea typeface="나눔바른고딕" panose="020B0603020101020101" pitchFamily="34" charset="-127"/>
+              </a:rPr>
+              <a:t>캐릭터 </a:t>
+            </a:r>
+            <a:r>
+              <a:rPr lang="en-US" altLang="ko-KR" sz="1600" dirty="0">
+                <a:latin typeface="나눔바른고딕" panose="020B0603020101020101" pitchFamily="34" charset="-127"/>
+                <a:ea typeface="나눔바른고딕" panose="020B0603020101020101" pitchFamily="34" charset="-127"/>
+              </a:rPr>
+              <a:t>FSM</a:t>
+            </a:r>
+          </a:p>
+        </p:txBody>
+      </p:sp>
+      <p:cxnSp>
+        <p:nvCxnSpPr>
+          <p:cNvPr id="3" name="직선 연결선 2">
+            <a:extLst>
+              <a:ext uri="{FF2B5EF4-FFF2-40B4-BE49-F238E27FC236}">
+                <a16:creationId xmlns:a16="http://schemas.microsoft.com/office/drawing/2014/main" id="{E9FFB3BD-6F89-4F73-EB69-654CDAAC7A55}"/>
+              </a:ext>
+            </a:extLst>
+          </p:cNvPr>
+          <p:cNvCxnSpPr>
+            <a:cxnSpLocks/>
+          </p:cNvCxnSpPr>
+          <p:nvPr/>
+        </p:nvCxnSpPr>
+        <p:spPr>
+          <a:xfrm>
+            <a:off x="387511" y="818707"/>
+            <a:ext cx="11308303" cy="0"/>
+          </a:xfrm>
+          <a:prstGeom prst="line">
+            <a:avLst/>
+          </a:prstGeom>
+          <a:ln>
+            <a:solidFill>
+              <a:schemeClr val="tx2"/>
+            </a:solidFill>
+          </a:ln>
+        </p:spPr>
+        <p:style>
+          <a:lnRef idx="2">
+            <a:schemeClr val="accent1"/>
+          </a:lnRef>
+          <a:fillRef idx="0">
+            <a:schemeClr val="accent1"/>
+          </a:fillRef>
+          <a:effectRef idx="1">
+            <a:schemeClr val="accent1"/>
+          </a:effectRef>
+          <a:fontRef idx="minor">
+            <a:schemeClr val="tx1"/>
+          </a:fontRef>
+        </p:style>
+      </p:cxnSp>
+      <p:sp>
+        <p:nvSpPr>
+          <p:cNvPr id="12" name="직사각형 11">
+            <a:extLst>
+              <a:ext uri="{FF2B5EF4-FFF2-40B4-BE49-F238E27FC236}">
+                <a16:creationId xmlns:a16="http://schemas.microsoft.com/office/drawing/2014/main" id="{5F5B084D-3D6B-070E-B81C-19CE3179A5A0}"/>
+              </a:ext>
+            </a:extLst>
+          </p:cNvPr>
+          <p:cNvSpPr/>
+          <p:nvPr/>
+        </p:nvSpPr>
+        <p:spPr>
+          <a:xfrm>
+            <a:off x="10443172" y="118011"/>
+            <a:ext cx="1596912" cy="246221"/>
+          </a:xfrm>
+          <a:prstGeom prst="rect">
+            <a:avLst/>
+          </a:prstGeom>
+        </p:spPr>
+        <p:txBody>
+          <a:bodyPr wrap="none">
+            <a:spAutoFit/>
+          </a:bodyPr>
+          <a:lstStyle/>
+          <a:p>
+            <a:r>
+              <a:rPr lang="ko-KR" altLang="en-US" sz="1000" dirty="0" err="1">
+                <a:solidFill>
+                  <a:schemeClr val="bg1">
+                    <a:lumMod val="75000"/>
+                  </a:schemeClr>
+                </a:solidFill>
+                <a:latin typeface="나눔바른고딕" panose="020B0603020101020101" pitchFamily="34" charset="-127"/>
+                <a:ea typeface="나눔바른고딕" panose="020B0603020101020101" pitchFamily="34" charset="-127"/>
+              </a:rPr>
+              <a:t>펄어비스</a:t>
+            </a:r>
+            <a:r>
+              <a:rPr lang="ko-KR" altLang="en-US" sz="1000" dirty="0">
+                <a:solidFill>
+                  <a:schemeClr val="bg1">
+                    <a:lumMod val="75000"/>
+                  </a:schemeClr>
+                </a:solidFill>
+                <a:latin typeface="나눔바른고딕" panose="020B0603020101020101" pitchFamily="34" charset="-127"/>
+                <a:ea typeface="나눔바른고딕" panose="020B0603020101020101" pitchFamily="34" charset="-127"/>
+              </a:rPr>
+              <a:t> </a:t>
+            </a:r>
+            <a:r>
+              <a:rPr lang="en-US" altLang="ko-KR" sz="1000" dirty="0">
+                <a:solidFill>
+                  <a:schemeClr val="bg1">
+                    <a:lumMod val="75000"/>
+                  </a:schemeClr>
+                </a:solidFill>
+                <a:latin typeface="나눔바른고딕" panose="020B0603020101020101" pitchFamily="34" charset="-127"/>
+                <a:ea typeface="나눔바른고딕" panose="020B0603020101020101" pitchFamily="34" charset="-127"/>
+              </a:rPr>
+              <a:t>2026 </a:t>
+            </a:r>
+            <a:r>
+              <a:rPr lang="ko-KR" altLang="en-US" sz="1000" dirty="0">
+                <a:solidFill>
+                  <a:schemeClr val="bg1">
+                    <a:lumMod val="75000"/>
+                  </a:schemeClr>
+                </a:solidFill>
+                <a:latin typeface="나눔바른고딕" panose="020B0603020101020101" pitchFamily="34" charset="-127"/>
+                <a:ea typeface="나눔바른고딕" panose="020B0603020101020101" pitchFamily="34" charset="-127"/>
+              </a:rPr>
+              <a:t>여름 </a:t>
+            </a:r>
+            <a:r>
+              <a:rPr lang="ko-KR" altLang="en-US" sz="1000" dirty="0" err="1">
+                <a:solidFill>
+                  <a:schemeClr val="bg1">
+                    <a:lumMod val="75000"/>
+                  </a:schemeClr>
+                </a:solidFill>
+                <a:latin typeface="나눔바른고딕" panose="020B0603020101020101" pitchFamily="34" charset="-127"/>
+                <a:ea typeface="나눔바른고딕" panose="020B0603020101020101" pitchFamily="34" charset="-127"/>
+              </a:rPr>
+              <a:t>인턴십</a:t>
+            </a:r>
+            <a:endParaRPr lang="ko-KR" altLang="en-US" sz="1000" dirty="0">
+              <a:solidFill>
+                <a:schemeClr val="bg1">
+                  <a:lumMod val="75000"/>
+                </a:schemeClr>
+              </a:solidFill>
+              <a:latin typeface="나눔바른고딕" panose="020B0603020101020101" pitchFamily="34" charset="-127"/>
+              <a:ea typeface="나눔바른고딕" panose="020B0603020101020101" pitchFamily="34" charset="-127"/>
+            </a:endParaRPr>
+          </a:p>
+        </p:txBody>
+      </p:sp>
+      <p:sp>
+        <p:nvSpPr>
+          <p:cNvPr id="13" name="TextBox 12">
+            <a:extLst>
+              <a:ext uri="{FF2B5EF4-FFF2-40B4-BE49-F238E27FC236}">
+                <a16:creationId xmlns:a16="http://schemas.microsoft.com/office/drawing/2014/main" id="{0A281A7B-BF6C-66B0-858C-91AA9CDC8CA2}"/>
+              </a:ext>
+            </a:extLst>
+          </p:cNvPr>
+          <p:cNvSpPr txBox="1"/>
+          <p:nvPr/>
+        </p:nvSpPr>
+        <p:spPr>
+          <a:xfrm>
+            <a:off x="302450" y="1342316"/>
+            <a:ext cx="2694247" cy="276999"/>
+          </a:xfrm>
+          <a:prstGeom prst="rect">
+            <a:avLst/>
+          </a:prstGeom>
+          <a:noFill/>
+        </p:spPr>
+        <p:txBody>
+          <a:bodyPr wrap="square" rtlCol="0">
+            <a:spAutoFit/>
+          </a:bodyPr>
+          <a:lstStyle/>
+          <a:p>
+            <a:r>
+              <a:rPr lang="ko-KR" altLang="en-US" sz="1200" dirty="0">
+                <a:latin typeface="나눔바른고딕" panose="020B0603020101020101" pitchFamily="34" charset="-127"/>
+                <a:ea typeface="나눔바른고딕" panose="020B0603020101020101" pitchFamily="34" charset="-127"/>
+              </a:rPr>
+              <a:t>상태별 인식 처리 </a:t>
+            </a:r>
+            <a:r>
+              <a:rPr lang="en-US" altLang="ko-KR" sz="1200" dirty="0">
+                <a:latin typeface="나눔바른고딕" panose="020B0603020101020101" pitchFamily="34" charset="-127"/>
+                <a:ea typeface="나눔바른고딕" panose="020B0603020101020101" pitchFamily="34" charset="-127"/>
+              </a:rPr>
+              <a:t>- </a:t>
+            </a:r>
+            <a:r>
+              <a:rPr lang="ko-KR" altLang="en-US" sz="1200" dirty="0">
+                <a:latin typeface="나눔바른고딕" panose="020B0603020101020101" pitchFamily="34" charset="-127"/>
+                <a:ea typeface="나눔바른고딕" panose="020B0603020101020101" pitchFamily="34" charset="-127"/>
+              </a:rPr>
+              <a:t>노드 재사용</a:t>
+            </a:r>
+            <a:endParaRPr lang="en-US" altLang="ko-KR" sz="1200" dirty="0">
+              <a:latin typeface="나눔바른고딕" panose="020B0603020101020101" pitchFamily="34" charset="-127"/>
+              <a:ea typeface="나눔바른고딕" panose="020B0603020101020101" pitchFamily="34" charset="-127"/>
+            </a:endParaRPr>
+          </a:p>
+        </p:txBody>
+      </p:sp>
+    </p:spTree>
+    <p:extLst>
+      <p:ext uri="{BB962C8B-B14F-4D97-AF65-F5344CB8AC3E}">
+        <p14:creationId xmlns:p14="http://schemas.microsoft.com/office/powerpoint/2010/main" val="2554348206"/>
+      </p:ext>
+    </p:extLst>
+  </p:cSld>
+  <p:clrMapOvr>
+    <a:masterClrMapping/>
+  </p:clrMapOvr>
+</p:sld>
+</file>
+
+<file path=ppt/slides/slide5.xml><?xml version="1.0" encoding="utf-8"?>
+<p:sld xmlns:a="http://schemas.openxmlformats.org/drawingml/2006/main" xmlns:r="http://schemas.openxmlformats.org/officeDocument/2006/relationships" xmlns:p="http://schemas.openxmlformats.org/presentationml/2006/main">
+  <p:cSld>
+    <p:spTree>
+      <p:nvGrpSpPr>
+        <p:cNvPr id="1" name="">
+          <a:extLst>
+            <a:ext uri="{FF2B5EF4-FFF2-40B4-BE49-F238E27FC236}">
               <a16:creationId xmlns:a16="http://schemas.microsoft.com/office/drawing/2014/main" id="{960F3801-1345-73B1-BC4D-455683B38EDD}"/>
             </a:ext>
           </a:extLst>
@@ -5135,7 +5565,7 @@
 </p:sld>
 </file>
 
-<file path=ppt/slides/slide5.xml><?xml version="1.0" encoding="utf-8"?>
+<file path=ppt/slides/slide6.xml><?xml version="1.0" encoding="utf-8"?>
 <p:sld xmlns:a="http://schemas.openxmlformats.org/drawingml/2006/main" xmlns:r="http://schemas.openxmlformats.org/officeDocument/2006/relationships" xmlns:p="http://schemas.openxmlformats.org/presentationml/2006/main">
   <p:cSld>
     <p:spTree>
@@ -5454,7 +5884,7 @@
 </p:sld>
 </file>
 
-<file path=ppt/slides/slide6.xml><?xml version="1.0" encoding="utf-8"?>
+<file path=ppt/slides/slide7.xml><?xml version="1.0" encoding="utf-8"?>
 <p:sld xmlns:a="http://schemas.openxmlformats.org/drawingml/2006/main" xmlns:r="http://schemas.openxmlformats.org/officeDocument/2006/relationships" xmlns:p="http://schemas.openxmlformats.org/presentationml/2006/main">
   <p:cSld>
     <p:spTree>

--- a/PPT/week4.pptx
+++ b/PPT/week4.pptx
@@ -5,16 +5,19 @@
     <p:sldMasterId id="2147483648" r:id="rId1"/>
   </p:sldMasterIdLst>
   <p:notesMasterIdLst>
-    <p:notesMasterId r:id="rId9"/>
+    <p:notesMasterId r:id="rId12"/>
   </p:notesMasterIdLst>
   <p:sldIdLst>
     <p:sldId id="262" r:id="rId2"/>
-    <p:sldId id="257" r:id="rId3"/>
-    <p:sldId id="267" r:id="rId4"/>
-    <p:sldId id="268" r:id="rId5"/>
-    <p:sldId id="261" r:id="rId6"/>
-    <p:sldId id="266" r:id="rId7"/>
-    <p:sldId id="265" r:id="rId8"/>
+    <p:sldId id="270" r:id="rId3"/>
+    <p:sldId id="271" r:id="rId4"/>
+    <p:sldId id="267" r:id="rId5"/>
+    <p:sldId id="272" r:id="rId6"/>
+    <p:sldId id="273" r:id="rId7"/>
+    <p:sldId id="261" r:id="rId8"/>
+    <p:sldId id="274" r:id="rId9"/>
+    <p:sldId id="266" r:id="rId10"/>
+    <p:sldId id="265" r:id="rId11"/>
   </p:sldIdLst>
   <p:sldSz cx="12192000" cy="6858000"/>
   <p:notesSz cx="6858000" cy="9144000"/>
@@ -544,7 +547,7 @@
     </p:spTree>
     <p:extLst>
       <p:ext uri="{BB962C8B-B14F-4D97-AF65-F5344CB8AC3E}">
-        <p14:creationId xmlns:p14="http://schemas.microsoft.com/office/powerpoint/2010/main" val="326142462"/>
+        <p14:creationId xmlns:p14="http://schemas.microsoft.com/office/powerpoint/2010/main" val="3269880061"/>
       </p:ext>
     </p:extLst>
   </p:cSld>
@@ -559,13 +562,7 @@
   <p:cSld>
     <p:spTree>
       <p:nvGrpSpPr>
-        <p:cNvPr id="1" name="">
-          <a:extLst>
-            <a:ext uri="{FF2B5EF4-FFF2-40B4-BE49-F238E27FC236}">
-              <a16:creationId xmlns:a16="http://schemas.microsoft.com/office/drawing/2014/main" id="{758872AD-0EA8-D7FF-FBD6-A5E1C71C12F0}"/>
-            </a:ext>
-          </a:extLst>
-        </p:cNvPr>
+        <p:cNvPr id="1" name=""/>
         <p:cNvGrpSpPr/>
         <p:nvPr/>
       </p:nvGrpSpPr>
@@ -579,13 +576,7 @@
       </p:grpSpPr>
       <p:sp>
         <p:nvSpPr>
-          <p:cNvPr id="2" name="슬라이드 이미지 개체 틀 1">
-            <a:extLst>
-              <a:ext uri="{FF2B5EF4-FFF2-40B4-BE49-F238E27FC236}">
-                <a16:creationId xmlns:a16="http://schemas.microsoft.com/office/drawing/2014/main" id="{E87FA157-32B3-0FB0-76A4-93B5A34AB1AB}"/>
-              </a:ext>
-            </a:extLst>
-          </p:cNvPr>
+          <p:cNvPr id="2" name="슬라이드 이미지 개체 틀 1"/>
           <p:cNvSpPr>
             <a:spLocks noGrp="1" noRot="1" noChangeAspect="1"/>
           </p:cNvSpPr>
@@ -597,13 +588,7 @@
       </p:sp>
       <p:sp>
         <p:nvSpPr>
-          <p:cNvPr id="3" name="슬라이드 노트 개체 틀 2">
-            <a:extLst>
-              <a:ext uri="{FF2B5EF4-FFF2-40B4-BE49-F238E27FC236}">
-                <a16:creationId xmlns:a16="http://schemas.microsoft.com/office/drawing/2014/main" id="{1D1A14B1-622C-D37C-8C1A-B6B3F9811C4F}"/>
-              </a:ext>
-            </a:extLst>
-          </p:cNvPr>
+          <p:cNvPr id="3" name="슬라이드 노트 개체 틀 2"/>
           <p:cNvSpPr>
             <a:spLocks noGrp="1"/>
           </p:cNvSpPr>
@@ -622,13 +607,7 @@
       </p:sp>
       <p:sp>
         <p:nvSpPr>
-          <p:cNvPr id="4" name="슬라이드 번호 개체 틀 3">
-            <a:extLst>
-              <a:ext uri="{FF2B5EF4-FFF2-40B4-BE49-F238E27FC236}">
-                <a16:creationId xmlns:a16="http://schemas.microsoft.com/office/drawing/2014/main" id="{18450B4E-17ED-D522-1838-815D8511A47C}"/>
-              </a:ext>
-            </a:extLst>
-          </p:cNvPr>
+          <p:cNvPr id="4" name="슬라이드 번호 개체 틀 3"/>
           <p:cNvSpPr>
             <a:spLocks noGrp="1"/>
           </p:cNvSpPr>
@@ -652,7 +631,7 @@
     </p:spTree>
     <p:extLst>
       <p:ext uri="{BB962C8B-B14F-4D97-AF65-F5344CB8AC3E}">
-        <p14:creationId xmlns:p14="http://schemas.microsoft.com/office/powerpoint/2010/main" val="4182343483"/>
+        <p14:creationId xmlns:p14="http://schemas.microsoft.com/office/powerpoint/2010/main" val="2175598460"/>
       </p:ext>
     </p:extLst>
   </p:cSld>
@@ -670,7 +649,7 @@
         <p:cNvPr id="1" name="">
           <a:extLst>
             <a:ext uri="{FF2B5EF4-FFF2-40B4-BE49-F238E27FC236}">
-              <a16:creationId xmlns:a16="http://schemas.microsoft.com/office/drawing/2014/main" id="{19A48E16-CDED-FD10-1719-F290DC758E70}"/>
+              <a16:creationId xmlns:a16="http://schemas.microsoft.com/office/drawing/2014/main" xmlns="" id="{758872AD-0EA8-D7FF-FBD6-A5E1C71C12F0}"/>
             </a:ext>
           </a:extLst>
         </p:cNvPr>
@@ -690,7 +669,7 @@
           <p:cNvPr id="2" name="슬라이드 이미지 개체 틀 1">
             <a:extLst>
               <a:ext uri="{FF2B5EF4-FFF2-40B4-BE49-F238E27FC236}">
-                <a16:creationId xmlns:a16="http://schemas.microsoft.com/office/drawing/2014/main" id="{9A1240DA-A7BB-AB12-A6E9-EF15BEA1BA59}"/>
+                <a16:creationId xmlns:a16="http://schemas.microsoft.com/office/drawing/2014/main" xmlns="" id="{E87FA157-32B3-0FB0-76A4-93B5A34AB1AB}"/>
               </a:ext>
             </a:extLst>
           </p:cNvPr>
@@ -708,7 +687,7 @@
           <p:cNvPr id="3" name="슬라이드 노트 개체 틀 2">
             <a:extLst>
               <a:ext uri="{FF2B5EF4-FFF2-40B4-BE49-F238E27FC236}">
-                <a16:creationId xmlns:a16="http://schemas.microsoft.com/office/drawing/2014/main" id="{07580D81-178E-8FEE-30D7-0D61CC639933}"/>
+                <a16:creationId xmlns:a16="http://schemas.microsoft.com/office/drawing/2014/main" xmlns="" id="{1D1A14B1-622C-D37C-8C1A-B6B3F9811C4F}"/>
               </a:ext>
             </a:extLst>
           </p:cNvPr>
@@ -733,7 +712,7 @@
           <p:cNvPr id="4" name="슬라이드 번호 개체 틀 3">
             <a:extLst>
               <a:ext uri="{FF2B5EF4-FFF2-40B4-BE49-F238E27FC236}">
-                <a16:creationId xmlns:a16="http://schemas.microsoft.com/office/drawing/2014/main" id="{027BA6A0-D020-0B15-FF2B-EE195810E0DE}"/>
+                <a16:creationId xmlns:a16="http://schemas.microsoft.com/office/drawing/2014/main" xmlns="" id="{18450B4E-17ED-D522-1838-815D8511A47C}"/>
               </a:ext>
             </a:extLst>
           </p:cNvPr>
@@ -760,7 +739,7 @@
     </p:spTree>
     <p:extLst>
       <p:ext uri="{BB962C8B-B14F-4D97-AF65-F5344CB8AC3E}">
-        <p14:creationId xmlns:p14="http://schemas.microsoft.com/office/powerpoint/2010/main" val="771913654"/>
+        <p14:creationId xmlns:p14="http://schemas.microsoft.com/office/powerpoint/2010/main" val="4182343483"/>
       </p:ext>
     </p:extLst>
   </p:cSld>
@@ -771,6 +750,222 @@
 </file>
 
 <file path=ppt/notesSlides/notesSlide4.xml><?xml version="1.0" encoding="utf-8"?>
+<p:notes xmlns:a="http://schemas.openxmlformats.org/drawingml/2006/main" xmlns:r="http://schemas.openxmlformats.org/officeDocument/2006/relationships" xmlns:p="http://schemas.openxmlformats.org/presentationml/2006/main">
+  <p:cSld>
+    <p:spTree>
+      <p:nvGrpSpPr>
+        <p:cNvPr id="1" name="">
+          <a:extLst>
+            <a:ext uri="{FF2B5EF4-FFF2-40B4-BE49-F238E27FC236}">
+              <a16:creationId xmlns:a16="http://schemas.microsoft.com/office/drawing/2014/main" xmlns="" id="{758872AD-0EA8-D7FF-FBD6-A5E1C71C12F0}"/>
+            </a:ext>
+          </a:extLst>
+        </p:cNvPr>
+        <p:cNvGrpSpPr/>
+        <p:nvPr/>
+      </p:nvGrpSpPr>
+      <p:grpSpPr>
+        <a:xfrm>
+          <a:off x="0" y="0"/>
+          <a:ext cx="0" cy="0"/>
+          <a:chOff x="0" y="0"/>
+          <a:chExt cx="0" cy="0"/>
+        </a:xfrm>
+      </p:grpSpPr>
+      <p:sp>
+        <p:nvSpPr>
+          <p:cNvPr id="2" name="슬라이드 이미지 개체 틀 1">
+            <a:extLst>
+              <a:ext uri="{FF2B5EF4-FFF2-40B4-BE49-F238E27FC236}">
+                <a16:creationId xmlns:a16="http://schemas.microsoft.com/office/drawing/2014/main" xmlns="" id="{E87FA157-32B3-0FB0-76A4-93B5A34AB1AB}"/>
+              </a:ext>
+            </a:extLst>
+          </p:cNvPr>
+          <p:cNvSpPr>
+            <a:spLocks noGrp="1" noRot="1" noChangeAspect="1"/>
+          </p:cNvSpPr>
+          <p:nvPr>
+            <p:ph type="sldImg"/>
+          </p:nvPr>
+        </p:nvSpPr>
+        <p:spPr/>
+      </p:sp>
+      <p:sp>
+        <p:nvSpPr>
+          <p:cNvPr id="3" name="슬라이드 노트 개체 틀 2">
+            <a:extLst>
+              <a:ext uri="{FF2B5EF4-FFF2-40B4-BE49-F238E27FC236}">
+                <a16:creationId xmlns:a16="http://schemas.microsoft.com/office/drawing/2014/main" xmlns="" id="{1D1A14B1-622C-D37C-8C1A-B6B3F9811C4F}"/>
+              </a:ext>
+            </a:extLst>
+          </p:cNvPr>
+          <p:cNvSpPr>
+            <a:spLocks noGrp="1"/>
+          </p:cNvSpPr>
+          <p:nvPr>
+            <p:ph type="body" idx="1"/>
+          </p:nvPr>
+        </p:nvSpPr>
+        <p:spPr/>
+        <p:txBody>
+          <a:bodyPr/>
+          <a:lstStyle/>
+          <a:p>
+            <a:endParaRPr lang="ko-KR" altLang="en-US" dirty="0"/>
+          </a:p>
+        </p:txBody>
+      </p:sp>
+      <p:sp>
+        <p:nvSpPr>
+          <p:cNvPr id="4" name="슬라이드 번호 개체 틀 3">
+            <a:extLst>
+              <a:ext uri="{FF2B5EF4-FFF2-40B4-BE49-F238E27FC236}">
+                <a16:creationId xmlns:a16="http://schemas.microsoft.com/office/drawing/2014/main" xmlns="" id="{18450B4E-17ED-D522-1838-815D8511A47C}"/>
+              </a:ext>
+            </a:extLst>
+          </p:cNvPr>
+          <p:cNvSpPr>
+            <a:spLocks noGrp="1"/>
+          </p:cNvSpPr>
+          <p:nvPr>
+            <p:ph type="sldNum" sz="quarter" idx="10"/>
+          </p:nvPr>
+        </p:nvSpPr>
+        <p:spPr/>
+        <p:txBody>
+          <a:bodyPr/>
+          <a:lstStyle/>
+          <a:p>
+            <a:fld id="{DB06232B-CCFA-4887-B271-B9E43E27353A}" type="slidenum">
+              <a:rPr lang="ko-KR" altLang="en-US" smtClean="0"/>
+              <a:t>5</a:t>
+            </a:fld>
+            <a:endParaRPr lang="ko-KR" altLang="en-US"/>
+          </a:p>
+        </p:txBody>
+      </p:sp>
+    </p:spTree>
+    <p:extLst>
+      <p:ext uri="{BB962C8B-B14F-4D97-AF65-F5344CB8AC3E}">
+        <p14:creationId xmlns:p14="http://schemas.microsoft.com/office/powerpoint/2010/main" val="1845335786"/>
+      </p:ext>
+    </p:extLst>
+  </p:cSld>
+  <p:clrMapOvr>
+    <a:masterClrMapping/>
+  </p:clrMapOvr>
+</p:notes>
+</file>
+
+<file path=ppt/notesSlides/notesSlide5.xml><?xml version="1.0" encoding="utf-8"?>
+<p:notes xmlns:a="http://schemas.openxmlformats.org/drawingml/2006/main" xmlns:r="http://schemas.openxmlformats.org/officeDocument/2006/relationships" xmlns:p="http://schemas.openxmlformats.org/presentationml/2006/main">
+  <p:cSld>
+    <p:spTree>
+      <p:nvGrpSpPr>
+        <p:cNvPr id="1" name="">
+          <a:extLst>
+            <a:ext uri="{FF2B5EF4-FFF2-40B4-BE49-F238E27FC236}">
+              <a16:creationId xmlns:a16="http://schemas.microsoft.com/office/drawing/2014/main" xmlns="" id="{758872AD-0EA8-D7FF-FBD6-A5E1C71C12F0}"/>
+            </a:ext>
+          </a:extLst>
+        </p:cNvPr>
+        <p:cNvGrpSpPr/>
+        <p:nvPr/>
+      </p:nvGrpSpPr>
+      <p:grpSpPr>
+        <a:xfrm>
+          <a:off x="0" y="0"/>
+          <a:ext cx="0" cy="0"/>
+          <a:chOff x="0" y="0"/>
+          <a:chExt cx="0" cy="0"/>
+        </a:xfrm>
+      </p:grpSpPr>
+      <p:sp>
+        <p:nvSpPr>
+          <p:cNvPr id="2" name="슬라이드 이미지 개체 틀 1">
+            <a:extLst>
+              <a:ext uri="{FF2B5EF4-FFF2-40B4-BE49-F238E27FC236}">
+                <a16:creationId xmlns:a16="http://schemas.microsoft.com/office/drawing/2014/main" xmlns="" id="{E87FA157-32B3-0FB0-76A4-93B5A34AB1AB}"/>
+              </a:ext>
+            </a:extLst>
+          </p:cNvPr>
+          <p:cNvSpPr>
+            <a:spLocks noGrp="1" noRot="1" noChangeAspect="1"/>
+          </p:cNvSpPr>
+          <p:nvPr>
+            <p:ph type="sldImg"/>
+          </p:nvPr>
+        </p:nvSpPr>
+        <p:spPr/>
+      </p:sp>
+      <p:sp>
+        <p:nvSpPr>
+          <p:cNvPr id="3" name="슬라이드 노트 개체 틀 2">
+            <a:extLst>
+              <a:ext uri="{FF2B5EF4-FFF2-40B4-BE49-F238E27FC236}">
+                <a16:creationId xmlns:a16="http://schemas.microsoft.com/office/drawing/2014/main" xmlns="" id="{1D1A14B1-622C-D37C-8C1A-B6B3F9811C4F}"/>
+              </a:ext>
+            </a:extLst>
+          </p:cNvPr>
+          <p:cNvSpPr>
+            <a:spLocks noGrp="1"/>
+          </p:cNvSpPr>
+          <p:nvPr>
+            <p:ph type="body" idx="1"/>
+          </p:nvPr>
+        </p:nvSpPr>
+        <p:spPr/>
+        <p:txBody>
+          <a:bodyPr/>
+          <a:lstStyle/>
+          <a:p>
+            <a:endParaRPr lang="ko-KR" altLang="en-US" dirty="0"/>
+          </a:p>
+        </p:txBody>
+      </p:sp>
+      <p:sp>
+        <p:nvSpPr>
+          <p:cNvPr id="4" name="슬라이드 번호 개체 틀 3">
+            <a:extLst>
+              <a:ext uri="{FF2B5EF4-FFF2-40B4-BE49-F238E27FC236}">
+                <a16:creationId xmlns:a16="http://schemas.microsoft.com/office/drawing/2014/main" xmlns="" id="{18450B4E-17ED-D522-1838-815D8511A47C}"/>
+              </a:ext>
+            </a:extLst>
+          </p:cNvPr>
+          <p:cNvSpPr>
+            <a:spLocks noGrp="1"/>
+          </p:cNvSpPr>
+          <p:nvPr>
+            <p:ph type="sldNum" sz="quarter" idx="10"/>
+          </p:nvPr>
+        </p:nvSpPr>
+        <p:spPr/>
+        <p:txBody>
+          <a:bodyPr/>
+          <a:lstStyle/>
+          <a:p>
+            <a:fld id="{DB06232B-CCFA-4887-B271-B9E43E27353A}" type="slidenum">
+              <a:rPr lang="ko-KR" altLang="en-US" smtClean="0"/>
+              <a:t>6</a:t>
+            </a:fld>
+            <a:endParaRPr lang="ko-KR" altLang="en-US"/>
+          </a:p>
+        </p:txBody>
+      </p:sp>
+    </p:spTree>
+    <p:extLst>
+      <p:ext uri="{BB962C8B-B14F-4D97-AF65-F5344CB8AC3E}">
+        <p14:creationId xmlns:p14="http://schemas.microsoft.com/office/powerpoint/2010/main" val="1290832060"/>
+      </p:ext>
+    </p:extLst>
+  </p:cSld>
+  <p:clrMapOvr>
+    <a:masterClrMapping/>
+  </p:clrMapOvr>
+</p:notes>
+</file>
+
+<file path=ppt/notesSlides/notesSlide6.xml><?xml version="1.0" encoding="utf-8"?>
 <p:notes xmlns:a="http://schemas.openxmlformats.org/drawingml/2006/main" xmlns:r="http://schemas.openxmlformats.org/officeDocument/2006/relationships" xmlns:p="http://schemas.openxmlformats.org/presentationml/2006/main">
   <p:cSld>
     <p:spTree>
@@ -928,7 +1123,7 @@
           <a:p>
             <a:fld id="{0F03AB99-662C-46EC-B86C-F2E227D3EFAD}" type="slidenum">
               <a:rPr lang="ko-KR" altLang="en-US" smtClean="0"/>
-              <a:t>7</a:t>
+              <a:t>10</a:t>
             </a:fld>
             <a:endParaRPr lang="ko-KR" altLang="en-US"/>
           </a:p>
@@ -969,7 +1164,7 @@
           <p:cNvPr id="2" name="제목 1">
             <a:extLst>
               <a:ext uri="{FF2B5EF4-FFF2-40B4-BE49-F238E27FC236}">
-                <a16:creationId xmlns:a16="http://schemas.microsoft.com/office/drawing/2014/main" id="{47C6A88D-EDAF-CEC2-712F-FA6A7E4FF53C}"/>
+                <a16:creationId xmlns:a16="http://schemas.microsoft.com/office/drawing/2014/main" xmlns="" id="{47C6A88D-EDAF-CEC2-712F-FA6A7E4FF53C}"/>
               </a:ext>
             </a:extLst>
           </p:cNvPr>
@@ -1006,7 +1201,7 @@
           <p:cNvPr id="3" name="부제목 2">
             <a:extLst>
               <a:ext uri="{FF2B5EF4-FFF2-40B4-BE49-F238E27FC236}">
-                <a16:creationId xmlns:a16="http://schemas.microsoft.com/office/drawing/2014/main" id="{1F7A10E8-4E5D-A611-E577-EBA5676A507E}"/>
+                <a16:creationId xmlns:a16="http://schemas.microsoft.com/office/drawing/2014/main" xmlns="" id="{1F7A10E8-4E5D-A611-E577-EBA5676A507E}"/>
               </a:ext>
             </a:extLst>
           </p:cNvPr>
@@ -1076,7 +1271,7 @@
           <p:cNvPr id="4" name="날짜 개체 틀 3">
             <a:extLst>
               <a:ext uri="{FF2B5EF4-FFF2-40B4-BE49-F238E27FC236}">
-                <a16:creationId xmlns:a16="http://schemas.microsoft.com/office/drawing/2014/main" id="{FA4EF1CD-FA03-944B-0EC0-2AABE3B0C471}"/>
+                <a16:creationId xmlns:a16="http://schemas.microsoft.com/office/drawing/2014/main" xmlns="" id="{FA4EF1CD-FA03-944B-0EC0-2AABE3B0C471}"/>
               </a:ext>
             </a:extLst>
           </p:cNvPr>
@@ -1105,7 +1300,7 @@
           <p:cNvPr id="5" name="바닥글 개체 틀 4">
             <a:extLst>
               <a:ext uri="{FF2B5EF4-FFF2-40B4-BE49-F238E27FC236}">
-                <a16:creationId xmlns:a16="http://schemas.microsoft.com/office/drawing/2014/main" id="{D7E1904F-F41F-7809-481D-7E79FCD2132E}"/>
+                <a16:creationId xmlns:a16="http://schemas.microsoft.com/office/drawing/2014/main" xmlns="" id="{D7E1904F-F41F-7809-481D-7E79FCD2132E}"/>
               </a:ext>
             </a:extLst>
           </p:cNvPr>
@@ -1130,7 +1325,7 @@
           <p:cNvPr id="6" name="슬라이드 번호 개체 틀 5">
             <a:extLst>
               <a:ext uri="{FF2B5EF4-FFF2-40B4-BE49-F238E27FC236}">
-                <a16:creationId xmlns:a16="http://schemas.microsoft.com/office/drawing/2014/main" id="{46C721DE-9DEE-BACB-B354-8E260F43215D}"/>
+                <a16:creationId xmlns:a16="http://schemas.microsoft.com/office/drawing/2014/main" xmlns="" id="{46C721DE-9DEE-BACB-B354-8E260F43215D}"/>
               </a:ext>
             </a:extLst>
           </p:cNvPr>
@@ -1189,7 +1384,7 @@
           <p:cNvPr id="2" name="제목 1">
             <a:extLst>
               <a:ext uri="{FF2B5EF4-FFF2-40B4-BE49-F238E27FC236}">
-                <a16:creationId xmlns:a16="http://schemas.microsoft.com/office/drawing/2014/main" id="{8EC6E50E-2954-B290-1563-C4936B9E8431}"/>
+                <a16:creationId xmlns:a16="http://schemas.microsoft.com/office/drawing/2014/main" xmlns="" id="{8EC6E50E-2954-B290-1563-C4936B9E8431}"/>
               </a:ext>
             </a:extLst>
           </p:cNvPr>
@@ -1217,7 +1412,7 @@
           <p:cNvPr id="3" name="세로 텍스트 개체 틀 2">
             <a:extLst>
               <a:ext uri="{FF2B5EF4-FFF2-40B4-BE49-F238E27FC236}">
-                <a16:creationId xmlns:a16="http://schemas.microsoft.com/office/drawing/2014/main" id="{5B6A99E4-1414-E268-7B72-A4C896708AE3}"/>
+                <a16:creationId xmlns:a16="http://schemas.microsoft.com/office/drawing/2014/main" xmlns="" id="{5B6A99E4-1414-E268-7B72-A4C896708AE3}"/>
               </a:ext>
             </a:extLst>
           </p:cNvPr>
@@ -1274,7 +1469,7 @@
           <p:cNvPr id="4" name="날짜 개체 틀 3">
             <a:extLst>
               <a:ext uri="{FF2B5EF4-FFF2-40B4-BE49-F238E27FC236}">
-                <a16:creationId xmlns:a16="http://schemas.microsoft.com/office/drawing/2014/main" id="{3A9BB3C2-1FA4-4151-9ADB-996284F1BDE2}"/>
+                <a16:creationId xmlns:a16="http://schemas.microsoft.com/office/drawing/2014/main" xmlns="" id="{3A9BB3C2-1FA4-4151-9ADB-996284F1BDE2}"/>
               </a:ext>
             </a:extLst>
           </p:cNvPr>
@@ -1303,7 +1498,7 @@
           <p:cNvPr id="5" name="바닥글 개체 틀 4">
             <a:extLst>
               <a:ext uri="{FF2B5EF4-FFF2-40B4-BE49-F238E27FC236}">
-                <a16:creationId xmlns:a16="http://schemas.microsoft.com/office/drawing/2014/main" id="{8A27C81A-BE4E-27CE-6CE4-0AE5876D470A}"/>
+                <a16:creationId xmlns:a16="http://schemas.microsoft.com/office/drawing/2014/main" xmlns="" id="{8A27C81A-BE4E-27CE-6CE4-0AE5876D470A}"/>
               </a:ext>
             </a:extLst>
           </p:cNvPr>
@@ -1328,7 +1523,7 @@
           <p:cNvPr id="6" name="슬라이드 번호 개체 틀 5">
             <a:extLst>
               <a:ext uri="{FF2B5EF4-FFF2-40B4-BE49-F238E27FC236}">
-                <a16:creationId xmlns:a16="http://schemas.microsoft.com/office/drawing/2014/main" id="{B4E3C814-C417-2E3F-F02B-1B9ED6941FBD}"/>
+                <a16:creationId xmlns:a16="http://schemas.microsoft.com/office/drawing/2014/main" xmlns="" id="{B4E3C814-C417-2E3F-F02B-1B9ED6941FBD}"/>
               </a:ext>
             </a:extLst>
           </p:cNvPr>
@@ -1387,7 +1582,7 @@
           <p:cNvPr id="2" name="세로 제목 1">
             <a:extLst>
               <a:ext uri="{FF2B5EF4-FFF2-40B4-BE49-F238E27FC236}">
-                <a16:creationId xmlns:a16="http://schemas.microsoft.com/office/drawing/2014/main" id="{AC1D687F-54E9-57A3-FDA2-5A8060E79A80}"/>
+                <a16:creationId xmlns:a16="http://schemas.microsoft.com/office/drawing/2014/main" xmlns="" id="{AC1D687F-54E9-57A3-FDA2-5A8060E79A80}"/>
               </a:ext>
             </a:extLst>
           </p:cNvPr>
@@ -1420,7 +1615,7 @@
           <p:cNvPr id="3" name="세로 텍스트 개체 틀 2">
             <a:extLst>
               <a:ext uri="{FF2B5EF4-FFF2-40B4-BE49-F238E27FC236}">
-                <a16:creationId xmlns:a16="http://schemas.microsoft.com/office/drawing/2014/main" id="{BC846A14-940B-8FE8-A769-3DABAE11AD25}"/>
+                <a16:creationId xmlns:a16="http://schemas.microsoft.com/office/drawing/2014/main" xmlns="" id="{BC846A14-940B-8FE8-A769-3DABAE11AD25}"/>
               </a:ext>
             </a:extLst>
           </p:cNvPr>
@@ -1482,7 +1677,7 @@
           <p:cNvPr id="4" name="날짜 개체 틀 3">
             <a:extLst>
               <a:ext uri="{FF2B5EF4-FFF2-40B4-BE49-F238E27FC236}">
-                <a16:creationId xmlns:a16="http://schemas.microsoft.com/office/drawing/2014/main" id="{393732A3-4427-5A76-3A9C-DBE87A4364DD}"/>
+                <a16:creationId xmlns:a16="http://schemas.microsoft.com/office/drawing/2014/main" xmlns="" id="{393732A3-4427-5A76-3A9C-DBE87A4364DD}"/>
               </a:ext>
             </a:extLst>
           </p:cNvPr>
@@ -1511,7 +1706,7 @@
           <p:cNvPr id="5" name="바닥글 개체 틀 4">
             <a:extLst>
               <a:ext uri="{FF2B5EF4-FFF2-40B4-BE49-F238E27FC236}">
-                <a16:creationId xmlns:a16="http://schemas.microsoft.com/office/drawing/2014/main" id="{16A5B672-F383-0FF5-2D72-72E1E7F0F0D3}"/>
+                <a16:creationId xmlns:a16="http://schemas.microsoft.com/office/drawing/2014/main" xmlns="" id="{16A5B672-F383-0FF5-2D72-72E1E7F0F0D3}"/>
               </a:ext>
             </a:extLst>
           </p:cNvPr>
@@ -1536,7 +1731,7 @@
           <p:cNvPr id="6" name="슬라이드 번호 개체 틀 5">
             <a:extLst>
               <a:ext uri="{FF2B5EF4-FFF2-40B4-BE49-F238E27FC236}">
-                <a16:creationId xmlns:a16="http://schemas.microsoft.com/office/drawing/2014/main" id="{DE28928A-9906-D889-A8B7-B97D729CDB76}"/>
+                <a16:creationId xmlns:a16="http://schemas.microsoft.com/office/drawing/2014/main" xmlns="" id="{DE28928A-9906-D889-A8B7-B97D729CDB76}"/>
               </a:ext>
             </a:extLst>
           </p:cNvPr>
@@ -1595,7 +1790,7 @@
           <p:cNvPr id="2" name="제목 1">
             <a:extLst>
               <a:ext uri="{FF2B5EF4-FFF2-40B4-BE49-F238E27FC236}">
-                <a16:creationId xmlns:a16="http://schemas.microsoft.com/office/drawing/2014/main" id="{54F5793F-94FE-56B0-E0CB-A317DA7FB4BC}"/>
+                <a16:creationId xmlns:a16="http://schemas.microsoft.com/office/drawing/2014/main" xmlns="" id="{54F5793F-94FE-56B0-E0CB-A317DA7FB4BC}"/>
               </a:ext>
             </a:extLst>
           </p:cNvPr>
@@ -1623,7 +1818,7 @@
           <p:cNvPr id="3" name="내용 개체 틀 2">
             <a:extLst>
               <a:ext uri="{FF2B5EF4-FFF2-40B4-BE49-F238E27FC236}">
-                <a16:creationId xmlns:a16="http://schemas.microsoft.com/office/drawing/2014/main" id="{BFAF79B8-2AD1-69C6-D4D5-21827C6802F8}"/>
+                <a16:creationId xmlns:a16="http://schemas.microsoft.com/office/drawing/2014/main" xmlns="" id="{BFAF79B8-2AD1-69C6-D4D5-21827C6802F8}"/>
               </a:ext>
             </a:extLst>
           </p:cNvPr>
@@ -1680,7 +1875,7 @@
           <p:cNvPr id="4" name="날짜 개체 틀 3">
             <a:extLst>
               <a:ext uri="{FF2B5EF4-FFF2-40B4-BE49-F238E27FC236}">
-                <a16:creationId xmlns:a16="http://schemas.microsoft.com/office/drawing/2014/main" id="{6718AF63-4F49-82B6-24FC-BB457FC964FC}"/>
+                <a16:creationId xmlns:a16="http://schemas.microsoft.com/office/drawing/2014/main" xmlns="" id="{6718AF63-4F49-82B6-24FC-BB457FC964FC}"/>
               </a:ext>
             </a:extLst>
           </p:cNvPr>
@@ -1709,7 +1904,7 @@
           <p:cNvPr id="5" name="바닥글 개체 틀 4">
             <a:extLst>
               <a:ext uri="{FF2B5EF4-FFF2-40B4-BE49-F238E27FC236}">
-                <a16:creationId xmlns:a16="http://schemas.microsoft.com/office/drawing/2014/main" id="{AA45FF19-25D7-1FF3-E311-2C2E07B26764}"/>
+                <a16:creationId xmlns:a16="http://schemas.microsoft.com/office/drawing/2014/main" xmlns="" id="{AA45FF19-25D7-1FF3-E311-2C2E07B26764}"/>
               </a:ext>
             </a:extLst>
           </p:cNvPr>
@@ -1734,7 +1929,7 @@
           <p:cNvPr id="6" name="슬라이드 번호 개체 틀 5">
             <a:extLst>
               <a:ext uri="{FF2B5EF4-FFF2-40B4-BE49-F238E27FC236}">
-                <a16:creationId xmlns:a16="http://schemas.microsoft.com/office/drawing/2014/main" id="{6F43D8BF-52A4-97EB-612B-F9899664EFD5}"/>
+                <a16:creationId xmlns:a16="http://schemas.microsoft.com/office/drawing/2014/main" xmlns="" id="{6F43D8BF-52A4-97EB-612B-F9899664EFD5}"/>
               </a:ext>
             </a:extLst>
           </p:cNvPr>
@@ -1793,7 +1988,7 @@
           <p:cNvPr id="2" name="제목 1">
             <a:extLst>
               <a:ext uri="{FF2B5EF4-FFF2-40B4-BE49-F238E27FC236}">
-                <a16:creationId xmlns:a16="http://schemas.microsoft.com/office/drawing/2014/main" id="{1EB95909-78E9-5BAC-68EA-7DCA2A1271F7}"/>
+                <a16:creationId xmlns:a16="http://schemas.microsoft.com/office/drawing/2014/main" xmlns="" id="{1EB95909-78E9-5BAC-68EA-7DCA2A1271F7}"/>
               </a:ext>
             </a:extLst>
           </p:cNvPr>
@@ -1830,7 +2025,7 @@
           <p:cNvPr id="3" name="텍스트 개체 틀 2">
             <a:extLst>
               <a:ext uri="{FF2B5EF4-FFF2-40B4-BE49-F238E27FC236}">
-                <a16:creationId xmlns:a16="http://schemas.microsoft.com/office/drawing/2014/main" id="{D6B98DAF-2A47-3ECD-807C-96FB70CF9854}"/>
+                <a16:creationId xmlns:a16="http://schemas.microsoft.com/office/drawing/2014/main" xmlns="" id="{D6B98DAF-2A47-3ECD-807C-96FB70CF9854}"/>
               </a:ext>
             </a:extLst>
           </p:cNvPr>
@@ -1955,7 +2150,7 @@
           <p:cNvPr id="4" name="날짜 개체 틀 3">
             <a:extLst>
               <a:ext uri="{FF2B5EF4-FFF2-40B4-BE49-F238E27FC236}">
-                <a16:creationId xmlns:a16="http://schemas.microsoft.com/office/drawing/2014/main" id="{A3AD9670-C268-56FC-281A-FE1F59541EB9}"/>
+                <a16:creationId xmlns:a16="http://schemas.microsoft.com/office/drawing/2014/main" xmlns="" id="{A3AD9670-C268-56FC-281A-FE1F59541EB9}"/>
               </a:ext>
             </a:extLst>
           </p:cNvPr>
@@ -1984,7 +2179,7 @@
           <p:cNvPr id="5" name="바닥글 개체 틀 4">
             <a:extLst>
               <a:ext uri="{FF2B5EF4-FFF2-40B4-BE49-F238E27FC236}">
-                <a16:creationId xmlns:a16="http://schemas.microsoft.com/office/drawing/2014/main" id="{A4946F37-FE38-E38E-7339-DC6E4EFA5B3B}"/>
+                <a16:creationId xmlns:a16="http://schemas.microsoft.com/office/drawing/2014/main" xmlns="" id="{A4946F37-FE38-E38E-7339-DC6E4EFA5B3B}"/>
               </a:ext>
             </a:extLst>
           </p:cNvPr>
@@ -2009,7 +2204,7 @@
           <p:cNvPr id="6" name="슬라이드 번호 개체 틀 5">
             <a:extLst>
               <a:ext uri="{FF2B5EF4-FFF2-40B4-BE49-F238E27FC236}">
-                <a16:creationId xmlns:a16="http://schemas.microsoft.com/office/drawing/2014/main" id="{7C17C39B-6348-28CC-59AF-B1A65BE2F149}"/>
+                <a16:creationId xmlns:a16="http://schemas.microsoft.com/office/drawing/2014/main" xmlns="" id="{7C17C39B-6348-28CC-59AF-B1A65BE2F149}"/>
               </a:ext>
             </a:extLst>
           </p:cNvPr>
@@ -2068,7 +2263,7 @@
           <p:cNvPr id="2" name="제목 1">
             <a:extLst>
               <a:ext uri="{FF2B5EF4-FFF2-40B4-BE49-F238E27FC236}">
-                <a16:creationId xmlns:a16="http://schemas.microsoft.com/office/drawing/2014/main" id="{0D0EFA0F-10D7-865F-1370-4EA34C786709}"/>
+                <a16:creationId xmlns:a16="http://schemas.microsoft.com/office/drawing/2014/main" xmlns="" id="{0D0EFA0F-10D7-865F-1370-4EA34C786709}"/>
               </a:ext>
             </a:extLst>
           </p:cNvPr>
@@ -2096,7 +2291,7 @@
           <p:cNvPr id="3" name="내용 개체 틀 2">
             <a:extLst>
               <a:ext uri="{FF2B5EF4-FFF2-40B4-BE49-F238E27FC236}">
-                <a16:creationId xmlns:a16="http://schemas.microsoft.com/office/drawing/2014/main" id="{0498CDB5-9D2B-5F68-9DD8-ED20454B1044}"/>
+                <a16:creationId xmlns:a16="http://schemas.microsoft.com/office/drawing/2014/main" xmlns="" id="{0498CDB5-9D2B-5F68-9DD8-ED20454B1044}"/>
               </a:ext>
             </a:extLst>
           </p:cNvPr>
@@ -2158,7 +2353,7 @@
           <p:cNvPr id="4" name="내용 개체 틀 3">
             <a:extLst>
               <a:ext uri="{FF2B5EF4-FFF2-40B4-BE49-F238E27FC236}">
-                <a16:creationId xmlns:a16="http://schemas.microsoft.com/office/drawing/2014/main" id="{570EB1B7-8EDE-2794-EA53-E0C1972FAF1A}"/>
+                <a16:creationId xmlns:a16="http://schemas.microsoft.com/office/drawing/2014/main" xmlns="" id="{570EB1B7-8EDE-2794-EA53-E0C1972FAF1A}"/>
               </a:ext>
             </a:extLst>
           </p:cNvPr>
@@ -2220,7 +2415,7 @@
           <p:cNvPr id="5" name="날짜 개체 틀 4">
             <a:extLst>
               <a:ext uri="{FF2B5EF4-FFF2-40B4-BE49-F238E27FC236}">
-                <a16:creationId xmlns:a16="http://schemas.microsoft.com/office/drawing/2014/main" id="{31FBCFA4-CF51-706E-F9F0-8B66CA1A0E1B}"/>
+                <a16:creationId xmlns:a16="http://schemas.microsoft.com/office/drawing/2014/main" xmlns="" id="{31FBCFA4-CF51-706E-F9F0-8B66CA1A0E1B}"/>
               </a:ext>
             </a:extLst>
           </p:cNvPr>
@@ -2249,7 +2444,7 @@
           <p:cNvPr id="6" name="바닥글 개체 틀 5">
             <a:extLst>
               <a:ext uri="{FF2B5EF4-FFF2-40B4-BE49-F238E27FC236}">
-                <a16:creationId xmlns:a16="http://schemas.microsoft.com/office/drawing/2014/main" id="{FD56636A-469F-7FE9-480E-955BCC0E6D70}"/>
+                <a16:creationId xmlns:a16="http://schemas.microsoft.com/office/drawing/2014/main" xmlns="" id="{FD56636A-469F-7FE9-480E-955BCC0E6D70}"/>
               </a:ext>
             </a:extLst>
           </p:cNvPr>
@@ -2274,7 +2469,7 @@
           <p:cNvPr id="7" name="슬라이드 번호 개체 틀 6">
             <a:extLst>
               <a:ext uri="{FF2B5EF4-FFF2-40B4-BE49-F238E27FC236}">
-                <a16:creationId xmlns:a16="http://schemas.microsoft.com/office/drawing/2014/main" id="{3971D272-167D-EE36-E685-CD8BFE8CC9A6}"/>
+                <a16:creationId xmlns:a16="http://schemas.microsoft.com/office/drawing/2014/main" xmlns="" id="{3971D272-167D-EE36-E685-CD8BFE8CC9A6}"/>
               </a:ext>
             </a:extLst>
           </p:cNvPr>
@@ -2333,7 +2528,7 @@
           <p:cNvPr id="2" name="제목 1">
             <a:extLst>
               <a:ext uri="{FF2B5EF4-FFF2-40B4-BE49-F238E27FC236}">
-                <a16:creationId xmlns:a16="http://schemas.microsoft.com/office/drawing/2014/main" id="{9AC7230E-A2F3-4027-B6F6-9C5C289B1314}"/>
+                <a16:creationId xmlns:a16="http://schemas.microsoft.com/office/drawing/2014/main" xmlns="" id="{9AC7230E-A2F3-4027-B6F6-9C5C289B1314}"/>
               </a:ext>
             </a:extLst>
           </p:cNvPr>
@@ -2366,7 +2561,7 @@
           <p:cNvPr id="3" name="텍스트 개체 틀 2">
             <a:extLst>
               <a:ext uri="{FF2B5EF4-FFF2-40B4-BE49-F238E27FC236}">
-                <a16:creationId xmlns:a16="http://schemas.microsoft.com/office/drawing/2014/main" id="{0C685356-7419-AD93-377A-8D9A0293423E}"/>
+                <a16:creationId xmlns:a16="http://schemas.microsoft.com/office/drawing/2014/main" xmlns="" id="{0C685356-7419-AD93-377A-8D9A0293423E}"/>
               </a:ext>
             </a:extLst>
           </p:cNvPr>
@@ -2437,7 +2632,7 @@
           <p:cNvPr id="4" name="내용 개체 틀 3">
             <a:extLst>
               <a:ext uri="{FF2B5EF4-FFF2-40B4-BE49-F238E27FC236}">
-                <a16:creationId xmlns:a16="http://schemas.microsoft.com/office/drawing/2014/main" id="{CC36E6CA-94A6-3223-C91A-F6E9648C8EAD}"/>
+                <a16:creationId xmlns:a16="http://schemas.microsoft.com/office/drawing/2014/main" xmlns="" id="{CC36E6CA-94A6-3223-C91A-F6E9648C8EAD}"/>
               </a:ext>
             </a:extLst>
           </p:cNvPr>
@@ -2499,7 +2694,7 @@
           <p:cNvPr id="5" name="텍스트 개체 틀 4">
             <a:extLst>
               <a:ext uri="{FF2B5EF4-FFF2-40B4-BE49-F238E27FC236}">
-                <a16:creationId xmlns:a16="http://schemas.microsoft.com/office/drawing/2014/main" id="{F4DFD790-787A-88A3-300F-C173DAD2E1AF}"/>
+                <a16:creationId xmlns:a16="http://schemas.microsoft.com/office/drawing/2014/main" xmlns="" id="{F4DFD790-787A-88A3-300F-C173DAD2E1AF}"/>
               </a:ext>
             </a:extLst>
           </p:cNvPr>
@@ -2570,7 +2765,7 @@
           <p:cNvPr id="6" name="내용 개체 틀 5">
             <a:extLst>
               <a:ext uri="{FF2B5EF4-FFF2-40B4-BE49-F238E27FC236}">
-                <a16:creationId xmlns:a16="http://schemas.microsoft.com/office/drawing/2014/main" id="{012AE83D-2990-A6E4-CC9C-06D342A67C09}"/>
+                <a16:creationId xmlns:a16="http://schemas.microsoft.com/office/drawing/2014/main" xmlns="" id="{012AE83D-2990-A6E4-CC9C-06D342A67C09}"/>
               </a:ext>
             </a:extLst>
           </p:cNvPr>
@@ -2632,7 +2827,7 @@
           <p:cNvPr id="7" name="날짜 개체 틀 6">
             <a:extLst>
               <a:ext uri="{FF2B5EF4-FFF2-40B4-BE49-F238E27FC236}">
-                <a16:creationId xmlns:a16="http://schemas.microsoft.com/office/drawing/2014/main" id="{3C11F8C3-5AD3-730B-8ADB-304185DAA67E}"/>
+                <a16:creationId xmlns:a16="http://schemas.microsoft.com/office/drawing/2014/main" xmlns="" id="{3C11F8C3-5AD3-730B-8ADB-304185DAA67E}"/>
               </a:ext>
             </a:extLst>
           </p:cNvPr>
@@ -2661,7 +2856,7 @@
           <p:cNvPr id="8" name="바닥글 개체 틀 7">
             <a:extLst>
               <a:ext uri="{FF2B5EF4-FFF2-40B4-BE49-F238E27FC236}">
-                <a16:creationId xmlns:a16="http://schemas.microsoft.com/office/drawing/2014/main" id="{EF36ABA7-53C4-C11E-CC9D-F5E59BDBBD9B}"/>
+                <a16:creationId xmlns:a16="http://schemas.microsoft.com/office/drawing/2014/main" xmlns="" id="{EF36ABA7-53C4-C11E-CC9D-F5E59BDBBD9B}"/>
               </a:ext>
             </a:extLst>
           </p:cNvPr>
@@ -2686,7 +2881,7 @@
           <p:cNvPr id="9" name="슬라이드 번호 개체 틀 8">
             <a:extLst>
               <a:ext uri="{FF2B5EF4-FFF2-40B4-BE49-F238E27FC236}">
-                <a16:creationId xmlns:a16="http://schemas.microsoft.com/office/drawing/2014/main" id="{5E29E145-D4AE-F9FB-A218-47B323C43E03}"/>
+                <a16:creationId xmlns:a16="http://schemas.microsoft.com/office/drawing/2014/main" xmlns="" id="{5E29E145-D4AE-F9FB-A218-47B323C43E03}"/>
               </a:ext>
             </a:extLst>
           </p:cNvPr>
@@ -2745,7 +2940,7 @@
           <p:cNvPr id="2" name="제목 1">
             <a:extLst>
               <a:ext uri="{FF2B5EF4-FFF2-40B4-BE49-F238E27FC236}">
-                <a16:creationId xmlns:a16="http://schemas.microsoft.com/office/drawing/2014/main" id="{13D855E6-5AD7-B657-346A-38D87715A5E7}"/>
+                <a16:creationId xmlns:a16="http://schemas.microsoft.com/office/drawing/2014/main" xmlns="" id="{13D855E6-5AD7-B657-346A-38D87715A5E7}"/>
               </a:ext>
             </a:extLst>
           </p:cNvPr>
@@ -2773,7 +2968,7 @@
           <p:cNvPr id="3" name="날짜 개체 틀 2">
             <a:extLst>
               <a:ext uri="{FF2B5EF4-FFF2-40B4-BE49-F238E27FC236}">
-                <a16:creationId xmlns:a16="http://schemas.microsoft.com/office/drawing/2014/main" id="{F3052B06-09E1-1CD0-A032-AEB30F69A0E7}"/>
+                <a16:creationId xmlns:a16="http://schemas.microsoft.com/office/drawing/2014/main" xmlns="" id="{F3052B06-09E1-1CD0-A032-AEB30F69A0E7}"/>
               </a:ext>
             </a:extLst>
           </p:cNvPr>
@@ -2802,7 +2997,7 @@
           <p:cNvPr id="4" name="바닥글 개체 틀 3">
             <a:extLst>
               <a:ext uri="{FF2B5EF4-FFF2-40B4-BE49-F238E27FC236}">
-                <a16:creationId xmlns:a16="http://schemas.microsoft.com/office/drawing/2014/main" id="{DE18691A-8582-987D-DF06-E6D8B618E7BB}"/>
+                <a16:creationId xmlns:a16="http://schemas.microsoft.com/office/drawing/2014/main" xmlns="" id="{DE18691A-8582-987D-DF06-E6D8B618E7BB}"/>
               </a:ext>
             </a:extLst>
           </p:cNvPr>
@@ -2827,7 +3022,7 @@
           <p:cNvPr id="5" name="슬라이드 번호 개체 틀 4">
             <a:extLst>
               <a:ext uri="{FF2B5EF4-FFF2-40B4-BE49-F238E27FC236}">
-                <a16:creationId xmlns:a16="http://schemas.microsoft.com/office/drawing/2014/main" id="{6F997ACE-7D00-7B35-1F16-F56C5450EF85}"/>
+                <a16:creationId xmlns:a16="http://schemas.microsoft.com/office/drawing/2014/main" xmlns="" id="{6F997ACE-7D00-7B35-1F16-F56C5450EF85}"/>
               </a:ext>
             </a:extLst>
           </p:cNvPr>
@@ -2886,7 +3081,7 @@
           <p:cNvPr id="2" name="날짜 개체 틀 1">
             <a:extLst>
               <a:ext uri="{FF2B5EF4-FFF2-40B4-BE49-F238E27FC236}">
-                <a16:creationId xmlns:a16="http://schemas.microsoft.com/office/drawing/2014/main" id="{2703D88F-9D50-1761-731E-68DD1FC6B740}"/>
+                <a16:creationId xmlns:a16="http://schemas.microsoft.com/office/drawing/2014/main" xmlns="" id="{2703D88F-9D50-1761-731E-68DD1FC6B740}"/>
               </a:ext>
             </a:extLst>
           </p:cNvPr>
@@ -2915,7 +3110,7 @@
           <p:cNvPr id="3" name="바닥글 개체 틀 2">
             <a:extLst>
               <a:ext uri="{FF2B5EF4-FFF2-40B4-BE49-F238E27FC236}">
-                <a16:creationId xmlns:a16="http://schemas.microsoft.com/office/drawing/2014/main" id="{70793086-842E-7906-6019-4284A9E469F4}"/>
+                <a16:creationId xmlns:a16="http://schemas.microsoft.com/office/drawing/2014/main" xmlns="" id="{70793086-842E-7906-6019-4284A9E469F4}"/>
               </a:ext>
             </a:extLst>
           </p:cNvPr>
@@ -2940,7 +3135,7 @@
           <p:cNvPr id="4" name="슬라이드 번호 개체 틀 3">
             <a:extLst>
               <a:ext uri="{FF2B5EF4-FFF2-40B4-BE49-F238E27FC236}">
-                <a16:creationId xmlns:a16="http://schemas.microsoft.com/office/drawing/2014/main" id="{6D4FE3DE-7F26-4352-74EE-A720C7AF5564}"/>
+                <a16:creationId xmlns:a16="http://schemas.microsoft.com/office/drawing/2014/main" xmlns="" id="{6D4FE3DE-7F26-4352-74EE-A720C7AF5564}"/>
               </a:ext>
             </a:extLst>
           </p:cNvPr>
@@ -2999,7 +3194,7 @@
           <p:cNvPr id="2" name="제목 1">
             <a:extLst>
               <a:ext uri="{FF2B5EF4-FFF2-40B4-BE49-F238E27FC236}">
-                <a16:creationId xmlns:a16="http://schemas.microsoft.com/office/drawing/2014/main" id="{0AFB6F63-D5C7-EB4A-A651-8DA5561AD0DC}"/>
+                <a16:creationId xmlns:a16="http://schemas.microsoft.com/office/drawing/2014/main" xmlns="" id="{0AFB6F63-D5C7-EB4A-A651-8DA5561AD0DC}"/>
               </a:ext>
             </a:extLst>
           </p:cNvPr>
@@ -3036,7 +3231,7 @@
           <p:cNvPr id="3" name="내용 개체 틀 2">
             <a:extLst>
               <a:ext uri="{FF2B5EF4-FFF2-40B4-BE49-F238E27FC236}">
-                <a16:creationId xmlns:a16="http://schemas.microsoft.com/office/drawing/2014/main" id="{2000FB2D-0CF3-1A3C-E704-F8CA96C2D5D5}"/>
+                <a16:creationId xmlns:a16="http://schemas.microsoft.com/office/drawing/2014/main" xmlns="" id="{2000FB2D-0CF3-1A3C-E704-F8CA96C2D5D5}"/>
               </a:ext>
             </a:extLst>
           </p:cNvPr>
@@ -3126,7 +3321,7 @@
           <p:cNvPr id="4" name="텍스트 개체 틀 3">
             <a:extLst>
               <a:ext uri="{FF2B5EF4-FFF2-40B4-BE49-F238E27FC236}">
-                <a16:creationId xmlns:a16="http://schemas.microsoft.com/office/drawing/2014/main" id="{88C3C47D-E633-BB5D-0FA3-41A5E3C28A6A}"/>
+                <a16:creationId xmlns:a16="http://schemas.microsoft.com/office/drawing/2014/main" xmlns="" id="{88C3C47D-E633-BB5D-0FA3-41A5E3C28A6A}"/>
               </a:ext>
             </a:extLst>
           </p:cNvPr>
@@ -3197,7 +3392,7 @@
           <p:cNvPr id="5" name="날짜 개체 틀 4">
             <a:extLst>
               <a:ext uri="{FF2B5EF4-FFF2-40B4-BE49-F238E27FC236}">
-                <a16:creationId xmlns:a16="http://schemas.microsoft.com/office/drawing/2014/main" id="{603DA118-0D2F-73A1-6311-85E95462C569}"/>
+                <a16:creationId xmlns:a16="http://schemas.microsoft.com/office/drawing/2014/main" xmlns="" id="{603DA118-0D2F-73A1-6311-85E95462C569}"/>
               </a:ext>
             </a:extLst>
           </p:cNvPr>
@@ -3226,7 +3421,7 @@
           <p:cNvPr id="6" name="바닥글 개체 틀 5">
             <a:extLst>
               <a:ext uri="{FF2B5EF4-FFF2-40B4-BE49-F238E27FC236}">
-                <a16:creationId xmlns:a16="http://schemas.microsoft.com/office/drawing/2014/main" id="{DE46749A-348F-886F-32BD-A562F1A2A3B9}"/>
+                <a16:creationId xmlns:a16="http://schemas.microsoft.com/office/drawing/2014/main" xmlns="" id="{DE46749A-348F-886F-32BD-A562F1A2A3B9}"/>
               </a:ext>
             </a:extLst>
           </p:cNvPr>
@@ -3251,7 +3446,7 @@
           <p:cNvPr id="7" name="슬라이드 번호 개체 틀 6">
             <a:extLst>
               <a:ext uri="{FF2B5EF4-FFF2-40B4-BE49-F238E27FC236}">
-                <a16:creationId xmlns:a16="http://schemas.microsoft.com/office/drawing/2014/main" id="{0BF22D09-FBE9-294C-014E-9A808723A1A7}"/>
+                <a16:creationId xmlns:a16="http://schemas.microsoft.com/office/drawing/2014/main" xmlns="" id="{0BF22D09-FBE9-294C-014E-9A808723A1A7}"/>
               </a:ext>
             </a:extLst>
           </p:cNvPr>
@@ -3310,7 +3505,7 @@
           <p:cNvPr id="2" name="제목 1">
             <a:extLst>
               <a:ext uri="{FF2B5EF4-FFF2-40B4-BE49-F238E27FC236}">
-                <a16:creationId xmlns:a16="http://schemas.microsoft.com/office/drawing/2014/main" id="{DA50C132-3A30-7E9C-0BBB-1CD1A789CE68}"/>
+                <a16:creationId xmlns:a16="http://schemas.microsoft.com/office/drawing/2014/main" xmlns="" id="{DA50C132-3A30-7E9C-0BBB-1CD1A789CE68}"/>
               </a:ext>
             </a:extLst>
           </p:cNvPr>
@@ -3347,7 +3542,7 @@
           <p:cNvPr id="3" name="그림 개체 틀 2">
             <a:extLst>
               <a:ext uri="{FF2B5EF4-FFF2-40B4-BE49-F238E27FC236}">
-                <a16:creationId xmlns:a16="http://schemas.microsoft.com/office/drawing/2014/main" id="{2F31776A-D32D-34F5-8A99-A26F4F6535B9}"/>
+                <a16:creationId xmlns:a16="http://schemas.microsoft.com/office/drawing/2014/main" xmlns="" id="{2F31776A-D32D-34F5-8A99-A26F4F6535B9}"/>
               </a:ext>
             </a:extLst>
           </p:cNvPr>
@@ -3414,7 +3609,7 @@
           <p:cNvPr id="4" name="텍스트 개체 틀 3">
             <a:extLst>
               <a:ext uri="{FF2B5EF4-FFF2-40B4-BE49-F238E27FC236}">
-                <a16:creationId xmlns:a16="http://schemas.microsoft.com/office/drawing/2014/main" id="{3E500BF3-C366-20F6-6257-8233A0794521}"/>
+                <a16:creationId xmlns:a16="http://schemas.microsoft.com/office/drawing/2014/main" xmlns="" id="{3E500BF3-C366-20F6-6257-8233A0794521}"/>
               </a:ext>
             </a:extLst>
           </p:cNvPr>
@@ -3485,7 +3680,7 @@
           <p:cNvPr id="5" name="날짜 개체 틀 4">
             <a:extLst>
               <a:ext uri="{FF2B5EF4-FFF2-40B4-BE49-F238E27FC236}">
-                <a16:creationId xmlns:a16="http://schemas.microsoft.com/office/drawing/2014/main" id="{DB1C119C-B590-D055-6B10-AAE861F0D2B1}"/>
+                <a16:creationId xmlns:a16="http://schemas.microsoft.com/office/drawing/2014/main" xmlns="" id="{DB1C119C-B590-D055-6B10-AAE861F0D2B1}"/>
               </a:ext>
             </a:extLst>
           </p:cNvPr>
@@ -3514,7 +3709,7 @@
           <p:cNvPr id="6" name="바닥글 개체 틀 5">
             <a:extLst>
               <a:ext uri="{FF2B5EF4-FFF2-40B4-BE49-F238E27FC236}">
-                <a16:creationId xmlns:a16="http://schemas.microsoft.com/office/drawing/2014/main" id="{00064F92-4550-973E-464E-89CA3E7EED4F}"/>
+                <a16:creationId xmlns:a16="http://schemas.microsoft.com/office/drawing/2014/main" xmlns="" id="{00064F92-4550-973E-464E-89CA3E7EED4F}"/>
               </a:ext>
             </a:extLst>
           </p:cNvPr>
@@ -3539,7 +3734,7 @@
           <p:cNvPr id="7" name="슬라이드 번호 개체 틀 6">
             <a:extLst>
               <a:ext uri="{FF2B5EF4-FFF2-40B4-BE49-F238E27FC236}">
-                <a16:creationId xmlns:a16="http://schemas.microsoft.com/office/drawing/2014/main" id="{708384D1-792D-8EA8-718E-F756CEE623A7}"/>
+                <a16:creationId xmlns:a16="http://schemas.microsoft.com/office/drawing/2014/main" xmlns="" id="{708384D1-792D-8EA8-718E-F756CEE623A7}"/>
               </a:ext>
             </a:extLst>
           </p:cNvPr>
@@ -3603,7 +3798,7 @@
           <p:cNvPr id="2" name="제목 개체 틀 1">
             <a:extLst>
               <a:ext uri="{FF2B5EF4-FFF2-40B4-BE49-F238E27FC236}">
-                <a16:creationId xmlns:a16="http://schemas.microsoft.com/office/drawing/2014/main" id="{C0AC0570-6E75-D8C0-582D-3A448969CF8B}"/>
+                <a16:creationId xmlns:a16="http://schemas.microsoft.com/office/drawing/2014/main" xmlns="" id="{C0AC0570-6E75-D8C0-582D-3A448969CF8B}"/>
               </a:ext>
             </a:extLst>
           </p:cNvPr>
@@ -3641,7 +3836,7 @@
           <p:cNvPr id="3" name="텍스트 개체 틀 2">
             <a:extLst>
               <a:ext uri="{FF2B5EF4-FFF2-40B4-BE49-F238E27FC236}">
-                <a16:creationId xmlns:a16="http://schemas.microsoft.com/office/drawing/2014/main" id="{79ADFDDF-DF3C-19FA-0ED8-5D640C08DB4B}"/>
+                <a16:creationId xmlns:a16="http://schemas.microsoft.com/office/drawing/2014/main" xmlns="" id="{79ADFDDF-DF3C-19FA-0ED8-5D640C08DB4B}"/>
               </a:ext>
             </a:extLst>
           </p:cNvPr>
@@ -3708,7 +3903,7 @@
           <p:cNvPr id="4" name="날짜 개체 틀 3">
             <a:extLst>
               <a:ext uri="{FF2B5EF4-FFF2-40B4-BE49-F238E27FC236}">
-                <a16:creationId xmlns:a16="http://schemas.microsoft.com/office/drawing/2014/main" id="{AB9AC677-7913-29B2-30F7-969771FA5D05}"/>
+                <a16:creationId xmlns:a16="http://schemas.microsoft.com/office/drawing/2014/main" xmlns="" id="{AB9AC677-7913-29B2-30F7-969771FA5D05}"/>
               </a:ext>
             </a:extLst>
           </p:cNvPr>
@@ -3755,7 +3950,7 @@
           <p:cNvPr id="5" name="바닥글 개체 틀 4">
             <a:extLst>
               <a:ext uri="{FF2B5EF4-FFF2-40B4-BE49-F238E27FC236}">
-                <a16:creationId xmlns:a16="http://schemas.microsoft.com/office/drawing/2014/main" id="{3A6836E4-21B2-245A-8933-7F64F64AC382}"/>
+                <a16:creationId xmlns:a16="http://schemas.microsoft.com/office/drawing/2014/main" xmlns="" id="{3A6836E4-21B2-245A-8933-7F64F64AC382}"/>
               </a:ext>
             </a:extLst>
           </p:cNvPr>
@@ -3798,7 +3993,7 @@
           <p:cNvPr id="6" name="슬라이드 번호 개체 틀 5">
             <a:extLst>
               <a:ext uri="{FF2B5EF4-FFF2-40B4-BE49-F238E27FC236}">
-                <a16:creationId xmlns:a16="http://schemas.microsoft.com/office/drawing/2014/main" id="{6F2D0B4E-8F0D-F1B8-2A71-9862FC9749C5}"/>
+                <a16:creationId xmlns:a16="http://schemas.microsoft.com/office/drawing/2014/main" xmlns="" id="{6F2D0B4E-8F0D-F1B8-2A71-9862FC9749C5}"/>
               </a:ext>
             </a:extLst>
           </p:cNvPr>
@@ -4296,7 +4491,7 @@
 </p:sld>
 </file>
 
-<file path=ppt/slides/slide2.xml><?xml version="1.0" encoding="utf-8"?>
+<file path=ppt/slides/slide10.xml><?xml version="1.0" encoding="utf-8"?>
 <p:sld xmlns:a="http://schemas.openxmlformats.org/drawingml/2006/main" xmlns:r="http://schemas.openxmlformats.org/officeDocument/2006/relationships" xmlns:p="http://schemas.openxmlformats.org/presentationml/2006/main">
   <p:cSld>
     <p:spTree>
@@ -4304,7 +4499,7 @@
         <p:cNvPr id="1" name="">
           <a:extLst>
             <a:ext uri="{FF2B5EF4-FFF2-40B4-BE49-F238E27FC236}">
-              <a16:creationId xmlns:a16="http://schemas.microsoft.com/office/drawing/2014/main" id="{49DA7EAA-204E-2F90-E52A-6C83B9013025}"/>
+              <a16:creationId xmlns:a16="http://schemas.microsoft.com/office/drawing/2014/main" xmlns="" id="{49DA7EAA-204E-2F90-E52A-6C83B9013025}"/>
             </a:ext>
           </a:extLst>
         </p:cNvPr>
@@ -4321,1598 +4516,10 @@
       </p:grpSpPr>
       <p:sp>
         <p:nvSpPr>
-          <p:cNvPr id="8" name="TextBox 7">
-            <a:extLst>
-              <a:ext uri="{FF2B5EF4-FFF2-40B4-BE49-F238E27FC236}">
-                <a16:creationId xmlns:a16="http://schemas.microsoft.com/office/drawing/2014/main" id="{701093AF-254C-83D7-8032-465A5FB513FB}"/>
-              </a:ext>
-            </a:extLst>
-          </p:cNvPr>
-          <p:cNvSpPr txBox="1"/>
-          <p:nvPr/>
-        </p:nvSpPr>
-        <p:spPr>
-          <a:xfrm>
-            <a:off x="302451" y="315453"/>
-            <a:ext cx="4944140" cy="369332"/>
-          </a:xfrm>
-          <a:prstGeom prst="rect">
-            <a:avLst/>
-          </a:prstGeom>
-          <a:noFill/>
-        </p:spPr>
-        <p:txBody>
-          <a:bodyPr wrap="square" rtlCol="0">
-            <a:spAutoFit/>
-          </a:bodyPr>
-          <a:lstStyle/>
-          <a:p>
-            <a:r>
-              <a:rPr lang="ko-KR" altLang="en-US" dirty="0">
-                <a:latin typeface="나눔바른고딕" panose="020B0603020101020101" pitchFamily="34" charset="-127"/>
-                <a:ea typeface="나눔바른고딕" panose="020B0603020101020101" pitchFamily="34" charset="-127"/>
-              </a:rPr>
-              <a:t>이번 주 작업 내역</a:t>
-            </a:r>
-            <a:endParaRPr lang="en-US" altLang="ko-KR" dirty="0">
-              <a:latin typeface="나눔바른고딕" panose="020B0603020101020101" pitchFamily="34" charset="-127"/>
-              <a:ea typeface="나눔바른고딕" panose="020B0603020101020101" pitchFamily="34" charset="-127"/>
-            </a:endParaRPr>
-          </a:p>
-        </p:txBody>
-      </p:sp>
-      <p:sp>
-        <p:nvSpPr>
-          <p:cNvPr id="10" name="TextBox 9">
-            <a:extLst>
-              <a:ext uri="{FF2B5EF4-FFF2-40B4-BE49-F238E27FC236}">
-                <a16:creationId xmlns:a16="http://schemas.microsoft.com/office/drawing/2014/main" id="{2D538815-CBEF-E37B-5659-B5091F86B485}"/>
-              </a:ext>
-            </a:extLst>
-          </p:cNvPr>
-          <p:cNvSpPr txBox="1"/>
-          <p:nvPr/>
-        </p:nvSpPr>
-        <p:spPr>
-          <a:xfrm>
-            <a:off x="302450" y="1003762"/>
-            <a:ext cx="2694247" cy="338554"/>
-          </a:xfrm>
-          <a:prstGeom prst="rect">
-            <a:avLst/>
-          </a:prstGeom>
-          <a:noFill/>
-        </p:spPr>
-        <p:txBody>
-          <a:bodyPr wrap="square" rtlCol="0">
-            <a:spAutoFit/>
-          </a:bodyPr>
-          <a:lstStyle/>
-          <a:p>
-            <a:r>
-              <a:rPr lang="ko-KR" altLang="en-US" sz="1600" dirty="0">
-                <a:latin typeface="나눔바른고딕" panose="020B0603020101020101" pitchFamily="34" charset="-127"/>
-                <a:ea typeface="나눔바른고딕" panose="020B0603020101020101" pitchFamily="34" charset="-127"/>
-              </a:rPr>
-              <a:t>특수한 지형 인식 로직</a:t>
-            </a:r>
-            <a:endParaRPr lang="en-US" altLang="ko-KR" sz="1600" dirty="0">
-              <a:latin typeface="나눔바른고딕" panose="020B0603020101020101" pitchFamily="34" charset="-127"/>
-              <a:ea typeface="나눔바른고딕" panose="020B0603020101020101" pitchFamily="34" charset="-127"/>
-            </a:endParaRPr>
-          </a:p>
-        </p:txBody>
-      </p:sp>
-      <p:cxnSp>
-        <p:nvCxnSpPr>
-          <p:cNvPr id="3" name="직선 연결선 2">
-            <a:extLst>
-              <a:ext uri="{FF2B5EF4-FFF2-40B4-BE49-F238E27FC236}">
-                <a16:creationId xmlns:a16="http://schemas.microsoft.com/office/drawing/2014/main" id="{76FFFECF-4B1C-95DF-32C3-2D2F19BEDAFB}"/>
-              </a:ext>
-            </a:extLst>
-          </p:cNvPr>
-          <p:cNvCxnSpPr>
-            <a:cxnSpLocks/>
-          </p:cNvCxnSpPr>
-          <p:nvPr/>
-        </p:nvCxnSpPr>
-        <p:spPr>
-          <a:xfrm>
-            <a:off x="387511" y="818707"/>
-            <a:ext cx="11308303" cy="0"/>
-          </a:xfrm>
-          <a:prstGeom prst="line">
-            <a:avLst/>
-          </a:prstGeom>
-          <a:ln>
-            <a:solidFill>
-              <a:schemeClr val="tx2"/>
-            </a:solidFill>
-          </a:ln>
-        </p:spPr>
-        <p:style>
-          <a:lnRef idx="2">
-            <a:schemeClr val="accent1"/>
-          </a:lnRef>
-          <a:fillRef idx="0">
-            <a:schemeClr val="accent1"/>
-          </a:fillRef>
-          <a:effectRef idx="1">
-            <a:schemeClr val="accent1"/>
-          </a:effectRef>
-          <a:fontRef idx="minor">
-            <a:schemeClr val="tx1"/>
-          </a:fontRef>
-        </p:style>
-      </p:cxnSp>
-      <p:sp>
-        <p:nvSpPr>
-          <p:cNvPr id="12" name="직사각형 11"/>
-          <p:cNvSpPr/>
-          <p:nvPr/>
-        </p:nvSpPr>
-        <p:spPr>
-          <a:xfrm>
-            <a:off x="10443172" y="118011"/>
-            <a:ext cx="1596912" cy="246221"/>
-          </a:xfrm>
-          <a:prstGeom prst="rect">
-            <a:avLst/>
-          </a:prstGeom>
-        </p:spPr>
-        <p:txBody>
-          <a:bodyPr wrap="none">
-            <a:spAutoFit/>
-          </a:bodyPr>
-          <a:lstStyle/>
-          <a:p>
-            <a:r>
-              <a:rPr lang="ko-KR" altLang="en-US" sz="1000" dirty="0" err="1">
-                <a:solidFill>
-                  <a:schemeClr val="bg1">
-                    <a:lumMod val="75000"/>
-                  </a:schemeClr>
-                </a:solidFill>
-                <a:latin typeface="나눔바른고딕" panose="020B0603020101020101" pitchFamily="34" charset="-127"/>
-                <a:ea typeface="나눔바른고딕" panose="020B0603020101020101" pitchFamily="34" charset="-127"/>
-              </a:rPr>
-              <a:t>펄어비스</a:t>
-            </a:r>
-            <a:r>
-              <a:rPr lang="ko-KR" altLang="en-US" sz="1000" dirty="0">
-                <a:solidFill>
-                  <a:schemeClr val="bg1">
-                    <a:lumMod val="75000"/>
-                  </a:schemeClr>
-                </a:solidFill>
-                <a:latin typeface="나눔바른고딕" panose="020B0603020101020101" pitchFamily="34" charset="-127"/>
-                <a:ea typeface="나눔바른고딕" panose="020B0603020101020101" pitchFamily="34" charset="-127"/>
-              </a:rPr>
-              <a:t> </a:t>
-            </a:r>
-            <a:r>
-              <a:rPr lang="en-US" altLang="ko-KR" sz="1000" dirty="0">
-                <a:solidFill>
-                  <a:schemeClr val="bg1">
-                    <a:lumMod val="75000"/>
-                  </a:schemeClr>
-                </a:solidFill>
-                <a:latin typeface="나눔바른고딕" panose="020B0603020101020101" pitchFamily="34" charset="-127"/>
-                <a:ea typeface="나눔바른고딕" panose="020B0603020101020101" pitchFamily="34" charset="-127"/>
-              </a:rPr>
-              <a:t>2026 </a:t>
-            </a:r>
-            <a:r>
-              <a:rPr lang="ko-KR" altLang="en-US" sz="1000" dirty="0">
-                <a:solidFill>
-                  <a:schemeClr val="bg1">
-                    <a:lumMod val="75000"/>
-                  </a:schemeClr>
-                </a:solidFill>
-                <a:latin typeface="나눔바른고딕" panose="020B0603020101020101" pitchFamily="34" charset="-127"/>
-                <a:ea typeface="나눔바른고딕" panose="020B0603020101020101" pitchFamily="34" charset="-127"/>
-              </a:rPr>
-              <a:t>여름 </a:t>
-            </a:r>
-            <a:r>
-              <a:rPr lang="ko-KR" altLang="en-US" sz="1000" dirty="0" err="1">
-                <a:solidFill>
-                  <a:schemeClr val="bg1">
-                    <a:lumMod val="75000"/>
-                  </a:schemeClr>
-                </a:solidFill>
-                <a:latin typeface="나눔바른고딕" panose="020B0603020101020101" pitchFamily="34" charset="-127"/>
-                <a:ea typeface="나눔바른고딕" panose="020B0603020101020101" pitchFamily="34" charset="-127"/>
-              </a:rPr>
-              <a:t>인턴십</a:t>
-            </a:r>
-            <a:endParaRPr lang="ko-KR" altLang="en-US" sz="1000" dirty="0">
-              <a:solidFill>
-                <a:schemeClr val="bg1">
-                  <a:lumMod val="75000"/>
-                </a:schemeClr>
-              </a:solidFill>
-              <a:latin typeface="나눔바른고딕" panose="020B0603020101020101" pitchFamily="34" charset="-127"/>
-              <a:ea typeface="나눔바른고딕" panose="020B0603020101020101" pitchFamily="34" charset="-127"/>
-            </a:endParaRPr>
-          </a:p>
-        </p:txBody>
-      </p:sp>
-      <p:sp>
-        <p:nvSpPr>
-          <p:cNvPr id="13" name="TextBox 12">
-            <a:extLst>
-              <a:ext uri="{FF2B5EF4-FFF2-40B4-BE49-F238E27FC236}">
-                <a16:creationId xmlns:a16="http://schemas.microsoft.com/office/drawing/2014/main" id="{2D538815-CBEF-E37B-5659-B5091F86B485}"/>
-              </a:ext>
-            </a:extLst>
-          </p:cNvPr>
-          <p:cNvSpPr txBox="1"/>
-          <p:nvPr/>
-        </p:nvSpPr>
-        <p:spPr>
-          <a:xfrm>
-            <a:off x="302450" y="1342316"/>
-            <a:ext cx="2694247" cy="276999"/>
-          </a:xfrm>
-          <a:prstGeom prst="rect">
-            <a:avLst/>
-          </a:prstGeom>
-          <a:noFill/>
-        </p:spPr>
-        <p:txBody>
-          <a:bodyPr wrap="square" rtlCol="0">
-            <a:spAutoFit/>
-          </a:bodyPr>
-          <a:lstStyle/>
-          <a:p>
-            <a:r>
-              <a:rPr lang="ko-KR" altLang="en-US" sz="1200" dirty="0">
-                <a:latin typeface="나눔바른고딕" panose="020B0603020101020101" pitchFamily="34" charset="-127"/>
-                <a:ea typeface="나눔바른고딕" panose="020B0603020101020101" pitchFamily="34" charset="-127"/>
-              </a:rPr>
-              <a:t>인식 방법</a:t>
-            </a:r>
-            <a:endParaRPr lang="en-US" altLang="ko-KR" sz="1200" dirty="0">
-              <a:latin typeface="나눔바른고딕" panose="020B0603020101020101" pitchFamily="34" charset="-127"/>
-              <a:ea typeface="나눔바른고딕" panose="020B0603020101020101" pitchFamily="34" charset="-127"/>
-            </a:endParaRPr>
-          </a:p>
-        </p:txBody>
-      </p:sp>
-    </p:spTree>
-    <p:extLst>
-      <p:ext uri="{BB962C8B-B14F-4D97-AF65-F5344CB8AC3E}">
-        <p14:creationId xmlns:p14="http://schemas.microsoft.com/office/powerpoint/2010/main" val="43933111"/>
-      </p:ext>
-    </p:extLst>
-  </p:cSld>
-  <p:clrMapOvr>
-    <a:masterClrMapping/>
-  </p:clrMapOvr>
-</p:sld>
-</file>
-
-<file path=ppt/slides/slide3.xml><?xml version="1.0" encoding="utf-8"?>
-<p:sld xmlns:a="http://schemas.openxmlformats.org/drawingml/2006/main" xmlns:r="http://schemas.openxmlformats.org/officeDocument/2006/relationships" xmlns:p="http://schemas.openxmlformats.org/presentationml/2006/main">
-  <p:cSld>
-    <p:spTree>
-      <p:nvGrpSpPr>
-        <p:cNvPr id="1" name="">
-          <a:extLst>
-            <a:ext uri="{FF2B5EF4-FFF2-40B4-BE49-F238E27FC236}">
-              <a16:creationId xmlns:a16="http://schemas.microsoft.com/office/drawing/2014/main" id="{4E3DA648-5785-8201-CCD7-F4B146EDE99F}"/>
-            </a:ext>
-          </a:extLst>
-        </p:cNvPr>
-        <p:cNvGrpSpPr/>
-        <p:nvPr/>
-      </p:nvGrpSpPr>
-      <p:grpSpPr>
-        <a:xfrm>
-          <a:off x="0" y="0"/>
-          <a:ext cx="0" cy="0"/>
-          <a:chOff x="0" y="0"/>
-          <a:chExt cx="0" cy="0"/>
-        </a:xfrm>
-      </p:grpSpPr>
-      <p:sp>
-        <p:nvSpPr>
-          <p:cNvPr id="8" name="TextBox 7">
-            <a:extLst>
-              <a:ext uri="{FF2B5EF4-FFF2-40B4-BE49-F238E27FC236}">
-                <a16:creationId xmlns:a16="http://schemas.microsoft.com/office/drawing/2014/main" id="{31234DBB-F039-BEB0-AC6F-55B73AE31537}"/>
-              </a:ext>
-            </a:extLst>
-          </p:cNvPr>
-          <p:cNvSpPr txBox="1"/>
-          <p:nvPr/>
-        </p:nvSpPr>
-        <p:spPr>
-          <a:xfrm>
-            <a:off x="302451" y="315453"/>
-            <a:ext cx="4944140" cy="369332"/>
-          </a:xfrm>
-          <a:prstGeom prst="rect">
-            <a:avLst/>
-          </a:prstGeom>
-          <a:noFill/>
-        </p:spPr>
-        <p:txBody>
-          <a:bodyPr wrap="square" rtlCol="0">
-            <a:spAutoFit/>
-          </a:bodyPr>
-          <a:lstStyle/>
-          <a:p>
-            <a:r>
-              <a:rPr lang="ko-KR" altLang="en-US" dirty="0">
-                <a:latin typeface="나눔바른고딕" panose="020B0603020101020101" pitchFamily="34" charset="-127"/>
-                <a:ea typeface="나눔바른고딕" panose="020B0603020101020101" pitchFamily="34" charset="-127"/>
-              </a:rPr>
-              <a:t>이번 주 작업 내역</a:t>
-            </a:r>
-            <a:endParaRPr lang="en-US" altLang="ko-KR" dirty="0">
-              <a:latin typeface="나눔바른고딕" panose="020B0603020101020101" pitchFamily="34" charset="-127"/>
-              <a:ea typeface="나눔바른고딕" panose="020B0603020101020101" pitchFamily="34" charset="-127"/>
-            </a:endParaRPr>
-          </a:p>
-        </p:txBody>
-      </p:sp>
-      <p:sp>
-        <p:nvSpPr>
-          <p:cNvPr id="10" name="TextBox 9">
-            <a:extLst>
-              <a:ext uri="{FF2B5EF4-FFF2-40B4-BE49-F238E27FC236}">
-                <a16:creationId xmlns:a16="http://schemas.microsoft.com/office/drawing/2014/main" id="{EABADBF9-06F0-4F22-76AB-A2F83B3A3175}"/>
-              </a:ext>
-            </a:extLst>
-          </p:cNvPr>
-          <p:cNvSpPr txBox="1"/>
-          <p:nvPr/>
-        </p:nvSpPr>
-        <p:spPr>
-          <a:xfrm>
-            <a:off x="302450" y="1003762"/>
-            <a:ext cx="2694247" cy="338554"/>
-          </a:xfrm>
-          <a:prstGeom prst="rect">
-            <a:avLst/>
-          </a:prstGeom>
-          <a:noFill/>
-        </p:spPr>
-        <p:txBody>
-          <a:bodyPr wrap="square" rtlCol="0">
-            <a:spAutoFit/>
-          </a:bodyPr>
-          <a:lstStyle/>
-          <a:p>
-            <a:r>
-              <a:rPr lang="ko-KR" altLang="en-US" sz="1600" dirty="0">
-                <a:latin typeface="나눔바른고딕" panose="020B0603020101020101" pitchFamily="34" charset="-127"/>
-                <a:ea typeface="나눔바른고딕" panose="020B0603020101020101" pitchFamily="34" charset="-127"/>
-              </a:rPr>
-              <a:t>캐릭터 </a:t>
-            </a:r>
-            <a:r>
-              <a:rPr lang="en-US" altLang="ko-KR" sz="1600" dirty="0">
-                <a:latin typeface="나눔바른고딕" panose="020B0603020101020101" pitchFamily="34" charset="-127"/>
-                <a:ea typeface="나눔바른고딕" panose="020B0603020101020101" pitchFamily="34" charset="-127"/>
-              </a:rPr>
-              <a:t>FSM</a:t>
-            </a:r>
-          </a:p>
-        </p:txBody>
-      </p:sp>
-      <p:cxnSp>
-        <p:nvCxnSpPr>
-          <p:cNvPr id="3" name="직선 연결선 2">
-            <a:extLst>
-              <a:ext uri="{FF2B5EF4-FFF2-40B4-BE49-F238E27FC236}">
-                <a16:creationId xmlns:a16="http://schemas.microsoft.com/office/drawing/2014/main" id="{CB59DBA8-457E-E5E3-165C-093E13F8D469}"/>
-              </a:ext>
-            </a:extLst>
-          </p:cNvPr>
-          <p:cNvCxnSpPr>
-            <a:cxnSpLocks/>
-          </p:cNvCxnSpPr>
-          <p:nvPr/>
-        </p:nvCxnSpPr>
-        <p:spPr>
-          <a:xfrm>
-            <a:off x="387511" y="818707"/>
-            <a:ext cx="11308303" cy="0"/>
-          </a:xfrm>
-          <a:prstGeom prst="line">
-            <a:avLst/>
-          </a:prstGeom>
-          <a:ln>
-            <a:solidFill>
-              <a:schemeClr val="tx2"/>
-            </a:solidFill>
-          </a:ln>
-        </p:spPr>
-        <p:style>
-          <a:lnRef idx="2">
-            <a:schemeClr val="accent1"/>
-          </a:lnRef>
-          <a:fillRef idx="0">
-            <a:schemeClr val="accent1"/>
-          </a:fillRef>
-          <a:effectRef idx="1">
-            <a:schemeClr val="accent1"/>
-          </a:effectRef>
-          <a:fontRef idx="minor">
-            <a:schemeClr val="tx1"/>
-          </a:fontRef>
-        </p:style>
-      </p:cxnSp>
-      <p:sp>
-        <p:nvSpPr>
-          <p:cNvPr id="12" name="직사각형 11">
-            <a:extLst>
-              <a:ext uri="{FF2B5EF4-FFF2-40B4-BE49-F238E27FC236}">
-                <a16:creationId xmlns:a16="http://schemas.microsoft.com/office/drawing/2014/main" id="{900D37A4-34C2-C7F8-201A-CAF255E4B871}"/>
-              </a:ext>
-            </a:extLst>
-          </p:cNvPr>
-          <p:cNvSpPr/>
-          <p:nvPr/>
-        </p:nvSpPr>
-        <p:spPr>
-          <a:xfrm>
-            <a:off x="10443172" y="118011"/>
-            <a:ext cx="1596912" cy="246221"/>
-          </a:xfrm>
-          <a:prstGeom prst="rect">
-            <a:avLst/>
-          </a:prstGeom>
-        </p:spPr>
-        <p:txBody>
-          <a:bodyPr wrap="none">
-            <a:spAutoFit/>
-          </a:bodyPr>
-          <a:lstStyle/>
-          <a:p>
-            <a:r>
-              <a:rPr lang="ko-KR" altLang="en-US" sz="1000" dirty="0" err="1">
-                <a:solidFill>
-                  <a:schemeClr val="bg1">
-                    <a:lumMod val="75000"/>
-                  </a:schemeClr>
-                </a:solidFill>
-                <a:latin typeface="나눔바른고딕" panose="020B0603020101020101" pitchFamily="34" charset="-127"/>
-                <a:ea typeface="나눔바른고딕" panose="020B0603020101020101" pitchFamily="34" charset="-127"/>
-              </a:rPr>
-              <a:t>펄어비스</a:t>
-            </a:r>
-            <a:r>
-              <a:rPr lang="ko-KR" altLang="en-US" sz="1000" dirty="0">
-                <a:solidFill>
-                  <a:schemeClr val="bg1">
-                    <a:lumMod val="75000"/>
-                  </a:schemeClr>
-                </a:solidFill>
-                <a:latin typeface="나눔바른고딕" panose="020B0603020101020101" pitchFamily="34" charset="-127"/>
-                <a:ea typeface="나눔바른고딕" panose="020B0603020101020101" pitchFamily="34" charset="-127"/>
-              </a:rPr>
-              <a:t> </a:t>
-            </a:r>
-            <a:r>
-              <a:rPr lang="en-US" altLang="ko-KR" sz="1000" dirty="0">
-                <a:solidFill>
-                  <a:schemeClr val="bg1">
-                    <a:lumMod val="75000"/>
-                  </a:schemeClr>
-                </a:solidFill>
-                <a:latin typeface="나눔바른고딕" panose="020B0603020101020101" pitchFamily="34" charset="-127"/>
-                <a:ea typeface="나눔바른고딕" panose="020B0603020101020101" pitchFamily="34" charset="-127"/>
-              </a:rPr>
-              <a:t>2026 </a:t>
-            </a:r>
-            <a:r>
-              <a:rPr lang="ko-KR" altLang="en-US" sz="1000" dirty="0">
-                <a:solidFill>
-                  <a:schemeClr val="bg1">
-                    <a:lumMod val="75000"/>
-                  </a:schemeClr>
-                </a:solidFill>
-                <a:latin typeface="나눔바른고딕" panose="020B0603020101020101" pitchFamily="34" charset="-127"/>
-                <a:ea typeface="나눔바른고딕" panose="020B0603020101020101" pitchFamily="34" charset="-127"/>
-              </a:rPr>
-              <a:t>여름 </a:t>
-            </a:r>
-            <a:r>
-              <a:rPr lang="ko-KR" altLang="en-US" sz="1000" dirty="0" err="1">
-                <a:solidFill>
-                  <a:schemeClr val="bg1">
-                    <a:lumMod val="75000"/>
-                  </a:schemeClr>
-                </a:solidFill>
-                <a:latin typeface="나눔바른고딕" panose="020B0603020101020101" pitchFamily="34" charset="-127"/>
-                <a:ea typeface="나눔바른고딕" panose="020B0603020101020101" pitchFamily="34" charset="-127"/>
-              </a:rPr>
-              <a:t>인턴십</a:t>
-            </a:r>
-            <a:endParaRPr lang="ko-KR" altLang="en-US" sz="1000" dirty="0">
-              <a:solidFill>
-                <a:schemeClr val="bg1">
-                  <a:lumMod val="75000"/>
-                </a:schemeClr>
-              </a:solidFill>
-              <a:latin typeface="나눔바른고딕" panose="020B0603020101020101" pitchFamily="34" charset="-127"/>
-              <a:ea typeface="나눔바른고딕" panose="020B0603020101020101" pitchFamily="34" charset="-127"/>
-            </a:endParaRPr>
-          </a:p>
-        </p:txBody>
-      </p:sp>
-      <p:sp>
-        <p:nvSpPr>
-          <p:cNvPr id="13" name="TextBox 12">
-            <a:extLst>
-              <a:ext uri="{FF2B5EF4-FFF2-40B4-BE49-F238E27FC236}">
-                <a16:creationId xmlns:a16="http://schemas.microsoft.com/office/drawing/2014/main" id="{55105A21-BDA3-A05F-058F-200AA1B5FC2F}"/>
-              </a:ext>
-            </a:extLst>
-          </p:cNvPr>
-          <p:cNvSpPr txBox="1"/>
-          <p:nvPr/>
-        </p:nvSpPr>
-        <p:spPr>
-          <a:xfrm>
-            <a:off x="302450" y="1342316"/>
-            <a:ext cx="2694247" cy="276999"/>
-          </a:xfrm>
-          <a:prstGeom prst="rect">
-            <a:avLst/>
-          </a:prstGeom>
-          <a:noFill/>
-        </p:spPr>
-        <p:txBody>
-          <a:bodyPr wrap="square" rtlCol="0">
-            <a:spAutoFit/>
-          </a:bodyPr>
-          <a:lstStyle/>
-          <a:p>
-            <a:r>
-              <a:rPr lang="ko-KR" altLang="en-US" sz="1200" dirty="0">
-                <a:latin typeface="나눔바른고딕" panose="020B0603020101020101" pitchFamily="34" charset="-127"/>
-                <a:ea typeface="나눔바른고딕" panose="020B0603020101020101" pitchFamily="34" charset="-127"/>
-              </a:rPr>
-              <a:t>인식 처리 결과에 따른 상태 변화</a:t>
-            </a:r>
-            <a:endParaRPr lang="en-US" altLang="ko-KR" sz="1200" dirty="0">
-              <a:latin typeface="나눔바른고딕" panose="020B0603020101020101" pitchFamily="34" charset="-127"/>
-              <a:ea typeface="나눔바른고딕" panose="020B0603020101020101" pitchFamily="34" charset="-127"/>
-            </a:endParaRPr>
-          </a:p>
-        </p:txBody>
-      </p:sp>
-    </p:spTree>
-    <p:extLst>
-      <p:ext uri="{BB962C8B-B14F-4D97-AF65-F5344CB8AC3E}">
-        <p14:creationId xmlns:p14="http://schemas.microsoft.com/office/powerpoint/2010/main" val="1272250479"/>
-      </p:ext>
-    </p:extLst>
-  </p:cSld>
-  <p:clrMapOvr>
-    <a:masterClrMapping/>
-  </p:clrMapOvr>
-</p:sld>
-</file>
-
-<file path=ppt/slides/slide4.xml><?xml version="1.0" encoding="utf-8"?>
-<p:sld xmlns:a="http://schemas.openxmlformats.org/drawingml/2006/main" xmlns:r="http://schemas.openxmlformats.org/officeDocument/2006/relationships" xmlns:p="http://schemas.openxmlformats.org/presentationml/2006/main">
-  <p:cSld>
-    <p:spTree>
-      <p:nvGrpSpPr>
-        <p:cNvPr id="1" name="">
-          <a:extLst>
-            <a:ext uri="{FF2B5EF4-FFF2-40B4-BE49-F238E27FC236}">
-              <a16:creationId xmlns:a16="http://schemas.microsoft.com/office/drawing/2014/main" id="{1051CD25-4D05-9C83-5A8D-951F119768B6}"/>
-            </a:ext>
-          </a:extLst>
-        </p:cNvPr>
-        <p:cNvGrpSpPr/>
-        <p:nvPr/>
-      </p:nvGrpSpPr>
-      <p:grpSpPr>
-        <a:xfrm>
-          <a:off x="0" y="0"/>
-          <a:ext cx="0" cy="0"/>
-          <a:chOff x="0" y="0"/>
-          <a:chExt cx="0" cy="0"/>
-        </a:xfrm>
-      </p:grpSpPr>
-      <p:sp>
-        <p:nvSpPr>
-          <p:cNvPr id="8" name="TextBox 7">
-            <a:extLst>
-              <a:ext uri="{FF2B5EF4-FFF2-40B4-BE49-F238E27FC236}">
-                <a16:creationId xmlns:a16="http://schemas.microsoft.com/office/drawing/2014/main" id="{DD881128-4DD5-2D80-3307-E58F448D5923}"/>
-              </a:ext>
-            </a:extLst>
-          </p:cNvPr>
-          <p:cNvSpPr txBox="1"/>
-          <p:nvPr/>
-        </p:nvSpPr>
-        <p:spPr>
-          <a:xfrm>
-            <a:off x="302451" y="315453"/>
-            <a:ext cx="4944140" cy="369332"/>
-          </a:xfrm>
-          <a:prstGeom prst="rect">
-            <a:avLst/>
-          </a:prstGeom>
-          <a:noFill/>
-        </p:spPr>
-        <p:txBody>
-          <a:bodyPr wrap="square" rtlCol="0">
-            <a:spAutoFit/>
-          </a:bodyPr>
-          <a:lstStyle/>
-          <a:p>
-            <a:r>
-              <a:rPr lang="ko-KR" altLang="en-US" dirty="0">
-                <a:latin typeface="나눔바른고딕" panose="020B0603020101020101" pitchFamily="34" charset="-127"/>
-                <a:ea typeface="나눔바른고딕" panose="020B0603020101020101" pitchFamily="34" charset="-127"/>
-              </a:rPr>
-              <a:t>이번 주 작업 내역</a:t>
-            </a:r>
-            <a:endParaRPr lang="en-US" altLang="ko-KR" dirty="0">
-              <a:latin typeface="나눔바른고딕" panose="020B0603020101020101" pitchFamily="34" charset="-127"/>
-              <a:ea typeface="나눔바른고딕" panose="020B0603020101020101" pitchFamily="34" charset="-127"/>
-            </a:endParaRPr>
-          </a:p>
-        </p:txBody>
-      </p:sp>
-      <p:sp>
-        <p:nvSpPr>
-          <p:cNvPr id="10" name="TextBox 9">
-            <a:extLst>
-              <a:ext uri="{FF2B5EF4-FFF2-40B4-BE49-F238E27FC236}">
-                <a16:creationId xmlns:a16="http://schemas.microsoft.com/office/drawing/2014/main" id="{A166E13D-C719-30FA-6504-A188368FD586}"/>
-              </a:ext>
-            </a:extLst>
-          </p:cNvPr>
-          <p:cNvSpPr txBox="1"/>
-          <p:nvPr/>
-        </p:nvSpPr>
-        <p:spPr>
-          <a:xfrm>
-            <a:off x="302450" y="1003762"/>
-            <a:ext cx="2694247" cy="338554"/>
-          </a:xfrm>
-          <a:prstGeom prst="rect">
-            <a:avLst/>
-          </a:prstGeom>
-          <a:noFill/>
-        </p:spPr>
-        <p:txBody>
-          <a:bodyPr wrap="square" rtlCol="0">
-            <a:spAutoFit/>
-          </a:bodyPr>
-          <a:lstStyle/>
-          <a:p>
-            <a:r>
-              <a:rPr lang="ko-KR" altLang="en-US" sz="1600" dirty="0">
-                <a:latin typeface="나눔바른고딕" panose="020B0603020101020101" pitchFamily="34" charset="-127"/>
-                <a:ea typeface="나눔바른고딕" panose="020B0603020101020101" pitchFamily="34" charset="-127"/>
-              </a:rPr>
-              <a:t>캐릭터 </a:t>
-            </a:r>
-            <a:r>
-              <a:rPr lang="en-US" altLang="ko-KR" sz="1600" dirty="0">
-                <a:latin typeface="나눔바른고딕" panose="020B0603020101020101" pitchFamily="34" charset="-127"/>
-                <a:ea typeface="나눔바른고딕" panose="020B0603020101020101" pitchFamily="34" charset="-127"/>
-              </a:rPr>
-              <a:t>FSM</a:t>
-            </a:r>
-          </a:p>
-        </p:txBody>
-      </p:sp>
-      <p:cxnSp>
-        <p:nvCxnSpPr>
-          <p:cNvPr id="3" name="직선 연결선 2">
-            <a:extLst>
-              <a:ext uri="{FF2B5EF4-FFF2-40B4-BE49-F238E27FC236}">
-                <a16:creationId xmlns:a16="http://schemas.microsoft.com/office/drawing/2014/main" id="{E9FFB3BD-6F89-4F73-EB69-654CDAAC7A55}"/>
-              </a:ext>
-            </a:extLst>
-          </p:cNvPr>
-          <p:cNvCxnSpPr>
-            <a:cxnSpLocks/>
-          </p:cNvCxnSpPr>
-          <p:nvPr/>
-        </p:nvCxnSpPr>
-        <p:spPr>
-          <a:xfrm>
-            <a:off x="387511" y="818707"/>
-            <a:ext cx="11308303" cy="0"/>
-          </a:xfrm>
-          <a:prstGeom prst="line">
-            <a:avLst/>
-          </a:prstGeom>
-          <a:ln>
-            <a:solidFill>
-              <a:schemeClr val="tx2"/>
-            </a:solidFill>
-          </a:ln>
-        </p:spPr>
-        <p:style>
-          <a:lnRef idx="2">
-            <a:schemeClr val="accent1"/>
-          </a:lnRef>
-          <a:fillRef idx="0">
-            <a:schemeClr val="accent1"/>
-          </a:fillRef>
-          <a:effectRef idx="1">
-            <a:schemeClr val="accent1"/>
-          </a:effectRef>
-          <a:fontRef idx="minor">
-            <a:schemeClr val="tx1"/>
-          </a:fontRef>
-        </p:style>
-      </p:cxnSp>
-      <p:sp>
-        <p:nvSpPr>
-          <p:cNvPr id="12" name="직사각형 11">
-            <a:extLst>
-              <a:ext uri="{FF2B5EF4-FFF2-40B4-BE49-F238E27FC236}">
-                <a16:creationId xmlns:a16="http://schemas.microsoft.com/office/drawing/2014/main" id="{5F5B084D-3D6B-070E-B81C-19CE3179A5A0}"/>
-              </a:ext>
-            </a:extLst>
-          </p:cNvPr>
-          <p:cNvSpPr/>
-          <p:nvPr/>
-        </p:nvSpPr>
-        <p:spPr>
-          <a:xfrm>
-            <a:off x="10443172" y="118011"/>
-            <a:ext cx="1596912" cy="246221"/>
-          </a:xfrm>
-          <a:prstGeom prst="rect">
-            <a:avLst/>
-          </a:prstGeom>
-        </p:spPr>
-        <p:txBody>
-          <a:bodyPr wrap="none">
-            <a:spAutoFit/>
-          </a:bodyPr>
-          <a:lstStyle/>
-          <a:p>
-            <a:r>
-              <a:rPr lang="ko-KR" altLang="en-US" sz="1000" dirty="0" err="1">
-                <a:solidFill>
-                  <a:schemeClr val="bg1">
-                    <a:lumMod val="75000"/>
-                  </a:schemeClr>
-                </a:solidFill>
-                <a:latin typeface="나눔바른고딕" panose="020B0603020101020101" pitchFamily="34" charset="-127"/>
-                <a:ea typeface="나눔바른고딕" panose="020B0603020101020101" pitchFamily="34" charset="-127"/>
-              </a:rPr>
-              <a:t>펄어비스</a:t>
-            </a:r>
-            <a:r>
-              <a:rPr lang="ko-KR" altLang="en-US" sz="1000" dirty="0">
-                <a:solidFill>
-                  <a:schemeClr val="bg1">
-                    <a:lumMod val="75000"/>
-                  </a:schemeClr>
-                </a:solidFill>
-                <a:latin typeface="나눔바른고딕" panose="020B0603020101020101" pitchFamily="34" charset="-127"/>
-                <a:ea typeface="나눔바른고딕" panose="020B0603020101020101" pitchFamily="34" charset="-127"/>
-              </a:rPr>
-              <a:t> </a:t>
-            </a:r>
-            <a:r>
-              <a:rPr lang="en-US" altLang="ko-KR" sz="1000" dirty="0">
-                <a:solidFill>
-                  <a:schemeClr val="bg1">
-                    <a:lumMod val="75000"/>
-                  </a:schemeClr>
-                </a:solidFill>
-                <a:latin typeface="나눔바른고딕" panose="020B0603020101020101" pitchFamily="34" charset="-127"/>
-                <a:ea typeface="나눔바른고딕" panose="020B0603020101020101" pitchFamily="34" charset="-127"/>
-              </a:rPr>
-              <a:t>2026 </a:t>
-            </a:r>
-            <a:r>
-              <a:rPr lang="ko-KR" altLang="en-US" sz="1000" dirty="0">
-                <a:solidFill>
-                  <a:schemeClr val="bg1">
-                    <a:lumMod val="75000"/>
-                  </a:schemeClr>
-                </a:solidFill>
-                <a:latin typeface="나눔바른고딕" panose="020B0603020101020101" pitchFamily="34" charset="-127"/>
-                <a:ea typeface="나눔바른고딕" panose="020B0603020101020101" pitchFamily="34" charset="-127"/>
-              </a:rPr>
-              <a:t>여름 </a:t>
-            </a:r>
-            <a:r>
-              <a:rPr lang="ko-KR" altLang="en-US" sz="1000" dirty="0" err="1">
-                <a:solidFill>
-                  <a:schemeClr val="bg1">
-                    <a:lumMod val="75000"/>
-                  </a:schemeClr>
-                </a:solidFill>
-                <a:latin typeface="나눔바른고딕" panose="020B0603020101020101" pitchFamily="34" charset="-127"/>
-                <a:ea typeface="나눔바른고딕" panose="020B0603020101020101" pitchFamily="34" charset="-127"/>
-              </a:rPr>
-              <a:t>인턴십</a:t>
-            </a:r>
-            <a:endParaRPr lang="ko-KR" altLang="en-US" sz="1000" dirty="0">
-              <a:solidFill>
-                <a:schemeClr val="bg1">
-                  <a:lumMod val="75000"/>
-                </a:schemeClr>
-              </a:solidFill>
-              <a:latin typeface="나눔바른고딕" panose="020B0603020101020101" pitchFamily="34" charset="-127"/>
-              <a:ea typeface="나눔바른고딕" panose="020B0603020101020101" pitchFamily="34" charset="-127"/>
-            </a:endParaRPr>
-          </a:p>
-        </p:txBody>
-      </p:sp>
-      <p:sp>
-        <p:nvSpPr>
-          <p:cNvPr id="13" name="TextBox 12">
-            <a:extLst>
-              <a:ext uri="{FF2B5EF4-FFF2-40B4-BE49-F238E27FC236}">
-                <a16:creationId xmlns:a16="http://schemas.microsoft.com/office/drawing/2014/main" id="{0A281A7B-BF6C-66B0-858C-91AA9CDC8CA2}"/>
-              </a:ext>
-            </a:extLst>
-          </p:cNvPr>
-          <p:cNvSpPr txBox="1"/>
-          <p:nvPr/>
-        </p:nvSpPr>
-        <p:spPr>
-          <a:xfrm>
-            <a:off x="302450" y="1342316"/>
-            <a:ext cx="2694247" cy="276999"/>
-          </a:xfrm>
-          <a:prstGeom prst="rect">
-            <a:avLst/>
-          </a:prstGeom>
-          <a:noFill/>
-        </p:spPr>
-        <p:txBody>
-          <a:bodyPr wrap="square" rtlCol="0">
-            <a:spAutoFit/>
-          </a:bodyPr>
-          <a:lstStyle/>
-          <a:p>
-            <a:r>
-              <a:rPr lang="ko-KR" altLang="en-US" sz="1200" dirty="0">
-                <a:latin typeface="나눔바른고딕" panose="020B0603020101020101" pitchFamily="34" charset="-127"/>
-                <a:ea typeface="나눔바른고딕" panose="020B0603020101020101" pitchFamily="34" charset="-127"/>
-              </a:rPr>
-              <a:t>상태별 인식 처리 </a:t>
-            </a:r>
-            <a:r>
-              <a:rPr lang="en-US" altLang="ko-KR" sz="1200" dirty="0">
-                <a:latin typeface="나눔바른고딕" panose="020B0603020101020101" pitchFamily="34" charset="-127"/>
-                <a:ea typeface="나눔바른고딕" panose="020B0603020101020101" pitchFamily="34" charset="-127"/>
-              </a:rPr>
-              <a:t>- </a:t>
-            </a:r>
-            <a:r>
-              <a:rPr lang="ko-KR" altLang="en-US" sz="1200" dirty="0">
-                <a:latin typeface="나눔바른고딕" panose="020B0603020101020101" pitchFamily="34" charset="-127"/>
-                <a:ea typeface="나눔바른고딕" panose="020B0603020101020101" pitchFamily="34" charset="-127"/>
-              </a:rPr>
-              <a:t>노드 재사용</a:t>
-            </a:r>
-            <a:endParaRPr lang="en-US" altLang="ko-KR" sz="1200" dirty="0">
-              <a:latin typeface="나눔바른고딕" panose="020B0603020101020101" pitchFamily="34" charset="-127"/>
-              <a:ea typeface="나눔바른고딕" panose="020B0603020101020101" pitchFamily="34" charset="-127"/>
-            </a:endParaRPr>
-          </a:p>
-        </p:txBody>
-      </p:sp>
-    </p:spTree>
-    <p:extLst>
-      <p:ext uri="{BB962C8B-B14F-4D97-AF65-F5344CB8AC3E}">
-        <p14:creationId xmlns:p14="http://schemas.microsoft.com/office/powerpoint/2010/main" val="2554348206"/>
-      </p:ext>
-    </p:extLst>
-  </p:cSld>
-  <p:clrMapOvr>
-    <a:masterClrMapping/>
-  </p:clrMapOvr>
-</p:sld>
-</file>
-
-<file path=ppt/slides/slide5.xml><?xml version="1.0" encoding="utf-8"?>
-<p:sld xmlns:a="http://schemas.openxmlformats.org/drawingml/2006/main" xmlns:r="http://schemas.openxmlformats.org/officeDocument/2006/relationships" xmlns:p="http://schemas.openxmlformats.org/presentationml/2006/main">
-  <p:cSld>
-    <p:spTree>
-      <p:nvGrpSpPr>
-        <p:cNvPr id="1" name="">
-          <a:extLst>
-            <a:ext uri="{FF2B5EF4-FFF2-40B4-BE49-F238E27FC236}">
-              <a16:creationId xmlns:a16="http://schemas.microsoft.com/office/drawing/2014/main" id="{960F3801-1345-73B1-BC4D-455683B38EDD}"/>
-            </a:ext>
-          </a:extLst>
-        </p:cNvPr>
-        <p:cNvGrpSpPr/>
-        <p:nvPr/>
-      </p:nvGrpSpPr>
-      <p:grpSpPr>
-        <a:xfrm>
-          <a:off x="0" y="0"/>
-          <a:ext cx="0" cy="0"/>
-          <a:chOff x="0" y="0"/>
-          <a:chExt cx="0" cy="0"/>
-        </a:xfrm>
-      </p:grpSpPr>
-      <p:sp>
-        <p:nvSpPr>
-          <p:cNvPr id="8" name="TextBox 7">
-            <a:extLst>
-              <a:ext uri="{FF2B5EF4-FFF2-40B4-BE49-F238E27FC236}">
-                <a16:creationId xmlns:a16="http://schemas.microsoft.com/office/drawing/2014/main" id="{953A2C19-7BB6-4B8F-B088-53F2041DCA07}"/>
-              </a:ext>
-            </a:extLst>
-          </p:cNvPr>
-          <p:cNvSpPr txBox="1"/>
-          <p:nvPr/>
-        </p:nvSpPr>
-        <p:spPr>
-          <a:xfrm>
-            <a:off x="302451" y="315453"/>
-            <a:ext cx="4944140" cy="369332"/>
-          </a:xfrm>
-          <a:prstGeom prst="rect">
-            <a:avLst/>
-          </a:prstGeom>
-          <a:noFill/>
-        </p:spPr>
-        <p:txBody>
-          <a:bodyPr wrap="square" rtlCol="0">
-            <a:spAutoFit/>
-          </a:bodyPr>
-          <a:lstStyle/>
-          <a:p>
-            <a:r>
-              <a:rPr lang="ko-KR" altLang="en-US" dirty="0">
-                <a:latin typeface="나눔바른고딕" panose="020B0603020101020101" pitchFamily="34" charset="-127"/>
-                <a:ea typeface="나눔바른고딕" panose="020B0603020101020101" pitchFamily="34" charset="-127"/>
-              </a:rPr>
-              <a:t>이번 주 작업 내역</a:t>
-            </a:r>
-            <a:endParaRPr lang="en-US" altLang="ko-KR" dirty="0">
-              <a:latin typeface="나눔바른고딕" panose="020B0603020101020101" pitchFamily="34" charset="-127"/>
-              <a:ea typeface="나눔바른고딕" panose="020B0603020101020101" pitchFamily="34" charset="-127"/>
-            </a:endParaRPr>
-          </a:p>
-        </p:txBody>
-      </p:sp>
-      <p:sp>
-        <p:nvSpPr>
-          <p:cNvPr id="6" name="직사각형 5"/>
-          <p:cNvSpPr/>
-          <p:nvPr/>
-        </p:nvSpPr>
-        <p:spPr>
-          <a:xfrm>
-            <a:off x="10443172" y="118011"/>
-            <a:ext cx="1596912" cy="246221"/>
-          </a:xfrm>
-          <a:prstGeom prst="rect">
-            <a:avLst/>
-          </a:prstGeom>
-        </p:spPr>
-        <p:txBody>
-          <a:bodyPr wrap="none">
-            <a:spAutoFit/>
-          </a:bodyPr>
-          <a:lstStyle/>
-          <a:p>
-            <a:r>
-              <a:rPr lang="ko-KR" altLang="en-US" sz="1000" dirty="0" err="1">
-                <a:solidFill>
-                  <a:schemeClr val="bg1">
-                    <a:lumMod val="75000"/>
-                  </a:schemeClr>
-                </a:solidFill>
-                <a:latin typeface="나눔바른고딕" panose="020B0603020101020101" pitchFamily="34" charset="-127"/>
-                <a:ea typeface="나눔바른고딕" panose="020B0603020101020101" pitchFamily="34" charset="-127"/>
-              </a:rPr>
-              <a:t>펄어비스</a:t>
-            </a:r>
-            <a:r>
-              <a:rPr lang="ko-KR" altLang="en-US" sz="1000" dirty="0">
-                <a:solidFill>
-                  <a:schemeClr val="bg1">
-                    <a:lumMod val="75000"/>
-                  </a:schemeClr>
-                </a:solidFill>
-                <a:latin typeface="나눔바른고딕" panose="020B0603020101020101" pitchFamily="34" charset="-127"/>
-                <a:ea typeface="나눔바른고딕" panose="020B0603020101020101" pitchFamily="34" charset="-127"/>
-              </a:rPr>
-              <a:t> </a:t>
-            </a:r>
-            <a:r>
-              <a:rPr lang="en-US" altLang="ko-KR" sz="1000" dirty="0">
-                <a:solidFill>
-                  <a:schemeClr val="bg1">
-                    <a:lumMod val="75000"/>
-                  </a:schemeClr>
-                </a:solidFill>
-                <a:latin typeface="나눔바른고딕" panose="020B0603020101020101" pitchFamily="34" charset="-127"/>
-                <a:ea typeface="나눔바른고딕" panose="020B0603020101020101" pitchFamily="34" charset="-127"/>
-              </a:rPr>
-              <a:t>2026 </a:t>
-            </a:r>
-            <a:r>
-              <a:rPr lang="ko-KR" altLang="en-US" sz="1000" dirty="0">
-                <a:solidFill>
-                  <a:schemeClr val="bg1">
-                    <a:lumMod val="75000"/>
-                  </a:schemeClr>
-                </a:solidFill>
-                <a:latin typeface="나눔바른고딕" panose="020B0603020101020101" pitchFamily="34" charset="-127"/>
-                <a:ea typeface="나눔바른고딕" panose="020B0603020101020101" pitchFamily="34" charset="-127"/>
-              </a:rPr>
-              <a:t>여름 </a:t>
-            </a:r>
-            <a:r>
-              <a:rPr lang="ko-KR" altLang="en-US" sz="1000" dirty="0" err="1">
-                <a:solidFill>
-                  <a:schemeClr val="bg1">
-                    <a:lumMod val="75000"/>
-                  </a:schemeClr>
-                </a:solidFill>
-                <a:latin typeface="나눔바른고딕" panose="020B0603020101020101" pitchFamily="34" charset="-127"/>
-                <a:ea typeface="나눔바른고딕" panose="020B0603020101020101" pitchFamily="34" charset="-127"/>
-              </a:rPr>
-              <a:t>인턴십</a:t>
-            </a:r>
-            <a:endParaRPr lang="ko-KR" altLang="en-US" sz="1000" dirty="0">
-              <a:solidFill>
-                <a:schemeClr val="bg1">
-                  <a:lumMod val="75000"/>
-                </a:schemeClr>
-              </a:solidFill>
-              <a:latin typeface="나눔바른고딕" panose="020B0603020101020101" pitchFamily="34" charset="-127"/>
-              <a:ea typeface="나눔바른고딕" panose="020B0603020101020101" pitchFamily="34" charset="-127"/>
-            </a:endParaRPr>
-          </a:p>
-        </p:txBody>
-      </p:sp>
-      <p:sp>
-        <p:nvSpPr>
-          <p:cNvPr id="7" name="TextBox 6">
-            <a:extLst>
-              <a:ext uri="{FF2B5EF4-FFF2-40B4-BE49-F238E27FC236}">
-                <a16:creationId xmlns:a16="http://schemas.microsoft.com/office/drawing/2014/main" id="{2D538815-CBEF-E37B-5659-B5091F86B485}"/>
-              </a:ext>
-            </a:extLst>
-          </p:cNvPr>
-          <p:cNvSpPr txBox="1"/>
-          <p:nvPr/>
-        </p:nvSpPr>
-        <p:spPr>
-          <a:xfrm>
-            <a:off x="302450" y="1003762"/>
-            <a:ext cx="2694247" cy="338554"/>
-          </a:xfrm>
-          <a:prstGeom prst="rect">
-            <a:avLst/>
-          </a:prstGeom>
-          <a:noFill/>
-        </p:spPr>
-        <p:txBody>
-          <a:bodyPr wrap="square" rtlCol="0">
-            <a:spAutoFit/>
-          </a:bodyPr>
-          <a:lstStyle/>
-          <a:p>
-            <a:r>
-              <a:rPr lang="ko-KR" altLang="en-US" sz="1600" dirty="0" err="1">
-                <a:latin typeface="나눔바른고딕" panose="020B0603020101020101" pitchFamily="34" charset="-127"/>
-                <a:ea typeface="나눔바른고딕" panose="020B0603020101020101" pitchFamily="34" charset="-127"/>
-              </a:rPr>
-              <a:t>루트모션</a:t>
-            </a:r>
-            <a:r>
-              <a:rPr lang="ko-KR" altLang="en-US" sz="1600" dirty="0">
-                <a:latin typeface="나눔바른고딕" panose="020B0603020101020101" pitchFamily="34" charset="-127"/>
-                <a:ea typeface="나눔바른고딕" panose="020B0603020101020101" pitchFamily="34" charset="-127"/>
-              </a:rPr>
-              <a:t> 보정</a:t>
-            </a:r>
-            <a:r>
-              <a:rPr lang="en-US" altLang="ko-KR" sz="1600" dirty="0">
-                <a:latin typeface="나눔바른고딕" panose="020B0603020101020101" pitchFamily="34" charset="-127"/>
-                <a:ea typeface="나눔바른고딕" panose="020B0603020101020101" pitchFamily="34" charset="-127"/>
-              </a:rPr>
-              <a:t>2</a:t>
-            </a:r>
-            <a:r>
-              <a:rPr lang="ko-KR" altLang="en-US" sz="1600" dirty="0">
-                <a:latin typeface="나눔바른고딕" panose="020B0603020101020101" pitchFamily="34" charset="-127"/>
-                <a:ea typeface="나눔바른고딕" panose="020B0603020101020101" pitchFamily="34" charset="-127"/>
-              </a:rPr>
-              <a:t> </a:t>
-            </a:r>
-            <a:r>
-              <a:rPr lang="en-US" altLang="ko-KR" sz="1600" dirty="0">
-                <a:latin typeface="나눔바른고딕" panose="020B0603020101020101" pitchFamily="34" charset="-127"/>
-                <a:ea typeface="나눔바른고딕" panose="020B0603020101020101" pitchFamily="34" charset="-127"/>
-              </a:rPr>
-              <a:t>–</a:t>
-            </a:r>
-            <a:r>
-              <a:rPr lang="ko-KR" altLang="en-US" sz="1600" dirty="0">
-                <a:latin typeface="나눔바른고딕" panose="020B0603020101020101" pitchFamily="34" charset="-127"/>
-                <a:ea typeface="나눔바른고딕" panose="020B0603020101020101" pitchFamily="34" charset="-127"/>
-              </a:rPr>
-              <a:t> </a:t>
-            </a:r>
-            <a:r>
-              <a:rPr lang="ko-KR" altLang="en-US" sz="1600" dirty="0" err="1">
-                <a:latin typeface="나눔바른고딕" panose="020B0603020101020101" pitchFamily="34" charset="-127"/>
-                <a:ea typeface="나눔바른고딕" panose="020B0603020101020101" pitchFamily="34" charset="-127"/>
-              </a:rPr>
-              <a:t>베지어</a:t>
-            </a:r>
-            <a:r>
-              <a:rPr lang="ko-KR" altLang="en-US" sz="1600" dirty="0">
-                <a:latin typeface="나눔바른고딕" panose="020B0603020101020101" pitchFamily="34" charset="-127"/>
-                <a:ea typeface="나눔바른고딕" panose="020B0603020101020101" pitchFamily="34" charset="-127"/>
-              </a:rPr>
-              <a:t> 활용</a:t>
-            </a:r>
-            <a:endParaRPr lang="en-US" altLang="ko-KR" sz="1600" dirty="0">
-              <a:latin typeface="나눔바른고딕" panose="020B0603020101020101" pitchFamily="34" charset="-127"/>
-              <a:ea typeface="나눔바른고딕" panose="020B0603020101020101" pitchFamily="34" charset="-127"/>
-            </a:endParaRPr>
-          </a:p>
-        </p:txBody>
-      </p:sp>
-      <p:sp>
-        <p:nvSpPr>
-          <p:cNvPr id="11" name="TextBox 10">
-            <a:extLst>
-              <a:ext uri="{FF2B5EF4-FFF2-40B4-BE49-F238E27FC236}">
-                <a16:creationId xmlns:a16="http://schemas.microsoft.com/office/drawing/2014/main" id="{2D538815-CBEF-E37B-5659-B5091F86B485}"/>
-              </a:ext>
-            </a:extLst>
-          </p:cNvPr>
-          <p:cNvSpPr txBox="1"/>
-          <p:nvPr/>
-        </p:nvSpPr>
-        <p:spPr>
-          <a:xfrm>
-            <a:off x="302450" y="1342316"/>
-            <a:ext cx="5310950" cy="276999"/>
-          </a:xfrm>
-          <a:prstGeom prst="rect">
-            <a:avLst/>
-          </a:prstGeom>
-          <a:noFill/>
-        </p:spPr>
-        <p:txBody>
-          <a:bodyPr wrap="square" rtlCol="0">
-            <a:spAutoFit/>
-          </a:bodyPr>
-          <a:lstStyle/>
-          <a:p>
-            <a:r>
-              <a:rPr lang="ko-KR" altLang="en-US" sz="1200" dirty="0">
-                <a:latin typeface="나눔바른고딕" panose="020B0603020101020101" pitchFamily="34" charset="-127"/>
-                <a:ea typeface="나눔바른고딕" panose="020B0603020101020101" pitchFamily="34" charset="-127"/>
-              </a:rPr>
-              <a:t>디테일 문제</a:t>
-            </a:r>
-          </a:p>
-        </p:txBody>
-      </p:sp>
-      <p:cxnSp>
-        <p:nvCxnSpPr>
-          <p:cNvPr id="12" name="직선 연결선 11">
-            <a:extLst>
-              <a:ext uri="{FF2B5EF4-FFF2-40B4-BE49-F238E27FC236}">
-                <a16:creationId xmlns:a16="http://schemas.microsoft.com/office/drawing/2014/main" id="{76FFFECF-4B1C-95DF-32C3-2D2F19BEDAFB}"/>
-              </a:ext>
-            </a:extLst>
-          </p:cNvPr>
-          <p:cNvCxnSpPr>
-            <a:cxnSpLocks/>
-          </p:cNvCxnSpPr>
-          <p:nvPr/>
-        </p:nvCxnSpPr>
-        <p:spPr>
-          <a:xfrm>
-            <a:off x="387511" y="818707"/>
-            <a:ext cx="11308303" cy="0"/>
-          </a:xfrm>
-          <a:prstGeom prst="line">
-            <a:avLst/>
-          </a:prstGeom>
-          <a:ln>
-            <a:solidFill>
-              <a:schemeClr val="tx2"/>
-            </a:solidFill>
-          </a:ln>
-        </p:spPr>
-        <p:style>
-          <a:lnRef idx="2">
-            <a:schemeClr val="accent1"/>
-          </a:lnRef>
-          <a:fillRef idx="0">
-            <a:schemeClr val="accent1"/>
-          </a:fillRef>
-          <a:effectRef idx="1">
-            <a:schemeClr val="accent1"/>
-          </a:effectRef>
-          <a:fontRef idx="minor">
-            <a:schemeClr val="tx1"/>
-          </a:fontRef>
-        </p:style>
-      </p:cxnSp>
-    </p:spTree>
-    <p:extLst>
-      <p:ext uri="{BB962C8B-B14F-4D97-AF65-F5344CB8AC3E}">
-        <p14:creationId xmlns:p14="http://schemas.microsoft.com/office/powerpoint/2010/main" val="756431288"/>
-      </p:ext>
-    </p:extLst>
-  </p:cSld>
-  <p:clrMapOvr>
-    <a:masterClrMapping/>
-  </p:clrMapOvr>
-</p:sld>
-</file>
-
-<file path=ppt/slides/slide6.xml><?xml version="1.0" encoding="utf-8"?>
-<p:sld xmlns:a="http://schemas.openxmlformats.org/drawingml/2006/main" xmlns:r="http://schemas.openxmlformats.org/officeDocument/2006/relationships" xmlns:p="http://schemas.openxmlformats.org/presentationml/2006/main">
-  <p:cSld>
-    <p:spTree>
-      <p:nvGrpSpPr>
-        <p:cNvPr id="1" name="">
-          <a:extLst>
-            <a:ext uri="{FF2B5EF4-FFF2-40B4-BE49-F238E27FC236}">
-              <a16:creationId xmlns:a16="http://schemas.microsoft.com/office/drawing/2014/main" id="{960F3801-1345-73B1-BC4D-455683B38EDD}"/>
-            </a:ext>
-          </a:extLst>
-        </p:cNvPr>
-        <p:cNvGrpSpPr/>
-        <p:nvPr/>
-      </p:nvGrpSpPr>
-      <p:grpSpPr>
-        <a:xfrm>
-          <a:off x="0" y="0"/>
-          <a:ext cx="0" cy="0"/>
-          <a:chOff x="0" y="0"/>
-          <a:chExt cx="0" cy="0"/>
-        </a:xfrm>
-      </p:grpSpPr>
-      <p:sp>
-        <p:nvSpPr>
-          <p:cNvPr id="8" name="TextBox 7">
-            <a:extLst>
-              <a:ext uri="{FF2B5EF4-FFF2-40B4-BE49-F238E27FC236}">
-                <a16:creationId xmlns:a16="http://schemas.microsoft.com/office/drawing/2014/main" id="{953A2C19-7BB6-4B8F-B088-53F2041DCA07}"/>
-              </a:ext>
-            </a:extLst>
-          </p:cNvPr>
-          <p:cNvSpPr txBox="1"/>
-          <p:nvPr/>
-        </p:nvSpPr>
-        <p:spPr>
-          <a:xfrm>
-            <a:off x="302451" y="315453"/>
-            <a:ext cx="4944140" cy="369332"/>
-          </a:xfrm>
-          <a:prstGeom prst="rect">
-            <a:avLst/>
-          </a:prstGeom>
-          <a:noFill/>
-        </p:spPr>
-        <p:txBody>
-          <a:bodyPr wrap="square" rtlCol="0">
-            <a:spAutoFit/>
-          </a:bodyPr>
-          <a:lstStyle/>
-          <a:p>
-            <a:r>
-              <a:rPr lang="ko-KR" altLang="en-US" dirty="0">
-                <a:latin typeface="나눔바른고딕" panose="020B0603020101020101" pitchFamily="34" charset="-127"/>
-                <a:ea typeface="나눔바른고딕" panose="020B0603020101020101" pitchFamily="34" charset="-127"/>
-              </a:rPr>
-              <a:t>피드백 반영</a:t>
-            </a:r>
-            <a:endParaRPr lang="en-US" altLang="ko-KR" dirty="0">
-              <a:latin typeface="나눔바른고딕" panose="020B0603020101020101" pitchFamily="34" charset="-127"/>
-              <a:ea typeface="나눔바른고딕" panose="020B0603020101020101" pitchFamily="34" charset="-127"/>
-            </a:endParaRPr>
-          </a:p>
-        </p:txBody>
-      </p:sp>
-      <p:sp>
-        <p:nvSpPr>
-          <p:cNvPr id="6" name="직사각형 5"/>
-          <p:cNvSpPr/>
-          <p:nvPr/>
-        </p:nvSpPr>
-        <p:spPr>
-          <a:xfrm>
-            <a:off x="10443172" y="118011"/>
-            <a:ext cx="1596912" cy="246221"/>
-          </a:xfrm>
-          <a:prstGeom prst="rect">
-            <a:avLst/>
-          </a:prstGeom>
-        </p:spPr>
-        <p:txBody>
-          <a:bodyPr wrap="none">
-            <a:spAutoFit/>
-          </a:bodyPr>
-          <a:lstStyle/>
-          <a:p>
-            <a:r>
-              <a:rPr lang="ko-KR" altLang="en-US" sz="1000" dirty="0" err="1">
-                <a:solidFill>
-                  <a:schemeClr val="bg1">
-                    <a:lumMod val="75000"/>
-                  </a:schemeClr>
-                </a:solidFill>
-                <a:latin typeface="나눔바른고딕" panose="020B0603020101020101" pitchFamily="34" charset="-127"/>
-                <a:ea typeface="나눔바른고딕" panose="020B0603020101020101" pitchFamily="34" charset="-127"/>
-              </a:rPr>
-              <a:t>펄어비스</a:t>
-            </a:r>
-            <a:r>
-              <a:rPr lang="ko-KR" altLang="en-US" sz="1000" dirty="0">
-                <a:solidFill>
-                  <a:schemeClr val="bg1">
-                    <a:lumMod val="75000"/>
-                  </a:schemeClr>
-                </a:solidFill>
-                <a:latin typeface="나눔바른고딕" panose="020B0603020101020101" pitchFamily="34" charset="-127"/>
-                <a:ea typeface="나눔바른고딕" panose="020B0603020101020101" pitchFamily="34" charset="-127"/>
-              </a:rPr>
-              <a:t> </a:t>
-            </a:r>
-            <a:r>
-              <a:rPr lang="en-US" altLang="ko-KR" sz="1000" dirty="0">
-                <a:solidFill>
-                  <a:schemeClr val="bg1">
-                    <a:lumMod val="75000"/>
-                  </a:schemeClr>
-                </a:solidFill>
-                <a:latin typeface="나눔바른고딕" panose="020B0603020101020101" pitchFamily="34" charset="-127"/>
-                <a:ea typeface="나눔바른고딕" panose="020B0603020101020101" pitchFamily="34" charset="-127"/>
-              </a:rPr>
-              <a:t>2026 </a:t>
-            </a:r>
-            <a:r>
-              <a:rPr lang="ko-KR" altLang="en-US" sz="1000" dirty="0">
-                <a:solidFill>
-                  <a:schemeClr val="bg1">
-                    <a:lumMod val="75000"/>
-                  </a:schemeClr>
-                </a:solidFill>
-                <a:latin typeface="나눔바른고딕" panose="020B0603020101020101" pitchFamily="34" charset="-127"/>
-                <a:ea typeface="나눔바른고딕" panose="020B0603020101020101" pitchFamily="34" charset="-127"/>
-              </a:rPr>
-              <a:t>여름 </a:t>
-            </a:r>
-            <a:r>
-              <a:rPr lang="ko-KR" altLang="en-US" sz="1000" dirty="0" err="1">
-                <a:solidFill>
-                  <a:schemeClr val="bg1">
-                    <a:lumMod val="75000"/>
-                  </a:schemeClr>
-                </a:solidFill>
-                <a:latin typeface="나눔바른고딕" panose="020B0603020101020101" pitchFamily="34" charset="-127"/>
-                <a:ea typeface="나눔바른고딕" panose="020B0603020101020101" pitchFamily="34" charset="-127"/>
-              </a:rPr>
-              <a:t>인턴십</a:t>
-            </a:r>
-            <a:endParaRPr lang="ko-KR" altLang="en-US" sz="1000" dirty="0">
-              <a:solidFill>
-                <a:schemeClr val="bg1">
-                  <a:lumMod val="75000"/>
-                </a:schemeClr>
-              </a:solidFill>
-              <a:latin typeface="나눔바른고딕" panose="020B0603020101020101" pitchFamily="34" charset="-127"/>
-              <a:ea typeface="나눔바른고딕" panose="020B0603020101020101" pitchFamily="34" charset="-127"/>
-            </a:endParaRPr>
-          </a:p>
-        </p:txBody>
-      </p:sp>
-      <p:sp>
-        <p:nvSpPr>
-          <p:cNvPr id="7" name="TextBox 6">
-            <a:extLst>
-              <a:ext uri="{FF2B5EF4-FFF2-40B4-BE49-F238E27FC236}">
-                <a16:creationId xmlns:a16="http://schemas.microsoft.com/office/drawing/2014/main" id="{2D538815-CBEF-E37B-5659-B5091F86B485}"/>
-              </a:ext>
-            </a:extLst>
-          </p:cNvPr>
-          <p:cNvSpPr txBox="1"/>
-          <p:nvPr/>
-        </p:nvSpPr>
-        <p:spPr>
-          <a:xfrm>
-            <a:off x="302450" y="1003762"/>
-            <a:ext cx="2694247" cy="338554"/>
-          </a:xfrm>
-          <a:prstGeom prst="rect">
-            <a:avLst/>
-          </a:prstGeom>
-          <a:noFill/>
-        </p:spPr>
-        <p:txBody>
-          <a:bodyPr wrap="square" rtlCol="0">
-            <a:spAutoFit/>
-          </a:bodyPr>
-          <a:lstStyle/>
-          <a:p>
-            <a:r>
-              <a:rPr lang="ko-KR" altLang="en-US" sz="1600" dirty="0" err="1">
-                <a:latin typeface="나눔바른고딕" panose="020B0603020101020101" pitchFamily="34" charset="-127"/>
-                <a:ea typeface="나눔바른고딕" panose="020B0603020101020101" pitchFamily="34" charset="-127"/>
-              </a:rPr>
-              <a:t>블렌드</a:t>
-            </a:r>
-            <a:r>
-              <a:rPr lang="ko-KR" altLang="en-US" sz="1600" dirty="0">
-                <a:latin typeface="나눔바른고딕" panose="020B0603020101020101" pitchFamily="34" charset="-127"/>
-                <a:ea typeface="나눔바른고딕" panose="020B0603020101020101" pitchFamily="34" charset="-127"/>
-              </a:rPr>
-              <a:t> 스페이스 보완</a:t>
-            </a:r>
-            <a:endParaRPr lang="en-US" altLang="ko-KR" sz="1600" dirty="0">
-              <a:latin typeface="나눔바른고딕" panose="020B0603020101020101" pitchFamily="34" charset="-127"/>
-              <a:ea typeface="나눔바른고딕" panose="020B0603020101020101" pitchFamily="34" charset="-127"/>
-            </a:endParaRPr>
-          </a:p>
-        </p:txBody>
-      </p:sp>
-      <p:cxnSp>
-        <p:nvCxnSpPr>
-          <p:cNvPr id="11" name="직선 연결선 10">
-            <a:extLst>
-              <a:ext uri="{FF2B5EF4-FFF2-40B4-BE49-F238E27FC236}">
-                <a16:creationId xmlns:a16="http://schemas.microsoft.com/office/drawing/2014/main" id="{76FFFECF-4B1C-95DF-32C3-2D2F19BEDAFB}"/>
-              </a:ext>
-            </a:extLst>
-          </p:cNvPr>
-          <p:cNvCxnSpPr>
-            <a:cxnSpLocks/>
-          </p:cNvCxnSpPr>
-          <p:nvPr/>
-        </p:nvCxnSpPr>
-        <p:spPr>
-          <a:xfrm>
-            <a:off x="387511" y="818707"/>
-            <a:ext cx="11308303" cy="0"/>
-          </a:xfrm>
-          <a:prstGeom prst="line">
-            <a:avLst/>
-          </a:prstGeom>
-          <a:ln>
-            <a:solidFill>
-              <a:schemeClr val="tx2"/>
-            </a:solidFill>
-          </a:ln>
-        </p:spPr>
-        <p:style>
-          <a:lnRef idx="2">
-            <a:schemeClr val="accent1"/>
-          </a:lnRef>
-          <a:fillRef idx="0">
-            <a:schemeClr val="accent1"/>
-          </a:fillRef>
-          <a:effectRef idx="1">
-            <a:schemeClr val="accent1"/>
-          </a:effectRef>
-          <a:fontRef idx="minor">
-            <a:schemeClr val="tx1"/>
-          </a:fontRef>
-        </p:style>
-      </p:cxnSp>
-      <p:sp>
-        <p:nvSpPr>
           <p:cNvPr id="5" name="TextBox 4">
             <a:extLst>
               <a:ext uri="{FF2B5EF4-FFF2-40B4-BE49-F238E27FC236}">
-                <a16:creationId xmlns:a16="http://schemas.microsoft.com/office/drawing/2014/main" id="{08BA9FCF-A704-3B2E-2B03-A0A73FB521F1}"/>
-              </a:ext>
-            </a:extLst>
-          </p:cNvPr>
-          <p:cNvSpPr txBox="1"/>
-          <p:nvPr/>
-        </p:nvSpPr>
-        <p:spPr>
-          <a:xfrm>
-            <a:off x="302450" y="1342316"/>
-            <a:ext cx="5310950" cy="276999"/>
-          </a:xfrm>
-          <a:prstGeom prst="rect">
-            <a:avLst/>
-          </a:prstGeom>
-          <a:noFill/>
-        </p:spPr>
-        <p:txBody>
-          <a:bodyPr wrap="square" rtlCol="0">
-            <a:spAutoFit/>
-          </a:bodyPr>
-          <a:lstStyle/>
-          <a:p>
-            <a:r>
-              <a:rPr lang="ko-KR" altLang="en-US" sz="1200" dirty="0">
-                <a:latin typeface="나눔바른고딕" panose="020B0603020101020101" pitchFamily="34" charset="-127"/>
-                <a:ea typeface="나눔바른고딕" panose="020B0603020101020101" pitchFamily="34" charset="-127"/>
-              </a:rPr>
-              <a:t>적용 전</a:t>
-            </a:r>
-            <a:r>
-              <a:rPr lang="en-US" altLang="ko-KR" sz="1200">
-                <a:latin typeface="나눔바른고딕" panose="020B0603020101020101" pitchFamily="34" charset="-127"/>
-                <a:ea typeface="나눔바른고딕" panose="020B0603020101020101" pitchFamily="34" charset="-127"/>
-              </a:rPr>
-              <a:t>, </a:t>
-            </a:r>
-            <a:r>
-              <a:rPr lang="ko-KR" altLang="en-US" sz="1200">
-                <a:latin typeface="나눔바른고딕" panose="020B0603020101020101" pitchFamily="34" charset="-127"/>
-                <a:ea typeface="나눔바른고딕" panose="020B0603020101020101" pitchFamily="34" charset="-127"/>
-              </a:rPr>
-              <a:t>후</a:t>
-            </a:r>
-            <a:endParaRPr lang="ko-KR" altLang="en-US" sz="1200" dirty="0">
-              <a:latin typeface="나눔바른고딕" panose="020B0603020101020101" pitchFamily="34" charset="-127"/>
-              <a:ea typeface="나눔바른고딕" panose="020B0603020101020101" pitchFamily="34" charset="-127"/>
-            </a:endParaRPr>
-          </a:p>
-        </p:txBody>
-      </p:sp>
-    </p:spTree>
-    <p:extLst>
-      <p:ext uri="{BB962C8B-B14F-4D97-AF65-F5344CB8AC3E}">
-        <p14:creationId xmlns:p14="http://schemas.microsoft.com/office/powerpoint/2010/main" val="2618570220"/>
-      </p:ext>
-    </p:extLst>
-  </p:cSld>
-  <p:clrMapOvr>
-    <a:masterClrMapping/>
-  </p:clrMapOvr>
-</p:sld>
-</file>
-
-<file path=ppt/slides/slide7.xml><?xml version="1.0" encoding="utf-8"?>
-<p:sld xmlns:a="http://schemas.openxmlformats.org/drawingml/2006/main" xmlns:r="http://schemas.openxmlformats.org/officeDocument/2006/relationships" xmlns:p="http://schemas.openxmlformats.org/presentationml/2006/main">
-  <p:cSld>
-    <p:spTree>
-      <p:nvGrpSpPr>
-        <p:cNvPr id="1" name="">
-          <a:extLst>
-            <a:ext uri="{FF2B5EF4-FFF2-40B4-BE49-F238E27FC236}">
-              <a16:creationId xmlns:a16="http://schemas.microsoft.com/office/drawing/2014/main" id="{49DA7EAA-204E-2F90-E52A-6C83B9013025}"/>
-            </a:ext>
-          </a:extLst>
-        </p:cNvPr>
-        <p:cNvGrpSpPr/>
-        <p:nvPr/>
-      </p:nvGrpSpPr>
-      <p:grpSpPr>
-        <a:xfrm>
-          <a:off x="0" y="0"/>
-          <a:ext cx="0" cy="0"/>
-          <a:chOff x="0" y="0"/>
-          <a:chExt cx="0" cy="0"/>
-        </a:xfrm>
-      </p:grpSpPr>
-      <p:sp>
-        <p:nvSpPr>
-          <p:cNvPr id="5" name="TextBox 4">
-            <a:extLst>
-              <a:ext uri="{FF2B5EF4-FFF2-40B4-BE49-F238E27FC236}">
-                <a16:creationId xmlns:a16="http://schemas.microsoft.com/office/drawing/2014/main" id="{4715F932-2F2C-4A3F-7F16-1B13D352985A}"/>
+                <a16:creationId xmlns:a16="http://schemas.microsoft.com/office/drawing/2014/main" xmlns="" id="{4715F932-2F2C-4A3F-7F16-1B13D352985A}"/>
               </a:ext>
             </a:extLst>
           </p:cNvPr>
@@ -6001,21 +4608,21 @@
                 <a:gridCol w="791436">
                   <a:extLst>
                     <a:ext uri="{9D8B030D-6E8A-4147-A177-3AD203B41FA5}">
-                      <a16:colId xmlns:a16="http://schemas.microsoft.com/office/drawing/2014/main" val="20000"/>
+                      <a16:colId xmlns:a16="http://schemas.microsoft.com/office/drawing/2014/main" xmlns="" val="20000"/>
                     </a:ext>
                   </a:extLst>
                 </a:gridCol>
                 <a:gridCol w="4207281">
                   <a:extLst>
                     <a:ext uri="{9D8B030D-6E8A-4147-A177-3AD203B41FA5}">
-                      <a16:colId xmlns:a16="http://schemas.microsoft.com/office/drawing/2014/main" val="20001"/>
+                      <a16:colId xmlns:a16="http://schemas.microsoft.com/office/drawing/2014/main" xmlns="" val="20001"/>
                     </a:ext>
                   </a:extLst>
                 </a:gridCol>
                 <a:gridCol w="6320143">
                   <a:extLst>
                     <a:ext uri="{9D8B030D-6E8A-4147-A177-3AD203B41FA5}">
-                      <a16:colId xmlns:a16="http://schemas.microsoft.com/office/drawing/2014/main" val="20002"/>
+                      <a16:colId xmlns:a16="http://schemas.microsoft.com/office/drawing/2014/main" xmlns="" val="20002"/>
                     </a:ext>
                   </a:extLst>
                 </a:gridCol>
@@ -6071,7 +4678,7 @@
                 </a:tc>
                 <a:extLst>
                   <a:ext uri="{0D108BD9-81ED-4DB2-BD59-A6C34878D82A}">
-                    <a16:rowId xmlns:a16="http://schemas.microsoft.com/office/drawing/2014/main" val="10000"/>
+                    <a16:rowId xmlns:a16="http://schemas.microsoft.com/office/drawing/2014/main" xmlns="" val="10000"/>
                   </a:ext>
                 </a:extLst>
               </a:tr>
@@ -6250,7 +4857,7 @@
                 </a:tc>
                 <a:extLst>
                   <a:ext uri="{0D108BD9-81ED-4DB2-BD59-A6C34878D82A}">
-                    <a16:rowId xmlns:a16="http://schemas.microsoft.com/office/drawing/2014/main" val="10001"/>
+                    <a16:rowId xmlns:a16="http://schemas.microsoft.com/office/drawing/2014/main" xmlns="" val="10001"/>
                   </a:ext>
                 </a:extLst>
               </a:tr>
@@ -6470,7 +5077,7 @@
                 </a:tc>
                 <a:extLst>
                   <a:ext uri="{0D108BD9-81ED-4DB2-BD59-A6C34878D82A}">
-                    <a16:rowId xmlns:a16="http://schemas.microsoft.com/office/drawing/2014/main" val="10002"/>
+                    <a16:rowId xmlns:a16="http://schemas.microsoft.com/office/drawing/2014/main" xmlns="" val="10002"/>
                   </a:ext>
                 </a:extLst>
               </a:tr>
@@ -6645,7 +5252,7 @@
                 </a:tc>
                 <a:extLst>
                   <a:ext uri="{0D108BD9-81ED-4DB2-BD59-A6C34878D82A}">
-                    <a16:rowId xmlns:a16="http://schemas.microsoft.com/office/drawing/2014/main" val="10003"/>
+                    <a16:rowId xmlns:a16="http://schemas.microsoft.com/office/drawing/2014/main" xmlns="" val="10003"/>
                   </a:ext>
                 </a:extLst>
               </a:tr>
@@ -6846,7 +5453,7 @@
                 </a:tc>
                 <a:extLst>
                   <a:ext uri="{0D108BD9-81ED-4DB2-BD59-A6C34878D82A}">
-                    <a16:rowId xmlns:a16="http://schemas.microsoft.com/office/drawing/2014/main" val="10004"/>
+                    <a16:rowId xmlns:a16="http://schemas.microsoft.com/office/drawing/2014/main" xmlns="" val="10004"/>
                   </a:ext>
                 </a:extLst>
               </a:tr>
@@ -7030,7 +5637,7 @@
                 </a:tc>
                 <a:extLst>
                   <a:ext uri="{0D108BD9-81ED-4DB2-BD59-A6C34878D82A}">
-                    <a16:rowId xmlns:a16="http://schemas.microsoft.com/office/drawing/2014/main" val="10005"/>
+                    <a16:rowId xmlns:a16="http://schemas.microsoft.com/office/drawing/2014/main" xmlns="" val="10005"/>
                   </a:ext>
                 </a:extLst>
               </a:tr>
@@ -7086,7 +5693,7 @@
                 </a:tc>
                 <a:extLst>
                   <a:ext uri="{0D108BD9-81ED-4DB2-BD59-A6C34878D82A}">
-                    <a16:rowId xmlns:a16="http://schemas.microsoft.com/office/drawing/2014/main" val="10006"/>
+                    <a16:rowId xmlns:a16="http://schemas.microsoft.com/office/drawing/2014/main" xmlns="" val="10006"/>
                   </a:ext>
                 </a:extLst>
               </a:tr>
@@ -7158,7 +5765,7 @@
                 </a:tc>
                 <a:extLst>
                   <a:ext uri="{0D108BD9-81ED-4DB2-BD59-A6C34878D82A}">
-                    <a16:rowId xmlns:a16="http://schemas.microsoft.com/office/drawing/2014/main" val="10007"/>
+                    <a16:rowId xmlns:a16="http://schemas.microsoft.com/office/drawing/2014/main" xmlns="" val="10007"/>
                   </a:ext>
                 </a:extLst>
               </a:tr>
@@ -7217,7 +5824,7 @@
                 </a:tc>
                 <a:extLst>
                   <a:ext uri="{0D108BD9-81ED-4DB2-BD59-A6C34878D82A}">
-                    <a16:rowId xmlns:a16="http://schemas.microsoft.com/office/drawing/2014/main" val="10008"/>
+                    <a16:rowId xmlns:a16="http://schemas.microsoft.com/office/drawing/2014/main" xmlns="" val="10008"/>
                   </a:ext>
                 </a:extLst>
               </a:tr>
@@ -7322,6 +5929,4489 @@
     <p:extLst>
       <p:ext uri="{BB962C8B-B14F-4D97-AF65-F5344CB8AC3E}">
         <p14:creationId xmlns:p14="http://schemas.microsoft.com/office/powerpoint/2010/main" val="2156804411"/>
+      </p:ext>
+    </p:extLst>
+  </p:cSld>
+  <p:clrMapOvr>
+    <a:masterClrMapping/>
+  </p:clrMapOvr>
+</p:sld>
+</file>
+
+<file path=ppt/slides/slide2.xml><?xml version="1.0" encoding="utf-8"?>
+<p:sld xmlns:a="http://schemas.openxmlformats.org/drawingml/2006/main" xmlns:r="http://schemas.openxmlformats.org/officeDocument/2006/relationships" xmlns:p="http://schemas.openxmlformats.org/presentationml/2006/main">
+  <p:cSld>
+    <p:spTree>
+      <p:nvGrpSpPr>
+        <p:cNvPr id="1" name="">
+          <a:extLst>
+            <a:ext uri="{FF2B5EF4-FFF2-40B4-BE49-F238E27FC236}">
+              <a16:creationId xmlns:a16="http://schemas.microsoft.com/office/drawing/2014/main" xmlns="" id="{49DA7EAA-204E-2F90-E52A-6C83B9013025}"/>
+            </a:ext>
+          </a:extLst>
+        </p:cNvPr>
+        <p:cNvGrpSpPr/>
+        <p:nvPr/>
+      </p:nvGrpSpPr>
+      <p:grpSpPr>
+        <a:xfrm>
+          <a:off x="0" y="0"/>
+          <a:ext cx="0" cy="0"/>
+          <a:chOff x="0" y="0"/>
+          <a:chExt cx="0" cy="0"/>
+        </a:xfrm>
+      </p:grpSpPr>
+      <p:sp>
+        <p:nvSpPr>
+          <p:cNvPr id="8" name="TextBox 7">
+            <a:extLst>
+              <a:ext uri="{FF2B5EF4-FFF2-40B4-BE49-F238E27FC236}">
+                <a16:creationId xmlns:a16="http://schemas.microsoft.com/office/drawing/2014/main" xmlns="" id="{701093AF-254C-83D7-8032-465A5FB513FB}"/>
+              </a:ext>
+            </a:extLst>
+          </p:cNvPr>
+          <p:cNvSpPr txBox="1"/>
+          <p:nvPr/>
+        </p:nvSpPr>
+        <p:spPr>
+          <a:xfrm>
+            <a:off x="302451" y="315453"/>
+            <a:ext cx="4944140" cy="369332"/>
+          </a:xfrm>
+          <a:prstGeom prst="rect">
+            <a:avLst/>
+          </a:prstGeom>
+          <a:noFill/>
+        </p:spPr>
+        <p:txBody>
+          <a:bodyPr wrap="square" rtlCol="0">
+            <a:spAutoFit/>
+          </a:bodyPr>
+          <a:lstStyle/>
+          <a:p>
+            <a:r>
+              <a:rPr lang="ko-KR" altLang="en-US" dirty="0">
+                <a:latin typeface="나눔바른고딕" panose="020B0603020101020101" pitchFamily="34" charset="-127"/>
+                <a:ea typeface="나눔바른고딕" panose="020B0603020101020101" pitchFamily="34" charset="-127"/>
+              </a:rPr>
+              <a:t>이번 주 작업 내역</a:t>
+            </a:r>
+            <a:endParaRPr lang="en-US" altLang="ko-KR" dirty="0">
+              <a:latin typeface="나눔바른고딕" panose="020B0603020101020101" pitchFamily="34" charset="-127"/>
+              <a:ea typeface="나눔바른고딕" panose="020B0603020101020101" pitchFamily="34" charset="-127"/>
+            </a:endParaRPr>
+          </a:p>
+        </p:txBody>
+      </p:sp>
+      <p:sp>
+        <p:nvSpPr>
+          <p:cNvPr id="10" name="TextBox 9">
+            <a:extLst>
+              <a:ext uri="{FF2B5EF4-FFF2-40B4-BE49-F238E27FC236}">
+                <a16:creationId xmlns:a16="http://schemas.microsoft.com/office/drawing/2014/main" xmlns="" id="{2D538815-CBEF-E37B-5659-B5091F86B485}"/>
+              </a:ext>
+            </a:extLst>
+          </p:cNvPr>
+          <p:cNvSpPr txBox="1"/>
+          <p:nvPr/>
+        </p:nvSpPr>
+        <p:spPr>
+          <a:xfrm>
+            <a:off x="302450" y="1003762"/>
+            <a:ext cx="2694247" cy="338554"/>
+          </a:xfrm>
+          <a:prstGeom prst="rect">
+            <a:avLst/>
+          </a:prstGeom>
+          <a:noFill/>
+        </p:spPr>
+        <p:txBody>
+          <a:bodyPr wrap="square" rtlCol="0">
+            <a:spAutoFit/>
+          </a:bodyPr>
+          <a:lstStyle/>
+          <a:p>
+            <a:r>
+              <a:rPr lang="ko-KR" altLang="en-US" sz="1600" dirty="0" smtClean="0">
+                <a:latin typeface="나눔바른고딕" panose="020B0603020101020101" pitchFamily="34" charset="-127"/>
+                <a:ea typeface="나눔바른고딕" panose="020B0603020101020101" pitchFamily="34" charset="-127"/>
+              </a:rPr>
+              <a:t>특수한 지형 인식</a:t>
+            </a:r>
+            <a:endParaRPr lang="en-US" altLang="ko-KR" sz="1600" dirty="0">
+              <a:latin typeface="나눔바른고딕" panose="020B0603020101020101" pitchFamily="34" charset="-127"/>
+              <a:ea typeface="나눔바른고딕" panose="020B0603020101020101" pitchFamily="34" charset="-127"/>
+            </a:endParaRPr>
+          </a:p>
+        </p:txBody>
+      </p:sp>
+      <p:cxnSp>
+        <p:nvCxnSpPr>
+          <p:cNvPr id="3" name="직선 연결선 2">
+            <a:extLst>
+              <a:ext uri="{FF2B5EF4-FFF2-40B4-BE49-F238E27FC236}">
+                <a16:creationId xmlns:a16="http://schemas.microsoft.com/office/drawing/2014/main" xmlns="" id="{76FFFECF-4B1C-95DF-32C3-2D2F19BEDAFB}"/>
+              </a:ext>
+            </a:extLst>
+          </p:cNvPr>
+          <p:cNvCxnSpPr>
+            <a:cxnSpLocks/>
+          </p:cNvCxnSpPr>
+          <p:nvPr/>
+        </p:nvCxnSpPr>
+        <p:spPr>
+          <a:xfrm>
+            <a:off x="387511" y="818707"/>
+            <a:ext cx="11308303" cy="0"/>
+          </a:xfrm>
+          <a:prstGeom prst="line">
+            <a:avLst/>
+          </a:prstGeom>
+          <a:ln>
+            <a:solidFill>
+              <a:schemeClr val="tx2"/>
+            </a:solidFill>
+          </a:ln>
+        </p:spPr>
+        <p:style>
+          <a:lnRef idx="2">
+            <a:schemeClr val="accent1"/>
+          </a:lnRef>
+          <a:fillRef idx="0">
+            <a:schemeClr val="accent1"/>
+          </a:fillRef>
+          <a:effectRef idx="1">
+            <a:schemeClr val="accent1"/>
+          </a:effectRef>
+          <a:fontRef idx="minor">
+            <a:schemeClr val="tx1"/>
+          </a:fontRef>
+        </p:style>
+      </p:cxnSp>
+      <p:sp>
+        <p:nvSpPr>
+          <p:cNvPr id="12" name="직사각형 11"/>
+          <p:cNvSpPr/>
+          <p:nvPr/>
+        </p:nvSpPr>
+        <p:spPr>
+          <a:xfrm>
+            <a:off x="10443172" y="118011"/>
+            <a:ext cx="1596912" cy="246221"/>
+          </a:xfrm>
+          <a:prstGeom prst="rect">
+            <a:avLst/>
+          </a:prstGeom>
+        </p:spPr>
+        <p:txBody>
+          <a:bodyPr wrap="none">
+            <a:spAutoFit/>
+          </a:bodyPr>
+          <a:lstStyle/>
+          <a:p>
+            <a:r>
+              <a:rPr lang="ko-KR" altLang="en-US" sz="1000" dirty="0" err="1">
+                <a:solidFill>
+                  <a:schemeClr val="bg1">
+                    <a:lumMod val="75000"/>
+                  </a:schemeClr>
+                </a:solidFill>
+                <a:latin typeface="나눔바른고딕" panose="020B0603020101020101" pitchFamily="34" charset="-127"/>
+                <a:ea typeface="나눔바른고딕" panose="020B0603020101020101" pitchFamily="34" charset="-127"/>
+              </a:rPr>
+              <a:t>펄어비스</a:t>
+            </a:r>
+            <a:r>
+              <a:rPr lang="ko-KR" altLang="en-US" sz="1000" dirty="0">
+                <a:solidFill>
+                  <a:schemeClr val="bg1">
+                    <a:lumMod val="75000"/>
+                  </a:schemeClr>
+                </a:solidFill>
+                <a:latin typeface="나눔바른고딕" panose="020B0603020101020101" pitchFamily="34" charset="-127"/>
+                <a:ea typeface="나눔바른고딕" panose="020B0603020101020101" pitchFamily="34" charset="-127"/>
+              </a:rPr>
+              <a:t> </a:t>
+            </a:r>
+            <a:r>
+              <a:rPr lang="en-US" altLang="ko-KR" sz="1000" dirty="0">
+                <a:solidFill>
+                  <a:schemeClr val="bg1">
+                    <a:lumMod val="75000"/>
+                  </a:schemeClr>
+                </a:solidFill>
+                <a:latin typeface="나눔바른고딕" panose="020B0603020101020101" pitchFamily="34" charset="-127"/>
+                <a:ea typeface="나눔바른고딕" panose="020B0603020101020101" pitchFamily="34" charset="-127"/>
+              </a:rPr>
+              <a:t>2026 </a:t>
+            </a:r>
+            <a:r>
+              <a:rPr lang="ko-KR" altLang="en-US" sz="1000" dirty="0">
+                <a:solidFill>
+                  <a:schemeClr val="bg1">
+                    <a:lumMod val="75000"/>
+                  </a:schemeClr>
+                </a:solidFill>
+                <a:latin typeface="나눔바른고딕" panose="020B0603020101020101" pitchFamily="34" charset="-127"/>
+                <a:ea typeface="나눔바른고딕" panose="020B0603020101020101" pitchFamily="34" charset="-127"/>
+              </a:rPr>
+              <a:t>여름 </a:t>
+            </a:r>
+            <a:r>
+              <a:rPr lang="ko-KR" altLang="en-US" sz="1000" dirty="0" err="1">
+                <a:solidFill>
+                  <a:schemeClr val="bg1">
+                    <a:lumMod val="75000"/>
+                  </a:schemeClr>
+                </a:solidFill>
+                <a:latin typeface="나눔바른고딕" panose="020B0603020101020101" pitchFamily="34" charset="-127"/>
+                <a:ea typeface="나눔바른고딕" panose="020B0603020101020101" pitchFamily="34" charset="-127"/>
+              </a:rPr>
+              <a:t>인턴십</a:t>
+            </a:r>
+            <a:endParaRPr lang="ko-KR" altLang="en-US" sz="1000" dirty="0">
+              <a:solidFill>
+                <a:schemeClr val="bg1">
+                  <a:lumMod val="75000"/>
+                </a:schemeClr>
+              </a:solidFill>
+              <a:latin typeface="나눔바른고딕" panose="020B0603020101020101" pitchFamily="34" charset="-127"/>
+              <a:ea typeface="나눔바른고딕" panose="020B0603020101020101" pitchFamily="34" charset="-127"/>
+            </a:endParaRPr>
+          </a:p>
+        </p:txBody>
+      </p:sp>
+      <p:sp>
+        <p:nvSpPr>
+          <p:cNvPr id="13" name="TextBox 12">
+            <a:extLst>
+              <a:ext uri="{FF2B5EF4-FFF2-40B4-BE49-F238E27FC236}">
+                <a16:creationId xmlns:a16="http://schemas.microsoft.com/office/drawing/2014/main" xmlns="" id="{2D538815-CBEF-E37B-5659-B5091F86B485}"/>
+              </a:ext>
+            </a:extLst>
+          </p:cNvPr>
+          <p:cNvSpPr txBox="1"/>
+          <p:nvPr/>
+        </p:nvSpPr>
+        <p:spPr>
+          <a:xfrm>
+            <a:off x="302449" y="1342316"/>
+            <a:ext cx="7464813" cy="276999"/>
+          </a:xfrm>
+          <a:prstGeom prst="rect">
+            <a:avLst/>
+          </a:prstGeom>
+          <a:noFill/>
+        </p:spPr>
+        <p:txBody>
+          <a:bodyPr wrap="square" rtlCol="0">
+            <a:spAutoFit/>
+          </a:bodyPr>
+          <a:lstStyle/>
+          <a:p>
+            <a:r>
+              <a:rPr lang="ko-KR" altLang="en-US" sz="1200" dirty="0">
+                <a:latin typeface="나눔바른고딕" panose="020B0603020101020101" pitchFamily="34" charset="-127"/>
+                <a:ea typeface="나눔바른고딕" panose="020B0603020101020101" pitchFamily="34" charset="-127"/>
+              </a:rPr>
+              <a:t>크기가 크고 간단한 </a:t>
+            </a:r>
+            <a:r>
+              <a:rPr lang="ko-KR" altLang="en-US" sz="1200" dirty="0" smtClean="0">
+                <a:latin typeface="나눔바른고딕" panose="020B0603020101020101" pitchFamily="34" charset="-127"/>
+                <a:ea typeface="나눔바른고딕" panose="020B0603020101020101" pitchFamily="34" charset="-127"/>
+              </a:rPr>
+              <a:t>형태의 지형과 함께 세부적으로 더 돌출된 형태의 지형 배치</a:t>
+            </a:r>
+            <a:r>
+              <a:rPr lang="en-US" altLang="ko-KR" sz="1200" dirty="0" smtClean="0">
+                <a:latin typeface="나눔바른고딕" panose="020B0603020101020101" pitchFamily="34" charset="-127"/>
+                <a:ea typeface="나눔바른고딕" panose="020B0603020101020101" pitchFamily="34" charset="-127"/>
+              </a:rPr>
+              <a:t>.</a:t>
+            </a:r>
+          </a:p>
+        </p:txBody>
+      </p:sp>
+      <p:sp>
+        <p:nvSpPr>
+          <p:cNvPr id="14" name="TextBox 13">
+            <a:extLst>
+              <a:ext uri="{FF2B5EF4-FFF2-40B4-BE49-F238E27FC236}">
+                <a16:creationId xmlns:a16="http://schemas.microsoft.com/office/drawing/2014/main" xmlns="" id="{2D538815-CBEF-E37B-5659-B5091F86B485}"/>
+              </a:ext>
+            </a:extLst>
+          </p:cNvPr>
+          <p:cNvSpPr txBox="1"/>
+          <p:nvPr/>
+        </p:nvSpPr>
+        <p:spPr>
+          <a:xfrm>
+            <a:off x="302450" y="1727036"/>
+            <a:ext cx="5389433" cy="461665"/>
+          </a:xfrm>
+          <a:prstGeom prst="rect">
+            <a:avLst/>
+          </a:prstGeom>
+          <a:noFill/>
+        </p:spPr>
+        <p:txBody>
+          <a:bodyPr wrap="square" rtlCol="0">
+            <a:spAutoFit/>
+          </a:bodyPr>
+          <a:lstStyle/>
+          <a:p>
+            <a:r>
+              <a:rPr lang="ko-KR" altLang="en-US" sz="1200" dirty="0" smtClean="0">
+                <a:latin typeface="나눔바른고딕" panose="020B0603020101020101" pitchFamily="34" charset="-127"/>
+                <a:ea typeface="나눔바른고딕" panose="020B0603020101020101" pitchFamily="34" charset="-127"/>
+              </a:rPr>
+              <a:t>기존 방식의 경우 크고 덩어리진 지형을 인식하는데 초점</a:t>
+            </a:r>
+            <a:r>
+              <a:rPr lang="en-US" altLang="ko-KR" sz="1200" dirty="0" smtClean="0">
+                <a:latin typeface="나눔바른고딕" panose="020B0603020101020101" pitchFamily="34" charset="-127"/>
+                <a:ea typeface="나눔바른고딕" panose="020B0603020101020101" pitchFamily="34" charset="-127"/>
+              </a:rPr>
+              <a:t>.</a:t>
+            </a:r>
+          </a:p>
+          <a:p>
+            <a:r>
+              <a:rPr lang="ko-KR" altLang="en-US" sz="1200" dirty="0" smtClean="0">
+                <a:latin typeface="나눔바른고딕" panose="020B0603020101020101" pitchFamily="34" charset="-127"/>
+                <a:ea typeface="나눔바른고딕" panose="020B0603020101020101" pitchFamily="34" charset="-127"/>
+              </a:rPr>
+              <a:t>추가된 지형은 면적이 상대적으로 작은 형태</a:t>
+            </a:r>
+            <a:endParaRPr lang="en-US" altLang="ko-KR" sz="1200" dirty="0" smtClean="0">
+              <a:latin typeface="나눔바른고딕" panose="020B0603020101020101" pitchFamily="34" charset="-127"/>
+              <a:ea typeface="나눔바른고딕" panose="020B0603020101020101" pitchFamily="34" charset="-127"/>
+            </a:endParaRPr>
+          </a:p>
+        </p:txBody>
+      </p:sp>
+      <p:sp>
+        <p:nvSpPr>
+          <p:cNvPr id="9" name="TextBox 8">
+            <a:extLst>
+              <a:ext uri="{FF2B5EF4-FFF2-40B4-BE49-F238E27FC236}">
+                <a16:creationId xmlns:a16="http://schemas.microsoft.com/office/drawing/2014/main" xmlns="" id="{2D538815-CBEF-E37B-5659-B5091F86B485}"/>
+              </a:ext>
+            </a:extLst>
+          </p:cNvPr>
+          <p:cNvSpPr txBox="1"/>
+          <p:nvPr/>
+        </p:nvSpPr>
+        <p:spPr>
+          <a:xfrm>
+            <a:off x="301979" y="3842203"/>
+            <a:ext cx="2543493" cy="276999"/>
+          </a:xfrm>
+          <a:prstGeom prst="rect">
+            <a:avLst/>
+          </a:prstGeom>
+          <a:noFill/>
+        </p:spPr>
+        <p:txBody>
+          <a:bodyPr wrap="square" rtlCol="0">
+            <a:spAutoFit/>
+          </a:bodyPr>
+          <a:lstStyle/>
+          <a:p>
+            <a:r>
+              <a:rPr lang="ko-KR" altLang="en-US" sz="1200" dirty="0" smtClean="0">
+                <a:latin typeface="나눔바른고딕" panose="020B0603020101020101" pitchFamily="34" charset="-127"/>
+                <a:ea typeface="나눔바른고딕" panose="020B0603020101020101" pitchFamily="34" charset="-127"/>
+              </a:rPr>
+              <a:t>태그 활용</a:t>
+            </a:r>
+            <a:endParaRPr lang="en-US" altLang="ko-KR" sz="1200" dirty="0" smtClean="0">
+              <a:latin typeface="나눔바른고딕" panose="020B0603020101020101" pitchFamily="34" charset="-127"/>
+              <a:ea typeface="나눔바른고딕" panose="020B0603020101020101" pitchFamily="34" charset="-127"/>
+            </a:endParaRPr>
+          </a:p>
+        </p:txBody>
+      </p:sp>
+      <p:sp>
+        <p:nvSpPr>
+          <p:cNvPr id="11" name="TextBox 10">
+            <a:extLst>
+              <a:ext uri="{FF2B5EF4-FFF2-40B4-BE49-F238E27FC236}">
+                <a16:creationId xmlns:a16="http://schemas.microsoft.com/office/drawing/2014/main" xmlns="" id="{2D538815-CBEF-E37B-5659-B5091F86B485}"/>
+              </a:ext>
+            </a:extLst>
+          </p:cNvPr>
+          <p:cNvSpPr txBox="1"/>
+          <p:nvPr/>
+        </p:nvSpPr>
+        <p:spPr>
+          <a:xfrm>
+            <a:off x="301980" y="4119202"/>
+            <a:ext cx="5389433" cy="461665"/>
+          </a:xfrm>
+          <a:prstGeom prst="rect">
+            <a:avLst/>
+          </a:prstGeom>
+          <a:noFill/>
+        </p:spPr>
+        <p:txBody>
+          <a:bodyPr wrap="square" rtlCol="0">
+            <a:spAutoFit/>
+          </a:bodyPr>
+          <a:lstStyle/>
+          <a:p>
+            <a:r>
+              <a:rPr lang="ko-KR" altLang="en-US" sz="1200" dirty="0" smtClean="0">
+                <a:latin typeface="나눔바른고딕" panose="020B0603020101020101" pitchFamily="34" charset="-127"/>
+                <a:ea typeface="나눔바른고딕" panose="020B0603020101020101" pitchFamily="34" charset="-127"/>
+              </a:rPr>
+              <a:t>여전히</a:t>
+            </a:r>
+            <a:r>
+              <a:rPr lang="en-US" altLang="ko-KR" sz="1200" dirty="0">
+                <a:latin typeface="나눔바른고딕" panose="020B0603020101020101" pitchFamily="34" charset="-127"/>
+                <a:ea typeface="나눔바른고딕" panose="020B0603020101020101" pitchFamily="34" charset="-127"/>
+              </a:rPr>
+              <a:t> </a:t>
+            </a:r>
+            <a:r>
+              <a:rPr lang="ko-KR" altLang="en-US" sz="1200" dirty="0" smtClean="0">
+                <a:latin typeface="나눔바른고딕" panose="020B0603020101020101" pitchFamily="34" charset="-127"/>
+                <a:ea typeface="나눔바른고딕" panose="020B0603020101020101" pitchFamily="34" charset="-127"/>
+              </a:rPr>
+              <a:t>캐릭터와 장애물의 </a:t>
+            </a:r>
+            <a:r>
+              <a:rPr lang="ko-KR" altLang="en-US" sz="1200" dirty="0" err="1" smtClean="0">
+                <a:latin typeface="나눔바른고딕" panose="020B0603020101020101" pitchFamily="34" charset="-127"/>
+                <a:ea typeface="나눔바른고딕" panose="020B0603020101020101" pitchFamily="34" charset="-127"/>
+              </a:rPr>
+              <a:t>결합도에</a:t>
+            </a:r>
+            <a:r>
+              <a:rPr lang="ko-KR" altLang="en-US" sz="1200" dirty="0" smtClean="0">
+                <a:latin typeface="나눔바른고딕" panose="020B0603020101020101" pitchFamily="34" charset="-127"/>
+                <a:ea typeface="나눔바른고딕" panose="020B0603020101020101" pitchFamily="34" charset="-127"/>
+              </a:rPr>
+              <a:t> 대해서 신경이 쓰이는 상황</a:t>
+            </a:r>
+            <a:r>
+              <a:rPr lang="en-US" altLang="ko-KR" sz="1200" dirty="0" smtClean="0">
+                <a:latin typeface="나눔바른고딕" panose="020B0603020101020101" pitchFamily="34" charset="-127"/>
+                <a:ea typeface="나눔바른고딕" panose="020B0603020101020101" pitchFamily="34" charset="-127"/>
+              </a:rPr>
+              <a:t>.</a:t>
+            </a:r>
+          </a:p>
+          <a:p>
+            <a:r>
+              <a:rPr lang="ko-KR" altLang="en-US" sz="1200" dirty="0" smtClean="0">
+                <a:latin typeface="나눔바른고딕" panose="020B0603020101020101" pitchFamily="34" charset="-127"/>
+                <a:ea typeface="나눔바른고딕" panose="020B0603020101020101" pitchFamily="34" charset="-127"/>
+              </a:rPr>
+              <a:t>그래서 기존에 사용하던 태그를 활용</a:t>
+            </a:r>
+            <a:r>
+              <a:rPr lang="en-US" altLang="ko-KR" sz="1200" dirty="0" smtClean="0">
+                <a:latin typeface="나눔바른고딕" panose="020B0603020101020101" pitchFamily="34" charset="-127"/>
+                <a:ea typeface="나눔바른고딕" panose="020B0603020101020101" pitchFamily="34" charset="-127"/>
+              </a:rPr>
+              <a:t>.</a:t>
+            </a:r>
+          </a:p>
+        </p:txBody>
+      </p:sp>
+      <p:sp>
+        <p:nvSpPr>
+          <p:cNvPr id="15" name="TextBox 14">
+            <a:extLst>
+              <a:ext uri="{FF2B5EF4-FFF2-40B4-BE49-F238E27FC236}">
+                <a16:creationId xmlns:a16="http://schemas.microsoft.com/office/drawing/2014/main" xmlns="" id="{2D538815-CBEF-E37B-5659-B5091F86B485}"/>
+              </a:ext>
+            </a:extLst>
+          </p:cNvPr>
+          <p:cNvSpPr txBox="1"/>
+          <p:nvPr/>
+        </p:nvSpPr>
+        <p:spPr>
+          <a:xfrm>
+            <a:off x="4774124" y="5222530"/>
+            <a:ext cx="1834577" cy="646331"/>
+          </a:xfrm>
+          <a:prstGeom prst="rect">
+            <a:avLst/>
+          </a:prstGeom>
+          <a:noFill/>
+        </p:spPr>
+        <p:txBody>
+          <a:bodyPr wrap="square" rtlCol="0">
+            <a:spAutoFit/>
+          </a:bodyPr>
+          <a:lstStyle/>
+          <a:p>
+            <a:r>
+              <a:rPr lang="ko-KR" altLang="en-US" sz="1200" dirty="0" smtClean="0">
+                <a:latin typeface="나눔바른고딕" panose="020B0603020101020101" pitchFamily="34" charset="-127"/>
+                <a:ea typeface="나눔바른고딕" panose="020B0603020101020101" pitchFamily="34" charset="-127"/>
+              </a:rPr>
+              <a:t>장애물</a:t>
+            </a:r>
+            <a:endParaRPr lang="en-US" altLang="ko-KR" sz="1200" dirty="0" smtClean="0">
+              <a:latin typeface="나눔바른고딕" panose="020B0603020101020101" pitchFamily="34" charset="-127"/>
+              <a:ea typeface="나눔바른고딕" panose="020B0603020101020101" pitchFamily="34" charset="-127"/>
+            </a:endParaRPr>
+          </a:p>
+          <a:p>
+            <a:pPr marL="171450" indent="-171450">
+              <a:buFontTx/>
+              <a:buChar char="-"/>
+            </a:pPr>
+            <a:r>
+              <a:rPr lang="ko-KR" altLang="en-US" sz="1200" dirty="0" smtClean="0">
+                <a:latin typeface="나눔바른고딕" panose="020B0603020101020101" pitchFamily="34" charset="-127"/>
+                <a:ea typeface="나눔바른고딕" panose="020B0603020101020101" pitchFamily="34" charset="-127"/>
+              </a:rPr>
+              <a:t>장애물의 유형</a:t>
+            </a:r>
+            <a:endParaRPr lang="en-US" altLang="ko-KR" sz="1200" dirty="0" smtClean="0">
+              <a:latin typeface="나눔바른고딕" panose="020B0603020101020101" pitchFamily="34" charset="-127"/>
+              <a:ea typeface="나눔바른고딕" panose="020B0603020101020101" pitchFamily="34" charset="-127"/>
+            </a:endParaRPr>
+          </a:p>
+          <a:p>
+            <a:pPr marL="628650" lvl="1" indent="-171450">
+              <a:buFontTx/>
+              <a:buChar char="-"/>
+            </a:pPr>
+            <a:r>
+              <a:rPr lang="ko-KR" altLang="en-US" sz="1200" dirty="0" smtClean="0">
+                <a:latin typeface="나눔바른고딕" panose="020B0603020101020101" pitchFamily="34" charset="-127"/>
+                <a:ea typeface="나눔바른고딕" panose="020B0603020101020101" pitchFamily="34" charset="-127"/>
+              </a:rPr>
+              <a:t>기타 자료</a:t>
+            </a:r>
+            <a:endParaRPr lang="en-US" altLang="ko-KR" sz="1200" dirty="0" smtClean="0">
+              <a:latin typeface="나눔바른고딕" panose="020B0603020101020101" pitchFamily="34" charset="-127"/>
+              <a:ea typeface="나눔바른고딕" panose="020B0603020101020101" pitchFamily="34" charset="-127"/>
+            </a:endParaRPr>
+          </a:p>
+        </p:txBody>
+      </p:sp>
+      <p:sp>
+        <p:nvSpPr>
+          <p:cNvPr id="16" name="TextBox 15">
+            <a:extLst>
+              <a:ext uri="{FF2B5EF4-FFF2-40B4-BE49-F238E27FC236}">
+                <a16:creationId xmlns:a16="http://schemas.microsoft.com/office/drawing/2014/main" xmlns="" id="{2D538815-CBEF-E37B-5659-B5091F86B485}"/>
+              </a:ext>
+            </a:extLst>
+          </p:cNvPr>
+          <p:cNvSpPr txBox="1"/>
+          <p:nvPr/>
+        </p:nvSpPr>
+        <p:spPr>
+          <a:xfrm>
+            <a:off x="3248413" y="5407197"/>
+            <a:ext cx="1834577" cy="276999"/>
+          </a:xfrm>
+          <a:prstGeom prst="rect">
+            <a:avLst/>
+          </a:prstGeom>
+          <a:noFill/>
+        </p:spPr>
+        <p:txBody>
+          <a:bodyPr wrap="square" rtlCol="0">
+            <a:spAutoFit/>
+          </a:bodyPr>
+          <a:lstStyle/>
+          <a:p>
+            <a:r>
+              <a:rPr lang="ko-KR" altLang="en-US" sz="1200" dirty="0" smtClean="0">
+                <a:latin typeface="나눔바른고딕" panose="020B0603020101020101" pitchFamily="34" charset="-127"/>
+                <a:ea typeface="나눔바른고딕" panose="020B0603020101020101" pitchFamily="34" charset="-127"/>
+              </a:rPr>
+              <a:t>캐릭터 </a:t>
+            </a:r>
+            <a:endParaRPr lang="en-US" altLang="ko-KR" sz="1200" dirty="0" smtClean="0">
+              <a:latin typeface="나눔바른고딕" panose="020B0603020101020101" pitchFamily="34" charset="-127"/>
+              <a:ea typeface="나눔바른고딕" panose="020B0603020101020101" pitchFamily="34" charset="-127"/>
+            </a:endParaRPr>
+          </a:p>
+        </p:txBody>
+      </p:sp>
+      <p:sp>
+        <p:nvSpPr>
+          <p:cNvPr id="17" name="TextBox 16">
+            <a:extLst>
+              <a:ext uri="{FF2B5EF4-FFF2-40B4-BE49-F238E27FC236}">
+                <a16:creationId xmlns:a16="http://schemas.microsoft.com/office/drawing/2014/main" xmlns="" id="{2D538815-CBEF-E37B-5659-B5091F86B485}"/>
+              </a:ext>
+            </a:extLst>
+          </p:cNvPr>
+          <p:cNvSpPr txBox="1"/>
+          <p:nvPr/>
+        </p:nvSpPr>
+        <p:spPr>
+          <a:xfrm>
+            <a:off x="7150881" y="5409514"/>
+            <a:ext cx="2517101" cy="276999"/>
+          </a:xfrm>
+          <a:prstGeom prst="rect">
+            <a:avLst/>
+          </a:prstGeom>
+          <a:noFill/>
+        </p:spPr>
+        <p:txBody>
+          <a:bodyPr wrap="square" rtlCol="0">
+            <a:spAutoFit/>
+          </a:bodyPr>
+          <a:lstStyle/>
+          <a:p>
+            <a:r>
+              <a:rPr lang="ko-KR" altLang="en-US" sz="1200" dirty="0" smtClean="0">
+                <a:latin typeface="나눔바른고딕" panose="020B0603020101020101" pitchFamily="34" charset="-127"/>
+                <a:ea typeface="나눔바른고딕" panose="020B0603020101020101" pitchFamily="34" charset="-127"/>
+              </a:rPr>
+              <a:t>장애물 유형을 구분해서</a:t>
+            </a:r>
+            <a:r>
+              <a:rPr lang="en-US" altLang="ko-KR" sz="1200" dirty="0">
+                <a:latin typeface="나눔바른고딕" panose="020B0603020101020101" pitchFamily="34" charset="-127"/>
+                <a:ea typeface="나눔바른고딕" panose="020B0603020101020101" pitchFamily="34" charset="-127"/>
+              </a:rPr>
+              <a:t> </a:t>
+            </a:r>
+            <a:r>
+              <a:rPr lang="ko-KR" altLang="en-US" sz="1200" dirty="0" smtClean="0">
+                <a:latin typeface="나눔바른고딕" panose="020B0603020101020101" pitchFamily="34" charset="-127"/>
+                <a:ea typeface="나눔바른고딕" panose="020B0603020101020101" pitchFamily="34" charset="-127"/>
+              </a:rPr>
+              <a:t>처리</a:t>
+            </a:r>
+            <a:endParaRPr lang="en-US" altLang="ko-KR" sz="1200" dirty="0" smtClean="0">
+              <a:latin typeface="나눔바른고딕" panose="020B0603020101020101" pitchFamily="34" charset="-127"/>
+              <a:ea typeface="나눔바른고딕" panose="020B0603020101020101" pitchFamily="34" charset="-127"/>
+            </a:endParaRPr>
+          </a:p>
+        </p:txBody>
+      </p:sp>
+    </p:spTree>
+    <p:extLst>
+      <p:ext uri="{BB962C8B-B14F-4D97-AF65-F5344CB8AC3E}">
+        <p14:creationId xmlns:p14="http://schemas.microsoft.com/office/powerpoint/2010/main" val="2249175825"/>
+      </p:ext>
+    </p:extLst>
+  </p:cSld>
+  <p:clrMapOvr>
+    <a:masterClrMapping/>
+  </p:clrMapOvr>
+</p:sld>
+</file>
+
+<file path=ppt/slides/slide3.xml><?xml version="1.0" encoding="utf-8"?>
+<p:sld xmlns:a="http://schemas.openxmlformats.org/drawingml/2006/main" xmlns:r="http://schemas.openxmlformats.org/officeDocument/2006/relationships" xmlns:p="http://schemas.openxmlformats.org/presentationml/2006/main">
+  <p:cSld>
+    <p:spTree>
+      <p:nvGrpSpPr>
+        <p:cNvPr id="1" name="">
+          <a:extLst>
+            <a:ext uri="{FF2B5EF4-FFF2-40B4-BE49-F238E27FC236}">
+              <a16:creationId xmlns:a16="http://schemas.microsoft.com/office/drawing/2014/main" xmlns="" id="{49DA7EAA-204E-2F90-E52A-6C83B9013025}"/>
+            </a:ext>
+          </a:extLst>
+        </p:cNvPr>
+        <p:cNvGrpSpPr/>
+        <p:nvPr/>
+      </p:nvGrpSpPr>
+      <p:grpSpPr>
+        <a:xfrm>
+          <a:off x="0" y="0"/>
+          <a:ext cx="0" cy="0"/>
+          <a:chOff x="0" y="0"/>
+          <a:chExt cx="0" cy="0"/>
+        </a:xfrm>
+      </p:grpSpPr>
+      <p:sp>
+        <p:nvSpPr>
+          <p:cNvPr id="8" name="TextBox 7">
+            <a:extLst>
+              <a:ext uri="{FF2B5EF4-FFF2-40B4-BE49-F238E27FC236}">
+                <a16:creationId xmlns:a16="http://schemas.microsoft.com/office/drawing/2014/main" xmlns="" id="{701093AF-254C-83D7-8032-465A5FB513FB}"/>
+              </a:ext>
+            </a:extLst>
+          </p:cNvPr>
+          <p:cNvSpPr txBox="1"/>
+          <p:nvPr/>
+        </p:nvSpPr>
+        <p:spPr>
+          <a:xfrm>
+            <a:off x="302451" y="315453"/>
+            <a:ext cx="4944140" cy="369332"/>
+          </a:xfrm>
+          <a:prstGeom prst="rect">
+            <a:avLst/>
+          </a:prstGeom>
+          <a:noFill/>
+        </p:spPr>
+        <p:txBody>
+          <a:bodyPr wrap="square" rtlCol="0">
+            <a:spAutoFit/>
+          </a:bodyPr>
+          <a:lstStyle/>
+          <a:p>
+            <a:r>
+              <a:rPr lang="ko-KR" altLang="en-US" dirty="0">
+                <a:latin typeface="나눔바른고딕" panose="020B0603020101020101" pitchFamily="34" charset="-127"/>
+                <a:ea typeface="나눔바른고딕" panose="020B0603020101020101" pitchFamily="34" charset="-127"/>
+              </a:rPr>
+              <a:t>이번 주 작업 내역</a:t>
+            </a:r>
+            <a:endParaRPr lang="en-US" altLang="ko-KR" dirty="0">
+              <a:latin typeface="나눔바른고딕" panose="020B0603020101020101" pitchFamily="34" charset="-127"/>
+              <a:ea typeface="나눔바른고딕" panose="020B0603020101020101" pitchFamily="34" charset="-127"/>
+            </a:endParaRPr>
+          </a:p>
+        </p:txBody>
+      </p:sp>
+      <p:sp>
+        <p:nvSpPr>
+          <p:cNvPr id="10" name="TextBox 9">
+            <a:extLst>
+              <a:ext uri="{FF2B5EF4-FFF2-40B4-BE49-F238E27FC236}">
+                <a16:creationId xmlns:a16="http://schemas.microsoft.com/office/drawing/2014/main" xmlns="" id="{2D538815-CBEF-E37B-5659-B5091F86B485}"/>
+              </a:ext>
+            </a:extLst>
+          </p:cNvPr>
+          <p:cNvSpPr txBox="1"/>
+          <p:nvPr/>
+        </p:nvSpPr>
+        <p:spPr>
+          <a:xfrm>
+            <a:off x="302450" y="1003762"/>
+            <a:ext cx="2694247" cy="338554"/>
+          </a:xfrm>
+          <a:prstGeom prst="rect">
+            <a:avLst/>
+          </a:prstGeom>
+          <a:noFill/>
+        </p:spPr>
+        <p:txBody>
+          <a:bodyPr wrap="square" rtlCol="0">
+            <a:spAutoFit/>
+          </a:bodyPr>
+          <a:lstStyle/>
+          <a:p>
+            <a:r>
+              <a:rPr lang="ko-KR" altLang="en-US" sz="1600" dirty="0" smtClean="0">
+                <a:latin typeface="나눔바른고딕" panose="020B0603020101020101" pitchFamily="34" charset="-127"/>
+                <a:ea typeface="나눔바른고딕" panose="020B0603020101020101" pitchFamily="34" charset="-127"/>
+              </a:rPr>
+              <a:t>특수한 지형 인식</a:t>
+            </a:r>
+            <a:endParaRPr lang="en-US" altLang="ko-KR" sz="1600" dirty="0">
+              <a:latin typeface="나눔바른고딕" panose="020B0603020101020101" pitchFamily="34" charset="-127"/>
+              <a:ea typeface="나눔바른고딕" panose="020B0603020101020101" pitchFamily="34" charset="-127"/>
+            </a:endParaRPr>
+          </a:p>
+        </p:txBody>
+      </p:sp>
+      <p:cxnSp>
+        <p:nvCxnSpPr>
+          <p:cNvPr id="3" name="직선 연결선 2">
+            <a:extLst>
+              <a:ext uri="{FF2B5EF4-FFF2-40B4-BE49-F238E27FC236}">
+                <a16:creationId xmlns:a16="http://schemas.microsoft.com/office/drawing/2014/main" xmlns="" id="{76FFFECF-4B1C-95DF-32C3-2D2F19BEDAFB}"/>
+              </a:ext>
+            </a:extLst>
+          </p:cNvPr>
+          <p:cNvCxnSpPr>
+            <a:cxnSpLocks/>
+          </p:cNvCxnSpPr>
+          <p:nvPr/>
+        </p:nvCxnSpPr>
+        <p:spPr>
+          <a:xfrm>
+            <a:off x="387511" y="818707"/>
+            <a:ext cx="11308303" cy="0"/>
+          </a:xfrm>
+          <a:prstGeom prst="line">
+            <a:avLst/>
+          </a:prstGeom>
+          <a:ln>
+            <a:solidFill>
+              <a:schemeClr val="tx2"/>
+            </a:solidFill>
+          </a:ln>
+        </p:spPr>
+        <p:style>
+          <a:lnRef idx="2">
+            <a:schemeClr val="accent1"/>
+          </a:lnRef>
+          <a:fillRef idx="0">
+            <a:schemeClr val="accent1"/>
+          </a:fillRef>
+          <a:effectRef idx="1">
+            <a:schemeClr val="accent1"/>
+          </a:effectRef>
+          <a:fontRef idx="minor">
+            <a:schemeClr val="tx1"/>
+          </a:fontRef>
+        </p:style>
+      </p:cxnSp>
+      <p:sp>
+        <p:nvSpPr>
+          <p:cNvPr id="12" name="직사각형 11"/>
+          <p:cNvSpPr/>
+          <p:nvPr/>
+        </p:nvSpPr>
+        <p:spPr>
+          <a:xfrm>
+            <a:off x="10443172" y="118011"/>
+            <a:ext cx="1596912" cy="246221"/>
+          </a:xfrm>
+          <a:prstGeom prst="rect">
+            <a:avLst/>
+          </a:prstGeom>
+        </p:spPr>
+        <p:txBody>
+          <a:bodyPr wrap="none">
+            <a:spAutoFit/>
+          </a:bodyPr>
+          <a:lstStyle/>
+          <a:p>
+            <a:r>
+              <a:rPr lang="ko-KR" altLang="en-US" sz="1000" dirty="0" err="1">
+                <a:solidFill>
+                  <a:schemeClr val="bg1">
+                    <a:lumMod val="75000"/>
+                  </a:schemeClr>
+                </a:solidFill>
+                <a:latin typeface="나눔바른고딕" panose="020B0603020101020101" pitchFamily="34" charset="-127"/>
+                <a:ea typeface="나눔바른고딕" panose="020B0603020101020101" pitchFamily="34" charset="-127"/>
+              </a:rPr>
+              <a:t>펄어비스</a:t>
+            </a:r>
+            <a:r>
+              <a:rPr lang="ko-KR" altLang="en-US" sz="1000" dirty="0">
+                <a:solidFill>
+                  <a:schemeClr val="bg1">
+                    <a:lumMod val="75000"/>
+                  </a:schemeClr>
+                </a:solidFill>
+                <a:latin typeface="나눔바른고딕" panose="020B0603020101020101" pitchFamily="34" charset="-127"/>
+                <a:ea typeface="나눔바른고딕" panose="020B0603020101020101" pitchFamily="34" charset="-127"/>
+              </a:rPr>
+              <a:t> </a:t>
+            </a:r>
+            <a:r>
+              <a:rPr lang="en-US" altLang="ko-KR" sz="1000" dirty="0">
+                <a:solidFill>
+                  <a:schemeClr val="bg1">
+                    <a:lumMod val="75000"/>
+                  </a:schemeClr>
+                </a:solidFill>
+                <a:latin typeface="나눔바른고딕" panose="020B0603020101020101" pitchFamily="34" charset="-127"/>
+                <a:ea typeface="나눔바른고딕" panose="020B0603020101020101" pitchFamily="34" charset="-127"/>
+              </a:rPr>
+              <a:t>2026 </a:t>
+            </a:r>
+            <a:r>
+              <a:rPr lang="ko-KR" altLang="en-US" sz="1000" dirty="0">
+                <a:solidFill>
+                  <a:schemeClr val="bg1">
+                    <a:lumMod val="75000"/>
+                  </a:schemeClr>
+                </a:solidFill>
+                <a:latin typeface="나눔바른고딕" panose="020B0603020101020101" pitchFamily="34" charset="-127"/>
+                <a:ea typeface="나눔바른고딕" panose="020B0603020101020101" pitchFamily="34" charset="-127"/>
+              </a:rPr>
+              <a:t>여름 </a:t>
+            </a:r>
+            <a:r>
+              <a:rPr lang="ko-KR" altLang="en-US" sz="1000" dirty="0" err="1">
+                <a:solidFill>
+                  <a:schemeClr val="bg1">
+                    <a:lumMod val="75000"/>
+                  </a:schemeClr>
+                </a:solidFill>
+                <a:latin typeface="나눔바른고딕" panose="020B0603020101020101" pitchFamily="34" charset="-127"/>
+                <a:ea typeface="나눔바른고딕" panose="020B0603020101020101" pitchFamily="34" charset="-127"/>
+              </a:rPr>
+              <a:t>인턴십</a:t>
+            </a:r>
+            <a:endParaRPr lang="ko-KR" altLang="en-US" sz="1000" dirty="0">
+              <a:solidFill>
+                <a:schemeClr val="bg1">
+                  <a:lumMod val="75000"/>
+                </a:schemeClr>
+              </a:solidFill>
+              <a:latin typeface="나눔바른고딕" panose="020B0603020101020101" pitchFamily="34" charset="-127"/>
+              <a:ea typeface="나눔바른고딕" panose="020B0603020101020101" pitchFamily="34" charset="-127"/>
+            </a:endParaRPr>
+          </a:p>
+        </p:txBody>
+      </p:sp>
+      <p:sp>
+        <p:nvSpPr>
+          <p:cNvPr id="13" name="TextBox 12">
+            <a:extLst>
+              <a:ext uri="{FF2B5EF4-FFF2-40B4-BE49-F238E27FC236}">
+                <a16:creationId xmlns:a16="http://schemas.microsoft.com/office/drawing/2014/main" xmlns="" id="{2D538815-CBEF-E37B-5659-B5091F86B485}"/>
+              </a:ext>
+            </a:extLst>
+          </p:cNvPr>
+          <p:cNvSpPr txBox="1"/>
+          <p:nvPr/>
+        </p:nvSpPr>
+        <p:spPr>
+          <a:xfrm>
+            <a:off x="302449" y="1342316"/>
+            <a:ext cx="2543493" cy="276999"/>
+          </a:xfrm>
+          <a:prstGeom prst="rect">
+            <a:avLst/>
+          </a:prstGeom>
+          <a:noFill/>
+        </p:spPr>
+        <p:txBody>
+          <a:bodyPr wrap="square" rtlCol="0">
+            <a:spAutoFit/>
+          </a:bodyPr>
+          <a:lstStyle/>
+          <a:p>
+            <a:r>
+              <a:rPr lang="ko-KR" altLang="en-US" sz="1200" dirty="0" smtClean="0">
+                <a:latin typeface="나눔바른고딕" panose="020B0603020101020101" pitchFamily="34" charset="-127"/>
+                <a:ea typeface="나눔바른고딕" panose="020B0603020101020101" pitchFamily="34" charset="-127"/>
+              </a:rPr>
+              <a:t>태그 활용</a:t>
+            </a:r>
+            <a:endParaRPr lang="en-US" altLang="ko-KR" sz="1200" dirty="0" smtClean="0">
+              <a:latin typeface="나눔바른고딕" panose="020B0603020101020101" pitchFamily="34" charset="-127"/>
+              <a:ea typeface="나눔바른고딕" panose="020B0603020101020101" pitchFamily="34" charset="-127"/>
+            </a:endParaRPr>
+          </a:p>
+        </p:txBody>
+      </p:sp>
+      <p:sp>
+        <p:nvSpPr>
+          <p:cNvPr id="16" name="TextBox 15">
+            <a:extLst>
+              <a:ext uri="{FF2B5EF4-FFF2-40B4-BE49-F238E27FC236}">
+                <a16:creationId xmlns:a16="http://schemas.microsoft.com/office/drawing/2014/main" xmlns="" id="{2D538815-CBEF-E37B-5659-B5091F86B485}"/>
+              </a:ext>
+            </a:extLst>
+          </p:cNvPr>
+          <p:cNvSpPr txBox="1"/>
+          <p:nvPr/>
+        </p:nvSpPr>
+        <p:spPr>
+          <a:xfrm>
+            <a:off x="302448" y="1647405"/>
+            <a:ext cx="6098352" cy="461665"/>
+          </a:xfrm>
+          <a:prstGeom prst="rect">
+            <a:avLst/>
+          </a:prstGeom>
+          <a:noFill/>
+        </p:spPr>
+        <p:txBody>
+          <a:bodyPr wrap="square" rtlCol="0">
+            <a:spAutoFit/>
+          </a:bodyPr>
+          <a:lstStyle/>
+          <a:p>
+            <a:r>
+              <a:rPr lang="ko-KR" altLang="en-US" sz="1200" dirty="0" smtClean="0">
+                <a:latin typeface="나눔바른고딕" panose="020B0603020101020101" pitchFamily="34" charset="-127"/>
+                <a:ea typeface="나눔바른고딕" panose="020B0603020101020101" pitchFamily="34" charset="-127"/>
+              </a:rPr>
+              <a:t>좁은 봉이나 </a:t>
+            </a:r>
+            <a:r>
+              <a:rPr lang="ko-KR" altLang="en-US" sz="1200" dirty="0" err="1" smtClean="0">
+                <a:latin typeface="나눔바른고딕" panose="020B0603020101020101" pitchFamily="34" charset="-127"/>
+                <a:ea typeface="나눔바른고딕" panose="020B0603020101020101" pitchFamily="34" charset="-127"/>
+              </a:rPr>
+              <a:t>발판같은</a:t>
+            </a:r>
+            <a:r>
+              <a:rPr lang="ko-KR" altLang="en-US" sz="1200" dirty="0" smtClean="0">
+                <a:latin typeface="나눔바른고딕" panose="020B0603020101020101" pitchFamily="34" charset="-127"/>
+                <a:ea typeface="나눔바른고딕" panose="020B0603020101020101" pitchFamily="34" charset="-127"/>
+              </a:rPr>
+              <a:t> 형태의 장애물 타입 </a:t>
+            </a:r>
+            <a:r>
+              <a:rPr lang="en-US" altLang="ko-KR" sz="1200" dirty="0" smtClean="0">
+                <a:latin typeface="나눔바른고딕" panose="020B0603020101020101" pitchFamily="34" charset="-127"/>
+                <a:ea typeface="나눔바른고딕" panose="020B0603020101020101" pitchFamily="34" charset="-127"/>
+              </a:rPr>
+              <a:t>Beam</a:t>
+            </a:r>
+            <a:endParaRPr lang="en-US" altLang="ko-KR" sz="1200" dirty="0">
+              <a:latin typeface="나눔바른고딕" panose="020B0603020101020101" pitchFamily="34" charset="-127"/>
+              <a:ea typeface="나눔바른고딕" panose="020B0603020101020101" pitchFamily="34" charset="-127"/>
+            </a:endParaRPr>
+          </a:p>
+          <a:p>
+            <a:r>
+              <a:rPr lang="ko-KR" altLang="en-US" sz="1200" dirty="0" smtClean="0">
+                <a:latin typeface="나눔바른고딕" panose="020B0603020101020101" pitchFamily="34" charset="-127"/>
+                <a:ea typeface="나눔바른고딕" panose="020B0603020101020101" pitchFamily="34" charset="-127"/>
+              </a:rPr>
+              <a:t>장애물 인지를 담당하는 </a:t>
+            </a:r>
+            <a:r>
+              <a:rPr lang="ko-KR" altLang="en-US" sz="1200" dirty="0" err="1" smtClean="0">
+                <a:latin typeface="나눔바른고딕" panose="020B0603020101020101" pitchFamily="34" charset="-127"/>
+                <a:ea typeface="나눔바른고딕" panose="020B0603020101020101" pitchFamily="34" charset="-127"/>
+              </a:rPr>
+              <a:t>트리에서</a:t>
+            </a:r>
+            <a:r>
+              <a:rPr lang="ko-KR" altLang="en-US" sz="1200" dirty="0" smtClean="0">
+                <a:latin typeface="나눔바른고딕" panose="020B0603020101020101" pitchFamily="34" charset="-127"/>
+                <a:ea typeface="나눔바른고딕" panose="020B0603020101020101" pitchFamily="34" charset="-127"/>
+              </a:rPr>
+              <a:t> </a:t>
+            </a:r>
+            <a:r>
+              <a:rPr lang="ko-KR" altLang="en-US" sz="1200" dirty="0" err="1" smtClean="0">
+                <a:latin typeface="나눔바른고딕" panose="020B0603020101020101" pitchFamily="34" charset="-127"/>
+                <a:ea typeface="나눔바른고딕" panose="020B0603020101020101" pitchFamily="34" charset="-127"/>
+              </a:rPr>
+              <a:t>액터의</a:t>
+            </a:r>
+            <a:r>
+              <a:rPr lang="ko-KR" altLang="en-US" sz="1200" dirty="0" smtClean="0">
+                <a:latin typeface="나눔바른고딕" panose="020B0603020101020101" pitchFamily="34" charset="-127"/>
+                <a:ea typeface="나눔바른고딕" panose="020B0603020101020101" pitchFamily="34" charset="-127"/>
+              </a:rPr>
+              <a:t> 태그를 읽고 </a:t>
+            </a:r>
+            <a:r>
+              <a:rPr lang="en-US" altLang="ko-KR" sz="1200" dirty="0" smtClean="0">
+                <a:latin typeface="나눔바른고딕" panose="020B0603020101020101" pitchFamily="34" charset="-127"/>
+                <a:ea typeface="나눔바른고딕" panose="020B0603020101020101" pitchFamily="34" charset="-127"/>
+              </a:rPr>
+              <a:t>Default, Beam</a:t>
+            </a:r>
+            <a:r>
+              <a:rPr lang="ko-KR" altLang="en-US" sz="1200" dirty="0" smtClean="0">
+                <a:latin typeface="나눔바른고딕" panose="020B0603020101020101" pitchFamily="34" charset="-127"/>
+                <a:ea typeface="나눔바른고딕" panose="020B0603020101020101" pitchFamily="34" charset="-127"/>
+              </a:rPr>
+              <a:t>을 구분하는 분기를 추가</a:t>
+            </a:r>
+            <a:endParaRPr lang="en-US" altLang="ko-KR" sz="1200" dirty="0" smtClean="0">
+              <a:latin typeface="나눔바른고딕" panose="020B0603020101020101" pitchFamily="34" charset="-127"/>
+              <a:ea typeface="나눔바른고딕" panose="020B0603020101020101" pitchFamily="34" charset="-127"/>
+            </a:endParaRPr>
+          </a:p>
+        </p:txBody>
+      </p:sp>
+      <p:sp>
+        <p:nvSpPr>
+          <p:cNvPr id="9" name="TextBox 8">
+            <a:extLst>
+              <a:ext uri="{FF2B5EF4-FFF2-40B4-BE49-F238E27FC236}">
+                <a16:creationId xmlns:a16="http://schemas.microsoft.com/office/drawing/2014/main" xmlns="" id="{2D538815-CBEF-E37B-5659-B5091F86B485}"/>
+              </a:ext>
+            </a:extLst>
+          </p:cNvPr>
+          <p:cNvSpPr txBox="1"/>
+          <p:nvPr/>
+        </p:nvSpPr>
+        <p:spPr>
+          <a:xfrm>
+            <a:off x="1743249" y="4146093"/>
+            <a:ext cx="3794071" cy="276999"/>
+          </a:xfrm>
+          <a:prstGeom prst="rect">
+            <a:avLst/>
+          </a:prstGeom>
+          <a:noFill/>
+        </p:spPr>
+        <p:txBody>
+          <a:bodyPr wrap="square" rtlCol="0">
+            <a:spAutoFit/>
+          </a:bodyPr>
+          <a:lstStyle/>
+          <a:p>
+            <a:r>
+              <a:rPr lang="en-US" altLang="ko-KR" sz="1200" dirty="0" smtClean="0">
+                <a:latin typeface="나눔바른고딕" panose="020B0603020101020101" pitchFamily="34" charset="-127"/>
+                <a:ea typeface="나눔바른고딕" panose="020B0603020101020101" pitchFamily="34" charset="-127"/>
+              </a:rPr>
+              <a:t>Beam </a:t>
+            </a:r>
+            <a:r>
+              <a:rPr lang="ko-KR" altLang="en-US" sz="1200" dirty="0" smtClean="0">
+                <a:latin typeface="나눔바른고딕" panose="020B0603020101020101" pitchFamily="34" charset="-127"/>
+                <a:ea typeface="나눔바른고딕" panose="020B0603020101020101" pitchFamily="34" charset="-127"/>
+              </a:rPr>
+              <a:t>장애물을 처리할 수 있도록 전달</a:t>
+            </a:r>
+            <a:endParaRPr lang="en-US" altLang="ko-KR" sz="1200" dirty="0" smtClean="0">
+              <a:latin typeface="나눔바른고딕" panose="020B0603020101020101" pitchFamily="34" charset="-127"/>
+              <a:ea typeface="나눔바른고딕" panose="020B0603020101020101" pitchFamily="34" charset="-127"/>
+            </a:endParaRPr>
+          </a:p>
+        </p:txBody>
+      </p:sp>
+      <p:sp>
+        <p:nvSpPr>
+          <p:cNvPr id="2" name="직사각형 1"/>
+          <p:cNvSpPr/>
+          <p:nvPr/>
+        </p:nvSpPr>
+        <p:spPr>
+          <a:xfrm>
+            <a:off x="5887093" y="2496755"/>
+            <a:ext cx="5589141" cy="3852674"/>
+          </a:xfrm>
+          <a:prstGeom prst="rect">
+            <a:avLst/>
+          </a:prstGeom>
+        </p:spPr>
+        <p:style>
+          <a:lnRef idx="2">
+            <a:schemeClr val="accent1">
+              <a:shade val="50000"/>
+            </a:schemeClr>
+          </a:lnRef>
+          <a:fillRef idx="1">
+            <a:schemeClr val="accent1"/>
+          </a:fillRef>
+          <a:effectRef idx="0">
+            <a:schemeClr val="accent1"/>
+          </a:effectRef>
+          <a:fontRef idx="minor">
+            <a:schemeClr val="lt1"/>
+          </a:fontRef>
+        </p:style>
+        <p:txBody>
+          <a:bodyPr rtlCol="0" anchor="ctr"/>
+          <a:lstStyle/>
+          <a:p>
+            <a:pPr algn="ctr"/>
+            <a:r>
+              <a:rPr lang="ko-KR" altLang="en-US" dirty="0" smtClean="0"/>
+              <a:t>추가된 트리</a:t>
+            </a:r>
+            <a:endParaRPr lang="ko-KR" altLang="en-US" dirty="0"/>
+          </a:p>
+        </p:txBody>
+      </p:sp>
+    </p:spTree>
+    <p:extLst>
+      <p:ext uri="{BB962C8B-B14F-4D97-AF65-F5344CB8AC3E}">
+        <p14:creationId xmlns:p14="http://schemas.microsoft.com/office/powerpoint/2010/main" val="1048326049"/>
+      </p:ext>
+    </p:extLst>
+  </p:cSld>
+  <p:clrMapOvr>
+    <a:masterClrMapping/>
+  </p:clrMapOvr>
+</p:sld>
+</file>
+
+<file path=ppt/slides/slide4.xml><?xml version="1.0" encoding="utf-8"?>
+<p:sld xmlns:a="http://schemas.openxmlformats.org/drawingml/2006/main" xmlns:r="http://schemas.openxmlformats.org/officeDocument/2006/relationships" xmlns:p="http://schemas.openxmlformats.org/presentationml/2006/main">
+  <p:cSld>
+    <p:spTree>
+      <p:nvGrpSpPr>
+        <p:cNvPr id="1" name="">
+          <a:extLst>
+            <a:ext uri="{FF2B5EF4-FFF2-40B4-BE49-F238E27FC236}">
+              <a16:creationId xmlns:a16="http://schemas.microsoft.com/office/drawing/2014/main" xmlns="" id="{4E3DA648-5785-8201-CCD7-F4B146EDE99F}"/>
+            </a:ext>
+          </a:extLst>
+        </p:cNvPr>
+        <p:cNvGrpSpPr/>
+        <p:nvPr/>
+      </p:nvGrpSpPr>
+      <p:grpSpPr>
+        <a:xfrm>
+          <a:off x="0" y="0"/>
+          <a:ext cx="0" cy="0"/>
+          <a:chOff x="0" y="0"/>
+          <a:chExt cx="0" cy="0"/>
+        </a:xfrm>
+      </p:grpSpPr>
+      <p:sp>
+        <p:nvSpPr>
+          <p:cNvPr id="8" name="TextBox 7">
+            <a:extLst>
+              <a:ext uri="{FF2B5EF4-FFF2-40B4-BE49-F238E27FC236}">
+                <a16:creationId xmlns:a16="http://schemas.microsoft.com/office/drawing/2014/main" xmlns="" id="{31234DBB-F039-BEB0-AC6F-55B73AE31537}"/>
+              </a:ext>
+            </a:extLst>
+          </p:cNvPr>
+          <p:cNvSpPr txBox="1"/>
+          <p:nvPr/>
+        </p:nvSpPr>
+        <p:spPr>
+          <a:xfrm>
+            <a:off x="302451" y="315453"/>
+            <a:ext cx="4944140" cy="369332"/>
+          </a:xfrm>
+          <a:prstGeom prst="rect">
+            <a:avLst/>
+          </a:prstGeom>
+          <a:noFill/>
+        </p:spPr>
+        <p:txBody>
+          <a:bodyPr wrap="square" rtlCol="0">
+            <a:spAutoFit/>
+          </a:bodyPr>
+          <a:lstStyle/>
+          <a:p>
+            <a:r>
+              <a:rPr lang="ko-KR" altLang="en-US" dirty="0">
+                <a:latin typeface="나눔바른고딕" panose="020B0603020101020101" pitchFamily="34" charset="-127"/>
+                <a:ea typeface="나눔바른고딕" panose="020B0603020101020101" pitchFamily="34" charset="-127"/>
+              </a:rPr>
+              <a:t>이번 주 작업 내역</a:t>
+            </a:r>
+            <a:endParaRPr lang="en-US" altLang="ko-KR" dirty="0">
+              <a:latin typeface="나눔바른고딕" panose="020B0603020101020101" pitchFamily="34" charset="-127"/>
+              <a:ea typeface="나눔바른고딕" panose="020B0603020101020101" pitchFamily="34" charset="-127"/>
+            </a:endParaRPr>
+          </a:p>
+        </p:txBody>
+      </p:sp>
+      <p:sp>
+        <p:nvSpPr>
+          <p:cNvPr id="10" name="TextBox 9">
+            <a:extLst>
+              <a:ext uri="{FF2B5EF4-FFF2-40B4-BE49-F238E27FC236}">
+                <a16:creationId xmlns:a16="http://schemas.microsoft.com/office/drawing/2014/main" xmlns="" id="{EABADBF9-06F0-4F22-76AB-A2F83B3A3175}"/>
+              </a:ext>
+            </a:extLst>
+          </p:cNvPr>
+          <p:cNvSpPr txBox="1"/>
+          <p:nvPr/>
+        </p:nvSpPr>
+        <p:spPr>
+          <a:xfrm>
+            <a:off x="302450" y="1003762"/>
+            <a:ext cx="7464813" cy="338554"/>
+          </a:xfrm>
+          <a:prstGeom prst="rect">
+            <a:avLst/>
+          </a:prstGeom>
+          <a:noFill/>
+        </p:spPr>
+        <p:txBody>
+          <a:bodyPr wrap="square" rtlCol="0">
+            <a:spAutoFit/>
+          </a:bodyPr>
+          <a:lstStyle/>
+          <a:p>
+            <a:r>
+              <a:rPr lang="ko-KR" altLang="en-US" sz="1600" dirty="0" smtClean="0">
+                <a:latin typeface="나눔바른고딕" panose="020B0603020101020101" pitchFamily="34" charset="-127"/>
+                <a:ea typeface="나눔바른고딕" panose="020B0603020101020101" pitchFamily="34" charset="-127"/>
+              </a:rPr>
+              <a:t>인식 후 처리</a:t>
+            </a:r>
+            <a:r>
+              <a:rPr lang="en-US" altLang="ko-KR" sz="1600" dirty="0">
+                <a:latin typeface="나눔바른고딕" panose="020B0603020101020101" pitchFamily="34" charset="-127"/>
+                <a:ea typeface="나눔바른고딕" panose="020B0603020101020101" pitchFamily="34" charset="-127"/>
+              </a:rPr>
+              <a:t> </a:t>
+            </a:r>
+            <a:r>
+              <a:rPr lang="en-US" altLang="ko-KR" sz="1600" dirty="0" smtClean="0">
+                <a:latin typeface="나눔바른고딕" panose="020B0603020101020101" pitchFamily="34" charset="-127"/>
+                <a:ea typeface="나눔바른고딕" panose="020B0603020101020101" pitchFamily="34" charset="-127"/>
+              </a:rPr>
+              <a:t>: </a:t>
+            </a:r>
+            <a:r>
+              <a:rPr lang="ko-KR" altLang="en-US" sz="1600" dirty="0" smtClean="0">
+                <a:latin typeface="나눔바른고딕" panose="020B0603020101020101" pitchFamily="34" charset="-127"/>
+                <a:ea typeface="나눔바른고딕" panose="020B0603020101020101" pitchFamily="34" charset="-127"/>
+              </a:rPr>
+              <a:t> 캐릭터 </a:t>
+            </a:r>
+            <a:r>
+              <a:rPr lang="en-US" altLang="ko-KR" sz="1600" dirty="0">
+                <a:latin typeface="나눔바른고딕" panose="020B0603020101020101" pitchFamily="34" charset="-127"/>
+                <a:ea typeface="나눔바른고딕" panose="020B0603020101020101" pitchFamily="34" charset="-127"/>
+              </a:rPr>
+              <a:t>FSM</a:t>
+            </a:r>
+          </a:p>
+        </p:txBody>
+      </p:sp>
+      <p:cxnSp>
+        <p:nvCxnSpPr>
+          <p:cNvPr id="3" name="직선 연결선 2">
+            <a:extLst>
+              <a:ext uri="{FF2B5EF4-FFF2-40B4-BE49-F238E27FC236}">
+                <a16:creationId xmlns:a16="http://schemas.microsoft.com/office/drawing/2014/main" xmlns="" id="{CB59DBA8-457E-E5E3-165C-093E13F8D469}"/>
+              </a:ext>
+            </a:extLst>
+          </p:cNvPr>
+          <p:cNvCxnSpPr>
+            <a:cxnSpLocks/>
+          </p:cNvCxnSpPr>
+          <p:nvPr/>
+        </p:nvCxnSpPr>
+        <p:spPr>
+          <a:xfrm>
+            <a:off x="387511" y="818707"/>
+            <a:ext cx="11308303" cy="0"/>
+          </a:xfrm>
+          <a:prstGeom prst="line">
+            <a:avLst/>
+          </a:prstGeom>
+          <a:ln>
+            <a:solidFill>
+              <a:schemeClr val="tx2"/>
+            </a:solidFill>
+          </a:ln>
+        </p:spPr>
+        <p:style>
+          <a:lnRef idx="2">
+            <a:schemeClr val="accent1"/>
+          </a:lnRef>
+          <a:fillRef idx="0">
+            <a:schemeClr val="accent1"/>
+          </a:fillRef>
+          <a:effectRef idx="1">
+            <a:schemeClr val="accent1"/>
+          </a:effectRef>
+          <a:fontRef idx="minor">
+            <a:schemeClr val="tx1"/>
+          </a:fontRef>
+        </p:style>
+      </p:cxnSp>
+      <p:sp>
+        <p:nvSpPr>
+          <p:cNvPr id="12" name="직사각형 11">
+            <a:extLst>
+              <a:ext uri="{FF2B5EF4-FFF2-40B4-BE49-F238E27FC236}">
+                <a16:creationId xmlns:a16="http://schemas.microsoft.com/office/drawing/2014/main" xmlns="" id="{900D37A4-34C2-C7F8-201A-CAF255E4B871}"/>
+              </a:ext>
+            </a:extLst>
+          </p:cNvPr>
+          <p:cNvSpPr/>
+          <p:nvPr/>
+        </p:nvSpPr>
+        <p:spPr>
+          <a:xfrm>
+            <a:off x="10443172" y="118011"/>
+            <a:ext cx="1596912" cy="246221"/>
+          </a:xfrm>
+          <a:prstGeom prst="rect">
+            <a:avLst/>
+          </a:prstGeom>
+        </p:spPr>
+        <p:txBody>
+          <a:bodyPr wrap="none">
+            <a:spAutoFit/>
+          </a:bodyPr>
+          <a:lstStyle/>
+          <a:p>
+            <a:r>
+              <a:rPr lang="ko-KR" altLang="en-US" sz="1000" dirty="0" err="1">
+                <a:solidFill>
+                  <a:schemeClr val="bg1">
+                    <a:lumMod val="75000"/>
+                  </a:schemeClr>
+                </a:solidFill>
+                <a:latin typeface="나눔바른고딕" panose="020B0603020101020101" pitchFamily="34" charset="-127"/>
+                <a:ea typeface="나눔바른고딕" panose="020B0603020101020101" pitchFamily="34" charset="-127"/>
+              </a:rPr>
+              <a:t>펄어비스</a:t>
+            </a:r>
+            <a:r>
+              <a:rPr lang="ko-KR" altLang="en-US" sz="1000" dirty="0">
+                <a:solidFill>
+                  <a:schemeClr val="bg1">
+                    <a:lumMod val="75000"/>
+                  </a:schemeClr>
+                </a:solidFill>
+                <a:latin typeface="나눔바른고딕" panose="020B0603020101020101" pitchFamily="34" charset="-127"/>
+                <a:ea typeface="나눔바른고딕" panose="020B0603020101020101" pitchFamily="34" charset="-127"/>
+              </a:rPr>
+              <a:t> </a:t>
+            </a:r>
+            <a:r>
+              <a:rPr lang="en-US" altLang="ko-KR" sz="1000" dirty="0">
+                <a:solidFill>
+                  <a:schemeClr val="bg1">
+                    <a:lumMod val="75000"/>
+                  </a:schemeClr>
+                </a:solidFill>
+                <a:latin typeface="나눔바른고딕" panose="020B0603020101020101" pitchFamily="34" charset="-127"/>
+                <a:ea typeface="나눔바른고딕" panose="020B0603020101020101" pitchFamily="34" charset="-127"/>
+              </a:rPr>
+              <a:t>2026 </a:t>
+            </a:r>
+            <a:r>
+              <a:rPr lang="ko-KR" altLang="en-US" sz="1000" dirty="0">
+                <a:solidFill>
+                  <a:schemeClr val="bg1">
+                    <a:lumMod val="75000"/>
+                  </a:schemeClr>
+                </a:solidFill>
+                <a:latin typeface="나눔바른고딕" panose="020B0603020101020101" pitchFamily="34" charset="-127"/>
+                <a:ea typeface="나눔바른고딕" panose="020B0603020101020101" pitchFamily="34" charset="-127"/>
+              </a:rPr>
+              <a:t>여름 </a:t>
+            </a:r>
+            <a:r>
+              <a:rPr lang="ko-KR" altLang="en-US" sz="1000" dirty="0" err="1">
+                <a:solidFill>
+                  <a:schemeClr val="bg1">
+                    <a:lumMod val="75000"/>
+                  </a:schemeClr>
+                </a:solidFill>
+                <a:latin typeface="나눔바른고딕" panose="020B0603020101020101" pitchFamily="34" charset="-127"/>
+                <a:ea typeface="나눔바른고딕" panose="020B0603020101020101" pitchFamily="34" charset="-127"/>
+              </a:rPr>
+              <a:t>인턴십</a:t>
+            </a:r>
+            <a:endParaRPr lang="ko-KR" altLang="en-US" sz="1000" dirty="0">
+              <a:solidFill>
+                <a:schemeClr val="bg1">
+                  <a:lumMod val="75000"/>
+                </a:schemeClr>
+              </a:solidFill>
+              <a:latin typeface="나눔바른고딕" panose="020B0603020101020101" pitchFamily="34" charset="-127"/>
+              <a:ea typeface="나눔바른고딕" panose="020B0603020101020101" pitchFamily="34" charset="-127"/>
+            </a:endParaRPr>
+          </a:p>
+        </p:txBody>
+      </p:sp>
+      <p:sp>
+        <p:nvSpPr>
+          <p:cNvPr id="13" name="TextBox 12">
+            <a:extLst>
+              <a:ext uri="{FF2B5EF4-FFF2-40B4-BE49-F238E27FC236}">
+                <a16:creationId xmlns:a16="http://schemas.microsoft.com/office/drawing/2014/main" xmlns="" id="{55105A21-BDA3-A05F-058F-200AA1B5FC2F}"/>
+              </a:ext>
+            </a:extLst>
+          </p:cNvPr>
+          <p:cNvSpPr txBox="1"/>
+          <p:nvPr/>
+        </p:nvSpPr>
+        <p:spPr>
+          <a:xfrm>
+            <a:off x="302450" y="1342316"/>
+            <a:ext cx="2694247" cy="276999"/>
+          </a:xfrm>
+          <a:prstGeom prst="rect">
+            <a:avLst/>
+          </a:prstGeom>
+          <a:noFill/>
+        </p:spPr>
+        <p:txBody>
+          <a:bodyPr wrap="square" rtlCol="0">
+            <a:spAutoFit/>
+          </a:bodyPr>
+          <a:lstStyle/>
+          <a:p>
+            <a:r>
+              <a:rPr lang="ko-KR" altLang="en-US" sz="1200" dirty="0">
+                <a:latin typeface="나눔바른고딕" panose="020B0603020101020101" pitchFamily="34" charset="-127"/>
+                <a:ea typeface="나눔바른고딕" panose="020B0603020101020101" pitchFamily="34" charset="-127"/>
+              </a:rPr>
+              <a:t>인식 처리 결과에 따른 상태 변화</a:t>
+            </a:r>
+            <a:endParaRPr lang="en-US" altLang="ko-KR" sz="1200" dirty="0">
+              <a:latin typeface="나눔바른고딕" panose="020B0603020101020101" pitchFamily="34" charset="-127"/>
+              <a:ea typeface="나눔바른고딕" panose="020B0603020101020101" pitchFamily="34" charset="-127"/>
+            </a:endParaRPr>
+          </a:p>
+        </p:txBody>
+      </p:sp>
+      <p:sp>
+        <p:nvSpPr>
+          <p:cNvPr id="7" name="TextBox 6">
+            <a:extLst>
+              <a:ext uri="{FF2B5EF4-FFF2-40B4-BE49-F238E27FC236}">
+                <a16:creationId xmlns:a16="http://schemas.microsoft.com/office/drawing/2014/main" xmlns="" id="{55105A21-BDA3-A05F-058F-200AA1B5FC2F}"/>
+              </a:ext>
+            </a:extLst>
+          </p:cNvPr>
+          <p:cNvSpPr txBox="1"/>
+          <p:nvPr/>
+        </p:nvSpPr>
+        <p:spPr>
+          <a:xfrm>
+            <a:off x="302448" y="1619315"/>
+            <a:ext cx="4944143" cy="461665"/>
+          </a:xfrm>
+          <a:prstGeom prst="rect">
+            <a:avLst/>
+          </a:prstGeom>
+          <a:noFill/>
+        </p:spPr>
+        <p:txBody>
+          <a:bodyPr wrap="square" rtlCol="0">
+            <a:spAutoFit/>
+          </a:bodyPr>
+          <a:lstStyle/>
+          <a:p>
+            <a:r>
+              <a:rPr lang="ko-KR" altLang="en-US" sz="1200" dirty="0" smtClean="0">
+                <a:latin typeface="나눔바른고딕" panose="020B0603020101020101" pitchFamily="34" charset="-127"/>
+                <a:ea typeface="나눔바른고딕" panose="020B0603020101020101" pitchFamily="34" charset="-127"/>
+              </a:rPr>
+              <a:t>지형에 따라 캐릭터의 입력이나 동작이 달라질 필요성</a:t>
+            </a:r>
+            <a:endParaRPr lang="en-US" altLang="ko-KR" sz="1200" dirty="0" smtClean="0">
+              <a:latin typeface="나눔바른고딕" panose="020B0603020101020101" pitchFamily="34" charset="-127"/>
+              <a:ea typeface="나눔바른고딕" panose="020B0603020101020101" pitchFamily="34" charset="-127"/>
+            </a:endParaRPr>
+          </a:p>
+          <a:p>
+            <a:r>
+              <a:rPr lang="en-US" altLang="ko-KR" sz="1200" dirty="0" smtClean="0">
+                <a:latin typeface="나눔바른고딕" panose="020B0603020101020101" pitchFamily="34" charset="-127"/>
+                <a:ea typeface="나눔바른고딕" panose="020B0603020101020101" pitchFamily="34" charset="-127"/>
+              </a:rPr>
+              <a:t>FSM</a:t>
+            </a:r>
+            <a:r>
+              <a:rPr lang="ko-KR" altLang="en-US" sz="1200" dirty="0" smtClean="0">
+                <a:latin typeface="나눔바른고딕" panose="020B0603020101020101" pitchFamily="34" charset="-127"/>
+                <a:ea typeface="나눔바른고딕" panose="020B0603020101020101" pitchFamily="34" charset="-127"/>
+              </a:rPr>
+              <a:t>을 적용해서 인지 결과들을 처리</a:t>
+            </a:r>
+            <a:endParaRPr lang="en-US" altLang="ko-KR" sz="1200" dirty="0" smtClean="0">
+              <a:latin typeface="나눔바른고딕" panose="020B0603020101020101" pitchFamily="34" charset="-127"/>
+              <a:ea typeface="나눔바른고딕" panose="020B0603020101020101" pitchFamily="34" charset="-127"/>
+            </a:endParaRPr>
+          </a:p>
+        </p:txBody>
+      </p:sp>
+      <p:sp>
+        <p:nvSpPr>
+          <p:cNvPr id="9" name="TextBox 8">
+            <a:extLst>
+              <a:ext uri="{FF2B5EF4-FFF2-40B4-BE49-F238E27FC236}">
+                <a16:creationId xmlns:a16="http://schemas.microsoft.com/office/drawing/2014/main" xmlns="" id="{55105A21-BDA3-A05F-058F-200AA1B5FC2F}"/>
+              </a:ext>
+            </a:extLst>
+          </p:cNvPr>
+          <p:cNvSpPr txBox="1"/>
+          <p:nvPr/>
+        </p:nvSpPr>
+        <p:spPr>
+          <a:xfrm>
+            <a:off x="1127765" y="2257048"/>
+            <a:ext cx="4382567" cy="830997"/>
+          </a:xfrm>
+          <a:prstGeom prst="rect">
+            <a:avLst/>
+          </a:prstGeom>
+          <a:noFill/>
+        </p:spPr>
+        <p:txBody>
+          <a:bodyPr wrap="square" rtlCol="0">
+            <a:spAutoFit/>
+          </a:bodyPr>
+          <a:lstStyle/>
+          <a:p>
+            <a:r>
+              <a:rPr lang="ko-KR" altLang="en-US" sz="1200" dirty="0" smtClean="0">
+                <a:latin typeface="나눔바른고딕" panose="020B0603020101020101" pitchFamily="34" charset="-127"/>
+                <a:ea typeface="나눔바른고딕" panose="020B0603020101020101" pitchFamily="34" charset="-127"/>
+              </a:rPr>
+              <a:t>기존 상태</a:t>
+            </a:r>
+            <a:endParaRPr lang="en-US" altLang="ko-KR" sz="1200" dirty="0" smtClean="0">
+              <a:latin typeface="나눔바른고딕" panose="020B0603020101020101" pitchFamily="34" charset="-127"/>
+              <a:ea typeface="나눔바른고딕" panose="020B0603020101020101" pitchFamily="34" charset="-127"/>
+            </a:endParaRPr>
+          </a:p>
+          <a:p>
+            <a:pPr marL="171450" indent="-171450">
+              <a:buFont typeface="Arial" panose="020B0604020202020204" pitchFamily="34" charset="0"/>
+              <a:buChar char="•"/>
+            </a:pPr>
+            <a:r>
+              <a:rPr lang="ko-KR" altLang="en-US" sz="1200" dirty="0" smtClean="0">
+                <a:latin typeface="나눔바른고딕" panose="020B0603020101020101" pitchFamily="34" charset="-127"/>
+                <a:ea typeface="나눔바른고딕" panose="020B0603020101020101" pitchFamily="34" charset="-127"/>
+              </a:rPr>
+              <a:t>평지 상태 </a:t>
+            </a:r>
+            <a:r>
+              <a:rPr lang="en-US" altLang="ko-KR" sz="1200" dirty="0" smtClean="0">
+                <a:latin typeface="나눔바른고딕" panose="020B0603020101020101" pitchFamily="34" charset="-127"/>
+                <a:ea typeface="나눔바른고딕" panose="020B0603020101020101" pitchFamily="34" charset="-127"/>
+              </a:rPr>
+              <a:t>: </a:t>
+            </a:r>
+            <a:r>
+              <a:rPr lang="ko-KR" altLang="en-US" sz="1200" dirty="0" smtClean="0">
+                <a:latin typeface="나눔바른고딕" panose="020B0603020101020101" pitchFamily="34" charset="-127"/>
+                <a:ea typeface="나눔바른고딕" panose="020B0603020101020101" pitchFamily="34" charset="-127"/>
+              </a:rPr>
+              <a:t>일반적인 </a:t>
+            </a:r>
+            <a:r>
+              <a:rPr lang="ko-KR" altLang="en-US" sz="1200" dirty="0" err="1" smtClean="0">
+                <a:latin typeface="나눔바른고딕" panose="020B0603020101020101" pitchFamily="34" charset="-127"/>
+                <a:ea typeface="나눔바른고딕" panose="020B0603020101020101" pitchFamily="34" charset="-127"/>
+              </a:rPr>
+              <a:t>로코모션을</a:t>
+            </a:r>
+            <a:r>
+              <a:rPr lang="ko-KR" altLang="en-US" sz="1200" dirty="0" smtClean="0">
+                <a:latin typeface="나눔바른고딕" panose="020B0603020101020101" pitchFamily="34" charset="-127"/>
+                <a:ea typeface="나눔바른고딕" panose="020B0603020101020101" pitchFamily="34" charset="-127"/>
+              </a:rPr>
+              <a:t> 기반으로 이동</a:t>
+            </a:r>
+            <a:endParaRPr lang="en-US" altLang="ko-KR" sz="1200" dirty="0" smtClean="0">
+              <a:latin typeface="나눔바른고딕" panose="020B0603020101020101" pitchFamily="34" charset="-127"/>
+              <a:ea typeface="나눔바른고딕" panose="020B0603020101020101" pitchFamily="34" charset="-127"/>
+            </a:endParaRPr>
+          </a:p>
+          <a:p>
+            <a:pPr marL="171450" indent="-171450">
+              <a:buFont typeface="Arial" panose="020B0604020202020204" pitchFamily="34" charset="0"/>
+              <a:buChar char="•"/>
+            </a:pPr>
+            <a:r>
+              <a:rPr lang="ko-KR" altLang="en-US" sz="1200" dirty="0" smtClean="0">
+                <a:latin typeface="나눔바른고딕" panose="020B0603020101020101" pitchFamily="34" charset="-127"/>
+                <a:ea typeface="나눔바른고딕" panose="020B0603020101020101" pitchFamily="34" charset="-127"/>
+              </a:rPr>
+              <a:t>벽에 매달린 상태 </a:t>
+            </a:r>
+            <a:r>
+              <a:rPr lang="en-US" altLang="ko-KR" sz="1200" dirty="0" smtClean="0">
+                <a:latin typeface="나눔바른고딕" panose="020B0603020101020101" pitchFamily="34" charset="-127"/>
+                <a:ea typeface="나눔바른고딕" panose="020B0603020101020101" pitchFamily="34" charset="-127"/>
+              </a:rPr>
+              <a:t>: </a:t>
+            </a:r>
+            <a:r>
+              <a:rPr lang="ko-KR" altLang="en-US" sz="1200" dirty="0" smtClean="0">
+                <a:latin typeface="나눔바른고딕" panose="020B0603020101020101" pitchFamily="34" charset="-127"/>
+                <a:ea typeface="나눔바른고딕" panose="020B0603020101020101" pitchFamily="34" charset="-127"/>
+              </a:rPr>
+              <a:t>벽에 붙어 상하좌우 이동</a:t>
+            </a:r>
+            <a:endParaRPr lang="en-US" altLang="ko-KR" sz="1200" dirty="0" smtClean="0">
+              <a:latin typeface="나눔바른고딕" panose="020B0603020101020101" pitchFamily="34" charset="-127"/>
+              <a:ea typeface="나눔바른고딕" panose="020B0603020101020101" pitchFamily="34" charset="-127"/>
+            </a:endParaRPr>
+          </a:p>
+          <a:p>
+            <a:pPr marL="171450" indent="-171450">
+              <a:buFont typeface="Arial" panose="020B0604020202020204" pitchFamily="34" charset="0"/>
+              <a:buChar char="•"/>
+            </a:pPr>
+            <a:r>
+              <a:rPr lang="ko-KR" altLang="en-US" sz="1200" dirty="0" smtClean="0">
+                <a:latin typeface="나눔바른고딕" panose="020B0603020101020101" pitchFamily="34" charset="-127"/>
+                <a:ea typeface="나눔바른고딕" panose="020B0603020101020101" pitchFamily="34" charset="-127"/>
+              </a:rPr>
+              <a:t>공중에서 떨어짐 </a:t>
+            </a:r>
+            <a:r>
+              <a:rPr lang="en-US" altLang="ko-KR" sz="1200" dirty="0" smtClean="0">
+                <a:latin typeface="나눔바른고딕" panose="020B0603020101020101" pitchFamily="34" charset="-127"/>
+                <a:ea typeface="나눔바른고딕" panose="020B0603020101020101" pitchFamily="34" charset="-127"/>
+              </a:rPr>
+              <a:t>: </a:t>
+            </a:r>
+            <a:r>
+              <a:rPr lang="ko-KR" altLang="en-US" sz="1200" dirty="0" smtClean="0">
+                <a:latin typeface="나눔바른고딕" panose="020B0603020101020101" pitchFamily="34" charset="-127"/>
+                <a:ea typeface="나눔바른고딕" panose="020B0603020101020101" pitchFamily="34" charset="-127"/>
+              </a:rPr>
+              <a:t>낙하 중 이동 불가</a:t>
+            </a:r>
+            <a:endParaRPr lang="en-US" altLang="ko-KR" sz="1200" dirty="0" smtClean="0">
+              <a:latin typeface="나눔바른고딕" panose="020B0603020101020101" pitchFamily="34" charset="-127"/>
+              <a:ea typeface="나눔바른고딕" panose="020B0603020101020101" pitchFamily="34" charset="-127"/>
+            </a:endParaRPr>
+          </a:p>
+        </p:txBody>
+      </p:sp>
+      <p:sp>
+        <p:nvSpPr>
+          <p:cNvPr id="11" name="TextBox 10">
+            <a:extLst>
+              <a:ext uri="{FF2B5EF4-FFF2-40B4-BE49-F238E27FC236}">
+                <a16:creationId xmlns:a16="http://schemas.microsoft.com/office/drawing/2014/main" xmlns="" id="{55105A21-BDA3-A05F-058F-200AA1B5FC2F}"/>
+              </a:ext>
+            </a:extLst>
+          </p:cNvPr>
+          <p:cNvSpPr txBox="1"/>
+          <p:nvPr/>
+        </p:nvSpPr>
+        <p:spPr>
+          <a:xfrm>
+            <a:off x="2518600" y="5439145"/>
+            <a:ext cx="3444234" cy="830997"/>
+          </a:xfrm>
+          <a:prstGeom prst="rect">
+            <a:avLst/>
+          </a:prstGeom>
+          <a:noFill/>
+        </p:spPr>
+        <p:txBody>
+          <a:bodyPr wrap="square" rtlCol="0">
+            <a:spAutoFit/>
+          </a:bodyPr>
+          <a:lstStyle/>
+          <a:p>
+            <a:r>
+              <a:rPr lang="ko-KR" altLang="en-US" sz="1200" dirty="0" smtClean="0">
+                <a:latin typeface="나눔바른고딕" panose="020B0603020101020101" pitchFamily="34" charset="-127"/>
+                <a:ea typeface="나눔바른고딕" panose="020B0603020101020101" pitchFamily="34" charset="-127"/>
+              </a:rPr>
+              <a:t>지형에 올라 선 상태</a:t>
+            </a:r>
+            <a:endParaRPr lang="en-US" altLang="ko-KR" sz="1200" dirty="0">
+              <a:latin typeface="나눔바른고딕" panose="020B0603020101020101" pitchFamily="34" charset="-127"/>
+              <a:ea typeface="나눔바른고딕" panose="020B0603020101020101" pitchFamily="34" charset="-127"/>
+            </a:endParaRPr>
+          </a:p>
+          <a:p>
+            <a:pPr marL="171450" indent="-171450">
+              <a:buFont typeface="Arial" panose="020B0604020202020204" pitchFamily="34" charset="0"/>
+              <a:buChar char="•"/>
+            </a:pPr>
+            <a:r>
+              <a:rPr lang="ko-KR" altLang="en-US" sz="1200" dirty="0" smtClean="0">
+                <a:latin typeface="나눔바른고딕" panose="020B0603020101020101" pitchFamily="34" charset="-127"/>
+                <a:ea typeface="나눔바른고딕" panose="020B0603020101020101" pitchFamily="34" charset="-127"/>
+              </a:rPr>
+              <a:t>좁은 지형이기에 방향에 맞게 긴 방향으로만 이동</a:t>
+            </a:r>
+            <a:endParaRPr lang="en-US" altLang="ko-KR" sz="1200" dirty="0">
+              <a:latin typeface="나눔바른고딕" panose="020B0603020101020101" pitchFamily="34" charset="-127"/>
+              <a:ea typeface="나눔바른고딕" panose="020B0603020101020101" pitchFamily="34" charset="-127"/>
+            </a:endParaRPr>
+          </a:p>
+          <a:p>
+            <a:pPr marL="171450" indent="-171450">
+              <a:buFont typeface="Arial" panose="020B0604020202020204" pitchFamily="34" charset="0"/>
+              <a:buChar char="•"/>
+            </a:pPr>
+            <a:r>
+              <a:rPr lang="ko-KR" altLang="en-US" sz="1200" dirty="0" smtClean="0">
+                <a:latin typeface="나눔바른고딕" panose="020B0603020101020101" pitchFamily="34" charset="-127"/>
+                <a:ea typeface="나눔바른고딕" panose="020B0603020101020101" pitchFamily="34" charset="-127"/>
+              </a:rPr>
+              <a:t>좁은 지형 위에서만 이동할 필요</a:t>
+            </a:r>
+            <a:endParaRPr lang="en-US" altLang="ko-KR" sz="1200" dirty="0" smtClean="0">
+              <a:latin typeface="나눔바른고딕" panose="020B0603020101020101" pitchFamily="34" charset="-127"/>
+              <a:ea typeface="나눔바른고딕" panose="020B0603020101020101" pitchFamily="34" charset="-127"/>
+            </a:endParaRPr>
+          </a:p>
+          <a:p>
+            <a:pPr marL="171450" indent="-171450">
+              <a:buFont typeface="Arial" panose="020B0604020202020204" pitchFamily="34" charset="0"/>
+              <a:buChar char="•"/>
+            </a:pPr>
+            <a:r>
+              <a:rPr lang="ko-KR" altLang="en-US" sz="1200" dirty="0" smtClean="0">
+                <a:latin typeface="나눔바른고딕" panose="020B0603020101020101" pitchFamily="34" charset="-127"/>
+                <a:ea typeface="나눔바른고딕" panose="020B0603020101020101" pitchFamily="34" charset="-127"/>
+              </a:rPr>
+              <a:t>아래로 매달릴 수 있음</a:t>
+            </a:r>
+            <a:endParaRPr lang="en-US" altLang="ko-KR" sz="1200" dirty="0" smtClean="0">
+              <a:latin typeface="나눔바른고딕" panose="020B0603020101020101" pitchFamily="34" charset="-127"/>
+              <a:ea typeface="나눔바른고딕" panose="020B0603020101020101" pitchFamily="34" charset="-127"/>
+            </a:endParaRPr>
+          </a:p>
+        </p:txBody>
+      </p:sp>
+      <p:sp>
+        <p:nvSpPr>
+          <p:cNvPr id="14" name="TextBox 13">
+            <a:extLst>
+              <a:ext uri="{FF2B5EF4-FFF2-40B4-BE49-F238E27FC236}">
+                <a16:creationId xmlns:a16="http://schemas.microsoft.com/office/drawing/2014/main" xmlns="" id="{55105A21-BDA3-A05F-058F-200AA1B5FC2F}"/>
+              </a:ext>
+            </a:extLst>
+          </p:cNvPr>
+          <p:cNvSpPr txBox="1"/>
+          <p:nvPr/>
+        </p:nvSpPr>
+        <p:spPr>
+          <a:xfrm>
+            <a:off x="6926214" y="5439145"/>
+            <a:ext cx="2914476" cy="830997"/>
+          </a:xfrm>
+          <a:prstGeom prst="rect">
+            <a:avLst/>
+          </a:prstGeom>
+          <a:noFill/>
+        </p:spPr>
+        <p:txBody>
+          <a:bodyPr wrap="square" rtlCol="0">
+            <a:spAutoFit/>
+          </a:bodyPr>
+          <a:lstStyle/>
+          <a:p>
+            <a:r>
+              <a:rPr lang="ko-KR" altLang="en-US" sz="1200" dirty="0" smtClean="0">
+                <a:latin typeface="나눔바른고딕" panose="020B0603020101020101" pitchFamily="34" charset="-127"/>
+                <a:ea typeface="나눔바른고딕" panose="020B0603020101020101" pitchFamily="34" charset="-127"/>
+              </a:rPr>
+              <a:t>지형에 매달린 상태</a:t>
+            </a:r>
+            <a:endParaRPr lang="en-US" altLang="ko-KR" sz="1200" dirty="0">
+              <a:latin typeface="나눔바른고딕" panose="020B0603020101020101" pitchFamily="34" charset="-127"/>
+              <a:ea typeface="나눔바른고딕" panose="020B0603020101020101" pitchFamily="34" charset="-127"/>
+            </a:endParaRPr>
+          </a:p>
+          <a:p>
+            <a:pPr marL="171450" indent="-171450">
+              <a:buFont typeface="Arial" panose="020B0604020202020204" pitchFamily="34" charset="0"/>
+              <a:buChar char="•"/>
+            </a:pPr>
+            <a:r>
+              <a:rPr lang="ko-KR" altLang="en-US" sz="1200" dirty="0" smtClean="0">
+                <a:latin typeface="나눔바른고딕" panose="020B0603020101020101" pitchFamily="34" charset="-127"/>
+                <a:ea typeface="나눔바른고딕" panose="020B0603020101020101" pitchFamily="34" charset="-127"/>
+              </a:rPr>
+              <a:t>봉에 매달린 것처럼 좌우로만 이동</a:t>
+            </a:r>
+            <a:endParaRPr lang="en-US" altLang="ko-KR" sz="1200" dirty="0" smtClean="0">
+              <a:latin typeface="나눔바른고딕" panose="020B0603020101020101" pitchFamily="34" charset="-127"/>
+              <a:ea typeface="나눔바른고딕" panose="020B0603020101020101" pitchFamily="34" charset="-127"/>
+            </a:endParaRPr>
+          </a:p>
+          <a:p>
+            <a:pPr marL="171450" indent="-171450">
+              <a:buFont typeface="Arial" panose="020B0604020202020204" pitchFamily="34" charset="0"/>
+              <a:buChar char="•"/>
+            </a:pPr>
+            <a:r>
+              <a:rPr lang="ko-KR" altLang="en-US" sz="1200" dirty="0" smtClean="0">
+                <a:latin typeface="나눔바른고딕" panose="020B0603020101020101" pitchFamily="34" charset="-127"/>
+                <a:ea typeface="나눔바른고딕" panose="020B0603020101020101" pitchFamily="34" charset="-127"/>
+              </a:rPr>
+              <a:t>마찬가지로 지형 내에서만 이동</a:t>
+            </a:r>
+            <a:r>
+              <a:rPr lang="en-US" altLang="ko-KR" sz="1200" dirty="0" smtClean="0">
+                <a:latin typeface="나눔바른고딕" panose="020B0603020101020101" pitchFamily="34" charset="-127"/>
+                <a:ea typeface="나눔바른고딕" panose="020B0603020101020101" pitchFamily="34" charset="-127"/>
+              </a:rPr>
+              <a:t> </a:t>
+            </a:r>
+            <a:r>
+              <a:rPr lang="ko-KR" altLang="en-US" sz="1200" dirty="0" smtClean="0">
+                <a:latin typeface="나눔바른고딕" panose="020B0603020101020101" pitchFamily="34" charset="-127"/>
+                <a:ea typeface="나눔바른고딕" panose="020B0603020101020101" pitchFamily="34" charset="-127"/>
+              </a:rPr>
+              <a:t>가능</a:t>
+            </a:r>
+            <a:endParaRPr lang="en-US" altLang="ko-KR" sz="1200" dirty="0" smtClean="0">
+              <a:latin typeface="나눔바른고딕" panose="020B0603020101020101" pitchFamily="34" charset="-127"/>
+              <a:ea typeface="나눔바른고딕" panose="020B0603020101020101" pitchFamily="34" charset="-127"/>
+            </a:endParaRPr>
+          </a:p>
+          <a:p>
+            <a:pPr marL="171450" indent="-171450">
+              <a:buFont typeface="Arial" panose="020B0604020202020204" pitchFamily="34" charset="0"/>
+              <a:buChar char="•"/>
+            </a:pPr>
+            <a:r>
+              <a:rPr lang="ko-KR" altLang="en-US" sz="1200" dirty="0" smtClean="0">
+                <a:latin typeface="나눔바른고딕" panose="020B0603020101020101" pitchFamily="34" charset="-127"/>
+                <a:ea typeface="나눔바른고딕" panose="020B0603020101020101" pitchFamily="34" charset="-127"/>
+              </a:rPr>
+              <a:t>위로 올라갈 수 있음</a:t>
+            </a:r>
+            <a:endParaRPr lang="en-US" altLang="ko-KR" sz="1200" dirty="0" smtClean="0">
+              <a:latin typeface="나눔바른고딕" panose="020B0603020101020101" pitchFamily="34" charset="-127"/>
+              <a:ea typeface="나눔바른고딕" panose="020B0603020101020101" pitchFamily="34" charset="-127"/>
+            </a:endParaRPr>
+          </a:p>
+        </p:txBody>
+      </p:sp>
+      <p:sp>
+        <p:nvSpPr>
+          <p:cNvPr id="4" name="직사각형 3"/>
+          <p:cNvSpPr/>
+          <p:nvPr/>
+        </p:nvSpPr>
+        <p:spPr>
+          <a:xfrm>
+            <a:off x="1127765" y="5018442"/>
+            <a:ext cx="909223" cy="276999"/>
+          </a:xfrm>
+          <a:prstGeom prst="rect">
+            <a:avLst/>
+          </a:prstGeom>
+        </p:spPr>
+        <p:txBody>
+          <a:bodyPr wrap="none">
+            <a:spAutoFit/>
+          </a:bodyPr>
+          <a:lstStyle/>
+          <a:p>
+            <a:r>
+              <a:rPr lang="ko-KR" altLang="en-US" sz="1200" dirty="0" smtClean="0">
+                <a:latin typeface="나눔바른고딕" panose="020B0603020101020101" pitchFamily="34" charset="-127"/>
+                <a:ea typeface="나눔바른고딕" panose="020B0603020101020101" pitchFamily="34" charset="-127"/>
+              </a:rPr>
+              <a:t>추가된 상태</a:t>
+            </a:r>
+            <a:endParaRPr lang="en-US" altLang="ko-KR" sz="1200" dirty="0">
+              <a:latin typeface="나눔바른고딕" panose="020B0603020101020101" pitchFamily="34" charset="-127"/>
+              <a:ea typeface="나눔바른고딕" panose="020B0603020101020101" pitchFamily="34" charset="-127"/>
+            </a:endParaRPr>
+          </a:p>
+        </p:txBody>
+      </p:sp>
+    </p:spTree>
+    <p:extLst>
+      <p:ext uri="{BB962C8B-B14F-4D97-AF65-F5344CB8AC3E}">
+        <p14:creationId xmlns:p14="http://schemas.microsoft.com/office/powerpoint/2010/main" val="1272250479"/>
+      </p:ext>
+    </p:extLst>
+  </p:cSld>
+  <p:clrMapOvr>
+    <a:masterClrMapping/>
+  </p:clrMapOvr>
+</p:sld>
+</file>
+
+<file path=ppt/slides/slide5.xml><?xml version="1.0" encoding="utf-8"?>
+<p:sld xmlns:a="http://schemas.openxmlformats.org/drawingml/2006/main" xmlns:r="http://schemas.openxmlformats.org/officeDocument/2006/relationships" xmlns:p="http://schemas.openxmlformats.org/presentationml/2006/main">
+  <p:cSld>
+    <p:spTree>
+      <p:nvGrpSpPr>
+        <p:cNvPr id="1" name="">
+          <a:extLst>
+            <a:ext uri="{FF2B5EF4-FFF2-40B4-BE49-F238E27FC236}">
+              <a16:creationId xmlns:a16="http://schemas.microsoft.com/office/drawing/2014/main" xmlns="" id="{4E3DA648-5785-8201-CCD7-F4B146EDE99F}"/>
+            </a:ext>
+          </a:extLst>
+        </p:cNvPr>
+        <p:cNvGrpSpPr/>
+        <p:nvPr/>
+      </p:nvGrpSpPr>
+      <p:grpSpPr>
+        <a:xfrm>
+          <a:off x="0" y="0"/>
+          <a:ext cx="0" cy="0"/>
+          <a:chOff x="0" y="0"/>
+          <a:chExt cx="0" cy="0"/>
+        </a:xfrm>
+      </p:grpSpPr>
+      <p:sp>
+        <p:nvSpPr>
+          <p:cNvPr id="8" name="TextBox 7">
+            <a:extLst>
+              <a:ext uri="{FF2B5EF4-FFF2-40B4-BE49-F238E27FC236}">
+                <a16:creationId xmlns:a16="http://schemas.microsoft.com/office/drawing/2014/main" xmlns="" id="{31234DBB-F039-BEB0-AC6F-55B73AE31537}"/>
+              </a:ext>
+            </a:extLst>
+          </p:cNvPr>
+          <p:cNvSpPr txBox="1"/>
+          <p:nvPr/>
+        </p:nvSpPr>
+        <p:spPr>
+          <a:xfrm>
+            <a:off x="302451" y="315453"/>
+            <a:ext cx="4944140" cy="369332"/>
+          </a:xfrm>
+          <a:prstGeom prst="rect">
+            <a:avLst/>
+          </a:prstGeom>
+          <a:noFill/>
+        </p:spPr>
+        <p:txBody>
+          <a:bodyPr wrap="square" rtlCol="0">
+            <a:spAutoFit/>
+          </a:bodyPr>
+          <a:lstStyle/>
+          <a:p>
+            <a:r>
+              <a:rPr lang="ko-KR" altLang="en-US" dirty="0">
+                <a:latin typeface="나눔바른고딕" panose="020B0603020101020101" pitchFamily="34" charset="-127"/>
+                <a:ea typeface="나눔바른고딕" panose="020B0603020101020101" pitchFamily="34" charset="-127"/>
+              </a:rPr>
+              <a:t>이번 주 작업 내역</a:t>
+            </a:r>
+            <a:endParaRPr lang="en-US" altLang="ko-KR" dirty="0">
+              <a:latin typeface="나눔바른고딕" panose="020B0603020101020101" pitchFamily="34" charset="-127"/>
+              <a:ea typeface="나눔바른고딕" panose="020B0603020101020101" pitchFamily="34" charset="-127"/>
+            </a:endParaRPr>
+          </a:p>
+        </p:txBody>
+      </p:sp>
+      <p:sp>
+        <p:nvSpPr>
+          <p:cNvPr id="10" name="TextBox 9">
+            <a:extLst>
+              <a:ext uri="{FF2B5EF4-FFF2-40B4-BE49-F238E27FC236}">
+                <a16:creationId xmlns:a16="http://schemas.microsoft.com/office/drawing/2014/main" xmlns="" id="{EABADBF9-06F0-4F22-76AB-A2F83B3A3175}"/>
+              </a:ext>
+            </a:extLst>
+          </p:cNvPr>
+          <p:cNvSpPr txBox="1"/>
+          <p:nvPr/>
+        </p:nvSpPr>
+        <p:spPr>
+          <a:xfrm>
+            <a:off x="302450" y="1003762"/>
+            <a:ext cx="2694247" cy="338554"/>
+          </a:xfrm>
+          <a:prstGeom prst="rect">
+            <a:avLst/>
+          </a:prstGeom>
+          <a:noFill/>
+        </p:spPr>
+        <p:txBody>
+          <a:bodyPr wrap="square" rtlCol="0">
+            <a:spAutoFit/>
+          </a:bodyPr>
+          <a:lstStyle/>
+          <a:p>
+            <a:r>
+              <a:rPr lang="ko-KR" altLang="en-US" sz="1600" dirty="0">
+                <a:latin typeface="나눔바른고딕" panose="020B0603020101020101" pitchFamily="34" charset="-127"/>
+                <a:ea typeface="나눔바른고딕" panose="020B0603020101020101" pitchFamily="34" charset="-127"/>
+              </a:rPr>
+              <a:t>인식 후 처리</a:t>
+            </a:r>
+            <a:r>
+              <a:rPr lang="en-US" altLang="ko-KR" sz="1600" dirty="0">
+                <a:latin typeface="나눔바른고딕" panose="020B0603020101020101" pitchFamily="34" charset="-127"/>
+                <a:ea typeface="나눔바른고딕" panose="020B0603020101020101" pitchFamily="34" charset="-127"/>
+              </a:rPr>
+              <a:t> : </a:t>
+            </a:r>
+            <a:r>
+              <a:rPr lang="ko-KR" altLang="en-US" sz="1600" dirty="0">
+                <a:latin typeface="나눔바른고딕" panose="020B0603020101020101" pitchFamily="34" charset="-127"/>
+                <a:ea typeface="나눔바른고딕" panose="020B0603020101020101" pitchFamily="34" charset="-127"/>
+              </a:rPr>
+              <a:t> 캐릭터 </a:t>
+            </a:r>
+            <a:r>
+              <a:rPr lang="en-US" altLang="ko-KR" sz="1600" dirty="0">
+                <a:latin typeface="나눔바른고딕" panose="020B0603020101020101" pitchFamily="34" charset="-127"/>
+                <a:ea typeface="나눔바른고딕" panose="020B0603020101020101" pitchFamily="34" charset="-127"/>
+              </a:rPr>
+              <a:t>FSM</a:t>
+            </a:r>
+            <a:endParaRPr lang="en-US" altLang="ko-KR" sz="1600" dirty="0">
+              <a:latin typeface="나눔바른고딕" panose="020B0603020101020101" pitchFamily="34" charset="-127"/>
+              <a:ea typeface="나눔바른고딕" panose="020B0603020101020101" pitchFamily="34" charset="-127"/>
+            </a:endParaRPr>
+          </a:p>
+        </p:txBody>
+      </p:sp>
+      <p:cxnSp>
+        <p:nvCxnSpPr>
+          <p:cNvPr id="3" name="직선 연결선 2">
+            <a:extLst>
+              <a:ext uri="{FF2B5EF4-FFF2-40B4-BE49-F238E27FC236}">
+                <a16:creationId xmlns:a16="http://schemas.microsoft.com/office/drawing/2014/main" xmlns="" id="{CB59DBA8-457E-E5E3-165C-093E13F8D469}"/>
+              </a:ext>
+            </a:extLst>
+          </p:cNvPr>
+          <p:cNvCxnSpPr>
+            <a:cxnSpLocks/>
+          </p:cNvCxnSpPr>
+          <p:nvPr/>
+        </p:nvCxnSpPr>
+        <p:spPr>
+          <a:xfrm>
+            <a:off x="387511" y="818707"/>
+            <a:ext cx="11308303" cy="0"/>
+          </a:xfrm>
+          <a:prstGeom prst="line">
+            <a:avLst/>
+          </a:prstGeom>
+          <a:ln>
+            <a:solidFill>
+              <a:schemeClr val="tx2"/>
+            </a:solidFill>
+          </a:ln>
+        </p:spPr>
+        <p:style>
+          <a:lnRef idx="2">
+            <a:schemeClr val="accent1"/>
+          </a:lnRef>
+          <a:fillRef idx="0">
+            <a:schemeClr val="accent1"/>
+          </a:fillRef>
+          <a:effectRef idx="1">
+            <a:schemeClr val="accent1"/>
+          </a:effectRef>
+          <a:fontRef idx="minor">
+            <a:schemeClr val="tx1"/>
+          </a:fontRef>
+        </p:style>
+      </p:cxnSp>
+      <p:sp>
+        <p:nvSpPr>
+          <p:cNvPr id="12" name="직사각형 11">
+            <a:extLst>
+              <a:ext uri="{FF2B5EF4-FFF2-40B4-BE49-F238E27FC236}">
+                <a16:creationId xmlns:a16="http://schemas.microsoft.com/office/drawing/2014/main" xmlns="" id="{900D37A4-34C2-C7F8-201A-CAF255E4B871}"/>
+              </a:ext>
+            </a:extLst>
+          </p:cNvPr>
+          <p:cNvSpPr/>
+          <p:nvPr/>
+        </p:nvSpPr>
+        <p:spPr>
+          <a:xfrm>
+            <a:off x="10443172" y="118011"/>
+            <a:ext cx="1596912" cy="246221"/>
+          </a:xfrm>
+          <a:prstGeom prst="rect">
+            <a:avLst/>
+          </a:prstGeom>
+        </p:spPr>
+        <p:txBody>
+          <a:bodyPr wrap="none">
+            <a:spAutoFit/>
+          </a:bodyPr>
+          <a:lstStyle/>
+          <a:p>
+            <a:r>
+              <a:rPr lang="ko-KR" altLang="en-US" sz="1000" dirty="0" err="1">
+                <a:solidFill>
+                  <a:schemeClr val="bg1">
+                    <a:lumMod val="75000"/>
+                  </a:schemeClr>
+                </a:solidFill>
+                <a:latin typeface="나눔바른고딕" panose="020B0603020101020101" pitchFamily="34" charset="-127"/>
+                <a:ea typeface="나눔바른고딕" panose="020B0603020101020101" pitchFamily="34" charset="-127"/>
+              </a:rPr>
+              <a:t>펄어비스</a:t>
+            </a:r>
+            <a:r>
+              <a:rPr lang="ko-KR" altLang="en-US" sz="1000" dirty="0">
+                <a:solidFill>
+                  <a:schemeClr val="bg1">
+                    <a:lumMod val="75000"/>
+                  </a:schemeClr>
+                </a:solidFill>
+                <a:latin typeface="나눔바른고딕" panose="020B0603020101020101" pitchFamily="34" charset="-127"/>
+                <a:ea typeface="나눔바른고딕" panose="020B0603020101020101" pitchFamily="34" charset="-127"/>
+              </a:rPr>
+              <a:t> </a:t>
+            </a:r>
+            <a:r>
+              <a:rPr lang="en-US" altLang="ko-KR" sz="1000" dirty="0">
+                <a:solidFill>
+                  <a:schemeClr val="bg1">
+                    <a:lumMod val="75000"/>
+                  </a:schemeClr>
+                </a:solidFill>
+                <a:latin typeface="나눔바른고딕" panose="020B0603020101020101" pitchFamily="34" charset="-127"/>
+                <a:ea typeface="나눔바른고딕" panose="020B0603020101020101" pitchFamily="34" charset="-127"/>
+              </a:rPr>
+              <a:t>2026 </a:t>
+            </a:r>
+            <a:r>
+              <a:rPr lang="ko-KR" altLang="en-US" sz="1000" dirty="0">
+                <a:solidFill>
+                  <a:schemeClr val="bg1">
+                    <a:lumMod val="75000"/>
+                  </a:schemeClr>
+                </a:solidFill>
+                <a:latin typeface="나눔바른고딕" panose="020B0603020101020101" pitchFamily="34" charset="-127"/>
+                <a:ea typeface="나눔바른고딕" panose="020B0603020101020101" pitchFamily="34" charset="-127"/>
+              </a:rPr>
+              <a:t>여름 </a:t>
+            </a:r>
+            <a:r>
+              <a:rPr lang="ko-KR" altLang="en-US" sz="1000" dirty="0" err="1">
+                <a:solidFill>
+                  <a:schemeClr val="bg1">
+                    <a:lumMod val="75000"/>
+                  </a:schemeClr>
+                </a:solidFill>
+                <a:latin typeface="나눔바른고딕" panose="020B0603020101020101" pitchFamily="34" charset="-127"/>
+                <a:ea typeface="나눔바른고딕" panose="020B0603020101020101" pitchFamily="34" charset="-127"/>
+              </a:rPr>
+              <a:t>인턴십</a:t>
+            </a:r>
+            <a:endParaRPr lang="ko-KR" altLang="en-US" sz="1000" dirty="0">
+              <a:solidFill>
+                <a:schemeClr val="bg1">
+                  <a:lumMod val="75000"/>
+                </a:schemeClr>
+              </a:solidFill>
+              <a:latin typeface="나눔바른고딕" panose="020B0603020101020101" pitchFamily="34" charset="-127"/>
+              <a:ea typeface="나눔바른고딕" panose="020B0603020101020101" pitchFamily="34" charset="-127"/>
+            </a:endParaRPr>
+          </a:p>
+        </p:txBody>
+      </p:sp>
+      <p:sp>
+        <p:nvSpPr>
+          <p:cNvPr id="15" name="직사각형 14"/>
+          <p:cNvSpPr/>
+          <p:nvPr/>
+        </p:nvSpPr>
+        <p:spPr>
+          <a:xfrm>
+            <a:off x="1287683" y="2270497"/>
+            <a:ext cx="3958908" cy="544396"/>
+          </a:xfrm>
+          <a:prstGeom prst="rect">
+            <a:avLst/>
+          </a:prstGeom>
+        </p:spPr>
+        <p:style>
+          <a:lnRef idx="2">
+            <a:schemeClr val="accent1">
+              <a:shade val="50000"/>
+            </a:schemeClr>
+          </a:lnRef>
+          <a:fillRef idx="1">
+            <a:schemeClr val="accent1"/>
+          </a:fillRef>
+          <a:effectRef idx="0">
+            <a:schemeClr val="accent1"/>
+          </a:effectRef>
+          <a:fontRef idx="minor">
+            <a:schemeClr val="lt1"/>
+          </a:fontRef>
+        </p:style>
+        <p:txBody>
+          <a:bodyPr rtlCol="0" anchor="ctr"/>
+          <a:lstStyle/>
+          <a:p>
+            <a:pPr algn="ctr"/>
+            <a:r>
+              <a:rPr lang="ko-KR" altLang="en-US" smtClean="0"/>
+              <a:t>지형 인식 트리</a:t>
+            </a:r>
+            <a:endParaRPr lang="ko-KR" altLang="en-US" dirty="0"/>
+          </a:p>
+        </p:txBody>
+      </p:sp>
+      <p:sp>
+        <p:nvSpPr>
+          <p:cNvPr id="16" name="직사각형 15"/>
+          <p:cNvSpPr/>
+          <p:nvPr/>
+        </p:nvSpPr>
+        <p:spPr>
+          <a:xfrm>
+            <a:off x="1287682" y="3804345"/>
+            <a:ext cx="3958908" cy="544396"/>
+          </a:xfrm>
+          <a:prstGeom prst="rect">
+            <a:avLst/>
+          </a:prstGeom>
+        </p:spPr>
+        <p:style>
+          <a:lnRef idx="2">
+            <a:schemeClr val="accent1">
+              <a:shade val="50000"/>
+            </a:schemeClr>
+          </a:lnRef>
+          <a:fillRef idx="1">
+            <a:schemeClr val="accent1"/>
+          </a:fillRef>
+          <a:effectRef idx="0">
+            <a:schemeClr val="accent1"/>
+          </a:effectRef>
+          <a:fontRef idx="minor">
+            <a:schemeClr val="lt1"/>
+          </a:fontRef>
+        </p:style>
+        <p:txBody>
+          <a:bodyPr rtlCol="0" anchor="ctr"/>
+          <a:lstStyle/>
+          <a:p>
+            <a:pPr algn="ctr"/>
+            <a:r>
+              <a:rPr lang="ko-KR" altLang="en-US" dirty="0" smtClean="0"/>
+              <a:t>캐릭터 </a:t>
+            </a:r>
+            <a:r>
+              <a:rPr lang="ko-KR" altLang="en-US" dirty="0" err="1" smtClean="0"/>
+              <a:t>상태머신</a:t>
+            </a:r>
+            <a:endParaRPr lang="ko-KR" altLang="en-US" dirty="0"/>
+          </a:p>
+        </p:txBody>
+      </p:sp>
+      <p:sp>
+        <p:nvSpPr>
+          <p:cNvPr id="17" name="직사각형 16"/>
+          <p:cNvSpPr/>
+          <p:nvPr/>
+        </p:nvSpPr>
+        <p:spPr>
+          <a:xfrm>
+            <a:off x="1287682" y="5296189"/>
+            <a:ext cx="3958908" cy="544396"/>
+          </a:xfrm>
+          <a:prstGeom prst="rect">
+            <a:avLst/>
+          </a:prstGeom>
+        </p:spPr>
+        <p:style>
+          <a:lnRef idx="2">
+            <a:schemeClr val="accent1">
+              <a:shade val="50000"/>
+            </a:schemeClr>
+          </a:lnRef>
+          <a:fillRef idx="1">
+            <a:schemeClr val="accent1"/>
+          </a:fillRef>
+          <a:effectRef idx="0">
+            <a:schemeClr val="accent1"/>
+          </a:effectRef>
+          <a:fontRef idx="minor">
+            <a:schemeClr val="lt1"/>
+          </a:fontRef>
+        </p:style>
+        <p:txBody>
+          <a:bodyPr rtlCol="0" anchor="ctr"/>
+          <a:lstStyle/>
+          <a:p>
+            <a:pPr algn="ctr"/>
+            <a:r>
+              <a:rPr lang="ko-KR" altLang="en-US" dirty="0" smtClean="0"/>
+              <a:t>애니메이션</a:t>
+            </a:r>
+            <a:endParaRPr lang="ko-KR" altLang="en-US" dirty="0"/>
+          </a:p>
+        </p:txBody>
+      </p:sp>
+      <p:sp>
+        <p:nvSpPr>
+          <p:cNvPr id="18" name="TextBox 17">
+            <a:extLst>
+              <a:ext uri="{FF2B5EF4-FFF2-40B4-BE49-F238E27FC236}">
+                <a16:creationId xmlns:a16="http://schemas.microsoft.com/office/drawing/2014/main" xmlns="" id="{55105A21-BDA3-A05F-058F-200AA1B5FC2F}"/>
+              </a:ext>
+            </a:extLst>
+          </p:cNvPr>
+          <p:cNvSpPr txBox="1"/>
+          <p:nvPr/>
+        </p:nvSpPr>
+        <p:spPr>
+          <a:xfrm>
+            <a:off x="4062791" y="1390908"/>
+            <a:ext cx="4187357" cy="276999"/>
+          </a:xfrm>
+          <a:prstGeom prst="rect">
+            <a:avLst/>
+          </a:prstGeom>
+          <a:noFill/>
+        </p:spPr>
+        <p:txBody>
+          <a:bodyPr wrap="square" rtlCol="0">
+            <a:spAutoFit/>
+          </a:bodyPr>
+          <a:lstStyle/>
+          <a:p>
+            <a:pPr algn="ctr"/>
+            <a:r>
+              <a:rPr lang="ko-KR" altLang="en-US" sz="1200" dirty="0" smtClean="0">
+                <a:latin typeface="나눔바른고딕" panose="020B0603020101020101" pitchFamily="34" charset="-127"/>
+                <a:ea typeface="나눔바른고딕" panose="020B0603020101020101" pitchFamily="34" charset="-127"/>
+              </a:rPr>
+              <a:t>전체적인 처리 과정</a:t>
+            </a:r>
+            <a:endParaRPr lang="en-US" altLang="ko-KR" sz="1200" dirty="0">
+              <a:latin typeface="나눔바른고딕" panose="020B0603020101020101" pitchFamily="34" charset="-127"/>
+              <a:ea typeface="나눔바른고딕" panose="020B0603020101020101" pitchFamily="34" charset="-127"/>
+            </a:endParaRPr>
+          </a:p>
+        </p:txBody>
+      </p:sp>
+    </p:spTree>
+    <p:extLst>
+      <p:ext uri="{BB962C8B-B14F-4D97-AF65-F5344CB8AC3E}">
+        <p14:creationId xmlns:p14="http://schemas.microsoft.com/office/powerpoint/2010/main" val="2914805710"/>
+      </p:ext>
+    </p:extLst>
+  </p:cSld>
+  <p:clrMapOvr>
+    <a:masterClrMapping/>
+  </p:clrMapOvr>
+</p:sld>
+</file>
+
+<file path=ppt/slides/slide6.xml><?xml version="1.0" encoding="utf-8"?>
+<p:sld xmlns:a="http://schemas.openxmlformats.org/drawingml/2006/main" xmlns:r="http://schemas.openxmlformats.org/officeDocument/2006/relationships" xmlns:p="http://schemas.openxmlformats.org/presentationml/2006/main">
+  <p:cSld>
+    <p:spTree>
+      <p:nvGrpSpPr>
+        <p:cNvPr id="1" name="">
+          <a:extLst>
+            <a:ext uri="{FF2B5EF4-FFF2-40B4-BE49-F238E27FC236}">
+              <a16:creationId xmlns:a16="http://schemas.microsoft.com/office/drawing/2014/main" xmlns="" id="{4E3DA648-5785-8201-CCD7-F4B146EDE99F}"/>
+            </a:ext>
+          </a:extLst>
+        </p:cNvPr>
+        <p:cNvGrpSpPr/>
+        <p:nvPr/>
+      </p:nvGrpSpPr>
+      <p:grpSpPr>
+        <a:xfrm>
+          <a:off x="0" y="0"/>
+          <a:ext cx="0" cy="0"/>
+          <a:chOff x="0" y="0"/>
+          <a:chExt cx="0" cy="0"/>
+        </a:xfrm>
+      </p:grpSpPr>
+      <p:sp>
+        <p:nvSpPr>
+          <p:cNvPr id="8" name="TextBox 7">
+            <a:extLst>
+              <a:ext uri="{FF2B5EF4-FFF2-40B4-BE49-F238E27FC236}">
+                <a16:creationId xmlns:a16="http://schemas.microsoft.com/office/drawing/2014/main" xmlns="" id="{31234DBB-F039-BEB0-AC6F-55B73AE31537}"/>
+              </a:ext>
+            </a:extLst>
+          </p:cNvPr>
+          <p:cNvSpPr txBox="1"/>
+          <p:nvPr/>
+        </p:nvSpPr>
+        <p:spPr>
+          <a:xfrm>
+            <a:off x="302451" y="315453"/>
+            <a:ext cx="4944140" cy="369332"/>
+          </a:xfrm>
+          <a:prstGeom prst="rect">
+            <a:avLst/>
+          </a:prstGeom>
+          <a:noFill/>
+        </p:spPr>
+        <p:txBody>
+          <a:bodyPr wrap="square" rtlCol="0">
+            <a:spAutoFit/>
+          </a:bodyPr>
+          <a:lstStyle/>
+          <a:p>
+            <a:r>
+              <a:rPr lang="ko-KR" altLang="en-US" dirty="0">
+                <a:latin typeface="나눔바른고딕" panose="020B0603020101020101" pitchFamily="34" charset="-127"/>
+                <a:ea typeface="나눔바른고딕" panose="020B0603020101020101" pitchFamily="34" charset="-127"/>
+              </a:rPr>
+              <a:t>이번 주 작업 내역</a:t>
+            </a:r>
+            <a:endParaRPr lang="en-US" altLang="ko-KR" dirty="0">
+              <a:latin typeface="나눔바른고딕" panose="020B0603020101020101" pitchFamily="34" charset="-127"/>
+              <a:ea typeface="나눔바른고딕" panose="020B0603020101020101" pitchFamily="34" charset="-127"/>
+            </a:endParaRPr>
+          </a:p>
+        </p:txBody>
+      </p:sp>
+      <p:sp>
+        <p:nvSpPr>
+          <p:cNvPr id="10" name="TextBox 9">
+            <a:extLst>
+              <a:ext uri="{FF2B5EF4-FFF2-40B4-BE49-F238E27FC236}">
+                <a16:creationId xmlns:a16="http://schemas.microsoft.com/office/drawing/2014/main" xmlns="" id="{EABADBF9-06F0-4F22-76AB-A2F83B3A3175}"/>
+              </a:ext>
+            </a:extLst>
+          </p:cNvPr>
+          <p:cNvSpPr txBox="1"/>
+          <p:nvPr/>
+        </p:nvSpPr>
+        <p:spPr>
+          <a:xfrm>
+            <a:off x="302450" y="1003762"/>
+            <a:ext cx="7464813" cy="338554"/>
+          </a:xfrm>
+          <a:prstGeom prst="rect">
+            <a:avLst/>
+          </a:prstGeom>
+          <a:noFill/>
+        </p:spPr>
+        <p:txBody>
+          <a:bodyPr wrap="square" rtlCol="0">
+            <a:spAutoFit/>
+          </a:bodyPr>
+          <a:lstStyle/>
+          <a:p>
+            <a:r>
+              <a:rPr lang="ko-KR" altLang="en-US" sz="1600" dirty="0" smtClean="0">
+                <a:latin typeface="나눔바른고딕" panose="020B0603020101020101" pitchFamily="34" charset="-127"/>
+                <a:ea typeface="나눔바른고딕" panose="020B0603020101020101" pitchFamily="34" charset="-127"/>
+              </a:rPr>
+              <a:t>인식 후 처리</a:t>
+            </a:r>
+            <a:r>
+              <a:rPr lang="en-US" altLang="ko-KR" sz="1600" dirty="0">
+                <a:latin typeface="나눔바른고딕" panose="020B0603020101020101" pitchFamily="34" charset="-127"/>
+                <a:ea typeface="나눔바른고딕" panose="020B0603020101020101" pitchFamily="34" charset="-127"/>
+              </a:rPr>
+              <a:t> </a:t>
+            </a:r>
+            <a:r>
+              <a:rPr lang="en-US" altLang="ko-KR" sz="1600" dirty="0" smtClean="0">
+                <a:latin typeface="나눔바른고딕" panose="020B0603020101020101" pitchFamily="34" charset="-127"/>
+                <a:ea typeface="나눔바른고딕" panose="020B0603020101020101" pitchFamily="34" charset="-127"/>
+              </a:rPr>
+              <a:t>: </a:t>
+            </a:r>
+            <a:r>
+              <a:rPr lang="ko-KR" altLang="en-US" sz="1600" dirty="0" smtClean="0">
+                <a:latin typeface="나눔바른고딕" panose="020B0603020101020101" pitchFamily="34" charset="-127"/>
+                <a:ea typeface="나눔바른고딕" panose="020B0603020101020101" pitchFamily="34" charset="-127"/>
+              </a:rPr>
+              <a:t> 캐릭터 </a:t>
+            </a:r>
+            <a:r>
+              <a:rPr lang="en-US" altLang="ko-KR" sz="1600" dirty="0">
+                <a:latin typeface="나눔바른고딕" panose="020B0603020101020101" pitchFamily="34" charset="-127"/>
+                <a:ea typeface="나눔바른고딕" panose="020B0603020101020101" pitchFamily="34" charset="-127"/>
+              </a:rPr>
+              <a:t>FSM</a:t>
+            </a:r>
+          </a:p>
+        </p:txBody>
+      </p:sp>
+      <p:cxnSp>
+        <p:nvCxnSpPr>
+          <p:cNvPr id="3" name="직선 연결선 2">
+            <a:extLst>
+              <a:ext uri="{FF2B5EF4-FFF2-40B4-BE49-F238E27FC236}">
+                <a16:creationId xmlns:a16="http://schemas.microsoft.com/office/drawing/2014/main" xmlns="" id="{CB59DBA8-457E-E5E3-165C-093E13F8D469}"/>
+              </a:ext>
+            </a:extLst>
+          </p:cNvPr>
+          <p:cNvCxnSpPr>
+            <a:cxnSpLocks/>
+          </p:cNvCxnSpPr>
+          <p:nvPr/>
+        </p:nvCxnSpPr>
+        <p:spPr>
+          <a:xfrm>
+            <a:off x="387511" y="818707"/>
+            <a:ext cx="11308303" cy="0"/>
+          </a:xfrm>
+          <a:prstGeom prst="line">
+            <a:avLst/>
+          </a:prstGeom>
+          <a:ln>
+            <a:solidFill>
+              <a:schemeClr val="tx2"/>
+            </a:solidFill>
+          </a:ln>
+        </p:spPr>
+        <p:style>
+          <a:lnRef idx="2">
+            <a:schemeClr val="accent1"/>
+          </a:lnRef>
+          <a:fillRef idx="0">
+            <a:schemeClr val="accent1"/>
+          </a:fillRef>
+          <a:effectRef idx="1">
+            <a:schemeClr val="accent1"/>
+          </a:effectRef>
+          <a:fontRef idx="minor">
+            <a:schemeClr val="tx1"/>
+          </a:fontRef>
+        </p:style>
+      </p:cxnSp>
+      <p:sp>
+        <p:nvSpPr>
+          <p:cNvPr id="12" name="직사각형 11">
+            <a:extLst>
+              <a:ext uri="{FF2B5EF4-FFF2-40B4-BE49-F238E27FC236}">
+                <a16:creationId xmlns:a16="http://schemas.microsoft.com/office/drawing/2014/main" xmlns="" id="{900D37A4-34C2-C7F8-201A-CAF255E4B871}"/>
+              </a:ext>
+            </a:extLst>
+          </p:cNvPr>
+          <p:cNvSpPr/>
+          <p:nvPr/>
+        </p:nvSpPr>
+        <p:spPr>
+          <a:xfrm>
+            <a:off x="10443172" y="118011"/>
+            <a:ext cx="1596912" cy="246221"/>
+          </a:xfrm>
+          <a:prstGeom prst="rect">
+            <a:avLst/>
+          </a:prstGeom>
+        </p:spPr>
+        <p:txBody>
+          <a:bodyPr wrap="none">
+            <a:spAutoFit/>
+          </a:bodyPr>
+          <a:lstStyle/>
+          <a:p>
+            <a:r>
+              <a:rPr lang="ko-KR" altLang="en-US" sz="1000" dirty="0" err="1">
+                <a:solidFill>
+                  <a:schemeClr val="bg1">
+                    <a:lumMod val="75000"/>
+                  </a:schemeClr>
+                </a:solidFill>
+                <a:latin typeface="나눔바른고딕" panose="020B0603020101020101" pitchFamily="34" charset="-127"/>
+                <a:ea typeface="나눔바른고딕" panose="020B0603020101020101" pitchFamily="34" charset="-127"/>
+              </a:rPr>
+              <a:t>펄어비스</a:t>
+            </a:r>
+            <a:r>
+              <a:rPr lang="ko-KR" altLang="en-US" sz="1000" dirty="0">
+                <a:solidFill>
+                  <a:schemeClr val="bg1">
+                    <a:lumMod val="75000"/>
+                  </a:schemeClr>
+                </a:solidFill>
+                <a:latin typeface="나눔바른고딕" panose="020B0603020101020101" pitchFamily="34" charset="-127"/>
+                <a:ea typeface="나눔바른고딕" panose="020B0603020101020101" pitchFamily="34" charset="-127"/>
+              </a:rPr>
+              <a:t> </a:t>
+            </a:r>
+            <a:r>
+              <a:rPr lang="en-US" altLang="ko-KR" sz="1000" dirty="0">
+                <a:solidFill>
+                  <a:schemeClr val="bg1">
+                    <a:lumMod val="75000"/>
+                  </a:schemeClr>
+                </a:solidFill>
+                <a:latin typeface="나눔바른고딕" panose="020B0603020101020101" pitchFamily="34" charset="-127"/>
+                <a:ea typeface="나눔바른고딕" panose="020B0603020101020101" pitchFamily="34" charset="-127"/>
+              </a:rPr>
+              <a:t>2026 </a:t>
+            </a:r>
+            <a:r>
+              <a:rPr lang="ko-KR" altLang="en-US" sz="1000" dirty="0">
+                <a:solidFill>
+                  <a:schemeClr val="bg1">
+                    <a:lumMod val="75000"/>
+                  </a:schemeClr>
+                </a:solidFill>
+                <a:latin typeface="나눔바른고딕" panose="020B0603020101020101" pitchFamily="34" charset="-127"/>
+                <a:ea typeface="나눔바른고딕" panose="020B0603020101020101" pitchFamily="34" charset="-127"/>
+              </a:rPr>
+              <a:t>여름 </a:t>
+            </a:r>
+            <a:r>
+              <a:rPr lang="ko-KR" altLang="en-US" sz="1000" dirty="0" err="1">
+                <a:solidFill>
+                  <a:schemeClr val="bg1">
+                    <a:lumMod val="75000"/>
+                  </a:schemeClr>
+                </a:solidFill>
+                <a:latin typeface="나눔바른고딕" panose="020B0603020101020101" pitchFamily="34" charset="-127"/>
+                <a:ea typeface="나눔바른고딕" panose="020B0603020101020101" pitchFamily="34" charset="-127"/>
+              </a:rPr>
+              <a:t>인턴십</a:t>
+            </a:r>
+            <a:endParaRPr lang="ko-KR" altLang="en-US" sz="1000" dirty="0">
+              <a:solidFill>
+                <a:schemeClr val="bg1">
+                  <a:lumMod val="75000"/>
+                </a:schemeClr>
+              </a:solidFill>
+              <a:latin typeface="나눔바른고딕" panose="020B0603020101020101" pitchFamily="34" charset="-127"/>
+              <a:ea typeface="나눔바른고딕" panose="020B0603020101020101" pitchFamily="34" charset="-127"/>
+            </a:endParaRPr>
+          </a:p>
+        </p:txBody>
+      </p:sp>
+      <p:sp>
+        <p:nvSpPr>
+          <p:cNvPr id="15" name="TextBox 14">
+            <a:extLst>
+              <a:ext uri="{FF2B5EF4-FFF2-40B4-BE49-F238E27FC236}">
+                <a16:creationId xmlns:a16="http://schemas.microsoft.com/office/drawing/2014/main" xmlns="" id="{55105A21-BDA3-A05F-058F-200AA1B5FC2F}"/>
+              </a:ext>
+            </a:extLst>
+          </p:cNvPr>
+          <p:cNvSpPr txBox="1"/>
+          <p:nvPr/>
+        </p:nvSpPr>
+        <p:spPr>
+          <a:xfrm>
+            <a:off x="302450" y="2061985"/>
+            <a:ext cx="3444234" cy="276999"/>
+          </a:xfrm>
+          <a:prstGeom prst="rect">
+            <a:avLst/>
+          </a:prstGeom>
+          <a:noFill/>
+        </p:spPr>
+        <p:txBody>
+          <a:bodyPr wrap="square" rtlCol="0">
+            <a:spAutoFit/>
+          </a:bodyPr>
+          <a:lstStyle/>
+          <a:p>
+            <a:pPr algn="ctr"/>
+            <a:r>
+              <a:rPr lang="ko-KR" altLang="en-US" sz="1200" dirty="0" smtClean="0">
+                <a:latin typeface="나눔바른고딕" panose="020B0603020101020101" pitchFamily="34" charset="-127"/>
+                <a:ea typeface="나눔바른고딕" panose="020B0603020101020101" pitchFamily="34" charset="-127"/>
+              </a:rPr>
+              <a:t>특수 지형에 올라 선 상태</a:t>
+            </a:r>
+            <a:endParaRPr lang="en-US" altLang="ko-KR" sz="1200" dirty="0">
+              <a:latin typeface="나눔바른고딕" panose="020B0603020101020101" pitchFamily="34" charset="-127"/>
+              <a:ea typeface="나눔바른고딕" panose="020B0603020101020101" pitchFamily="34" charset="-127"/>
+            </a:endParaRPr>
+          </a:p>
+        </p:txBody>
+      </p:sp>
+      <p:sp>
+        <p:nvSpPr>
+          <p:cNvPr id="16" name="TextBox 15">
+            <a:extLst>
+              <a:ext uri="{FF2B5EF4-FFF2-40B4-BE49-F238E27FC236}">
+                <a16:creationId xmlns:a16="http://schemas.microsoft.com/office/drawing/2014/main" xmlns="" id="{55105A21-BDA3-A05F-058F-200AA1B5FC2F}"/>
+              </a:ext>
+            </a:extLst>
+          </p:cNvPr>
+          <p:cNvSpPr txBox="1"/>
+          <p:nvPr/>
+        </p:nvSpPr>
+        <p:spPr>
+          <a:xfrm>
+            <a:off x="4499363" y="2061985"/>
+            <a:ext cx="2914476" cy="276999"/>
+          </a:xfrm>
+          <a:prstGeom prst="rect">
+            <a:avLst/>
+          </a:prstGeom>
+          <a:noFill/>
+        </p:spPr>
+        <p:txBody>
+          <a:bodyPr wrap="square" rtlCol="0">
+            <a:spAutoFit/>
+          </a:bodyPr>
+          <a:lstStyle/>
+          <a:p>
+            <a:pPr algn="ctr"/>
+            <a:r>
+              <a:rPr lang="ko-KR" altLang="en-US" sz="1200" dirty="0">
+                <a:latin typeface="나눔바른고딕" panose="020B0603020101020101" pitchFamily="34" charset="-127"/>
+                <a:ea typeface="나눔바른고딕" panose="020B0603020101020101" pitchFamily="34" charset="-127"/>
+              </a:rPr>
+              <a:t>특수 지형에 올라 선 상태</a:t>
+            </a:r>
+            <a:endParaRPr lang="en-US" altLang="ko-KR" sz="1200" dirty="0">
+              <a:latin typeface="나눔바른고딕" panose="020B0603020101020101" pitchFamily="34" charset="-127"/>
+              <a:ea typeface="나눔바른고딕" panose="020B0603020101020101" pitchFamily="34" charset="-127"/>
+            </a:endParaRPr>
+          </a:p>
+        </p:txBody>
+      </p:sp>
+      <p:sp>
+        <p:nvSpPr>
+          <p:cNvPr id="19" name="TextBox 18">
+            <a:extLst>
+              <a:ext uri="{FF2B5EF4-FFF2-40B4-BE49-F238E27FC236}">
+                <a16:creationId xmlns:a16="http://schemas.microsoft.com/office/drawing/2014/main" xmlns="" id="{55105A21-BDA3-A05F-058F-200AA1B5FC2F}"/>
+              </a:ext>
+            </a:extLst>
+          </p:cNvPr>
+          <p:cNvSpPr txBox="1"/>
+          <p:nvPr/>
+        </p:nvSpPr>
+        <p:spPr>
+          <a:xfrm>
+            <a:off x="8696277" y="2061984"/>
+            <a:ext cx="2914476" cy="276999"/>
+          </a:xfrm>
+          <a:prstGeom prst="rect">
+            <a:avLst/>
+          </a:prstGeom>
+          <a:noFill/>
+        </p:spPr>
+        <p:txBody>
+          <a:bodyPr wrap="square" rtlCol="0">
+            <a:spAutoFit/>
+          </a:bodyPr>
+          <a:lstStyle/>
+          <a:p>
+            <a:pPr algn="ctr"/>
+            <a:r>
+              <a:rPr lang="ko-KR" altLang="en-US" sz="1200" dirty="0" smtClean="0">
+                <a:latin typeface="나눔바른고딕" panose="020B0603020101020101" pitchFamily="34" charset="-127"/>
+                <a:ea typeface="나눔바른고딕" panose="020B0603020101020101" pitchFamily="34" charset="-127"/>
+              </a:rPr>
+              <a:t>공중에서 떨어질 때</a:t>
+            </a:r>
+            <a:r>
+              <a:rPr lang="en-US" altLang="ko-KR" sz="1200" dirty="0" smtClean="0">
+                <a:latin typeface="나눔바른고딕" panose="020B0603020101020101" pitchFamily="34" charset="-127"/>
+                <a:ea typeface="나눔바른고딕" panose="020B0603020101020101" pitchFamily="34" charset="-127"/>
+              </a:rPr>
+              <a:t>, </a:t>
+            </a:r>
+            <a:r>
+              <a:rPr lang="ko-KR" altLang="en-US" sz="1200" dirty="0" smtClean="0">
+                <a:latin typeface="나눔바른고딕" panose="020B0603020101020101" pitchFamily="34" charset="-127"/>
+                <a:ea typeface="나눔바른고딕" panose="020B0603020101020101" pitchFamily="34" charset="-127"/>
+              </a:rPr>
+              <a:t>장애물 잡기</a:t>
+            </a:r>
+            <a:endParaRPr lang="en-US" altLang="ko-KR" sz="1200" dirty="0">
+              <a:latin typeface="나눔바른고딕" panose="020B0603020101020101" pitchFamily="34" charset="-127"/>
+              <a:ea typeface="나눔바른고딕" panose="020B0603020101020101" pitchFamily="34" charset="-127"/>
+            </a:endParaRPr>
+          </a:p>
+        </p:txBody>
+      </p:sp>
+      <p:sp>
+        <p:nvSpPr>
+          <p:cNvPr id="20" name="TextBox 19">
+            <a:extLst>
+              <a:ext uri="{FF2B5EF4-FFF2-40B4-BE49-F238E27FC236}">
+                <a16:creationId xmlns:a16="http://schemas.microsoft.com/office/drawing/2014/main" xmlns="" id="{55105A21-BDA3-A05F-058F-200AA1B5FC2F}"/>
+              </a:ext>
+            </a:extLst>
+          </p:cNvPr>
+          <p:cNvSpPr txBox="1"/>
+          <p:nvPr/>
+        </p:nvSpPr>
+        <p:spPr>
+          <a:xfrm>
+            <a:off x="6276852" y="4330860"/>
+            <a:ext cx="3444234" cy="276999"/>
+          </a:xfrm>
+          <a:prstGeom prst="rect">
+            <a:avLst/>
+          </a:prstGeom>
+          <a:noFill/>
+        </p:spPr>
+        <p:txBody>
+          <a:bodyPr wrap="square" rtlCol="0">
+            <a:spAutoFit/>
+          </a:bodyPr>
+          <a:lstStyle/>
+          <a:p>
+            <a:pPr algn="ctr"/>
+            <a:r>
+              <a:rPr lang="ko-KR" altLang="en-US" sz="1200" dirty="0" smtClean="0">
+                <a:latin typeface="나눔바른고딕" panose="020B0603020101020101" pitchFamily="34" charset="-127"/>
+                <a:ea typeface="나눔바른고딕" panose="020B0603020101020101" pitchFamily="34" charset="-127"/>
+              </a:rPr>
+              <a:t>벽면에서 특수 지형 전환 </a:t>
+            </a:r>
+            <a:r>
+              <a:rPr lang="en-US" altLang="ko-KR" sz="1200" dirty="0" smtClean="0">
+                <a:latin typeface="나눔바른고딕" panose="020B0603020101020101" pitchFamily="34" charset="-127"/>
+                <a:ea typeface="나눔바른고딕" panose="020B0603020101020101" pitchFamily="34" charset="-127"/>
+              </a:rPr>
+              <a:t>(</a:t>
+            </a:r>
+            <a:r>
+              <a:rPr lang="ko-KR" altLang="en-US" sz="1200" dirty="0" smtClean="0">
+                <a:latin typeface="나눔바른고딕" panose="020B0603020101020101" pitchFamily="34" charset="-127"/>
+                <a:ea typeface="나눔바른고딕" panose="020B0603020101020101" pitchFamily="34" charset="-127"/>
+              </a:rPr>
+              <a:t>진행 중</a:t>
+            </a:r>
+            <a:r>
+              <a:rPr lang="en-US" altLang="ko-KR" sz="1200" dirty="0" smtClean="0">
+                <a:latin typeface="나눔바른고딕" panose="020B0603020101020101" pitchFamily="34" charset="-127"/>
+                <a:ea typeface="나눔바른고딕" panose="020B0603020101020101" pitchFamily="34" charset="-127"/>
+              </a:rPr>
+              <a:t>)</a:t>
+            </a:r>
+            <a:endParaRPr lang="en-US" altLang="ko-KR" sz="1200" dirty="0">
+              <a:latin typeface="나눔바른고딕" panose="020B0603020101020101" pitchFamily="34" charset="-127"/>
+              <a:ea typeface="나눔바른고딕" panose="020B0603020101020101" pitchFamily="34" charset="-127"/>
+            </a:endParaRPr>
+          </a:p>
+        </p:txBody>
+      </p:sp>
+      <p:sp>
+        <p:nvSpPr>
+          <p:cNvPr id="21" name="TextBox 20">
+            <a:extLst>
+              <a:ext uri="{FF2B5EF4-FFF2-40B4-BE49-F238E27FC236}">
+                <a16:creationId xmlns:a16="http://schemas.microsoft.com/office/drawing/2014/main" xmlns="" id="{55105A21-BDA3-A05F-058F-200AA1B5FC2F}"/>
+              </a:ext>
+            </a:extLst>
+          </p:cNvPr>
+          <p:cNvSpPr txBox="1"/>
+          <p:nvPr/>
+        </p:nvSpPr>
+        <p:spPr>
+          <a:xfrm>
+            <a:off x="1617422" y="4330859"/>
+            <a:ext cx="3444234" cy="276999"/>
+          </a:xfrm>
+          <a:prstGeom prst="rect">
+            <a:avLst/>
+          </a:prstGeom>
+          <a:noFill/>
+        </p:spPr>
+        <p:txBody>
+          <a:bodyPr wrap="square" rtlCol="0">
+            <a:spAutoFit/>
+          </a:bodyPr>
+          <a:lstStyle/>
+          <a:p>
+            <a:pPr algn="ctr"/>
+            <a:r>
+              <a:rPr lang="ko-KR" altLang="en-US" sz="1200" dirty="0" smtClean="0">
+                <a:latin typeface="나눔바른고딕" panose="020B0603020101020101" pitchFamily="34" charset="-127"/>
+                <a:ea typeface="나눔바른고딕" panose="020B0603020101020101" pitchFamily="34" charset="-127"/>
+              </a:rPr>
+              <a:t>평지 </a:t>
+            </a:r>
+            <a:r>
+              <a:rPr lang="en-US" altLang="ko-KR" sz="1200" dirty="0" smtClean="0">
+                <a:latin typeface="나눔바른고딕" panose="020B0603020101020101" pitchFamily="34" charset="-127"/>
+                <a:ea typeface="나눔바른고딕" panose="020B0603020101020101" pitchFamily="34" charset="-127"/>
+              </a:rPr>
+              <a:t>&lt;-&gt; </a:t>
+            </a:r>
+            <a:r>
+              <a:rPr lang="ko-KR" altLang="en-US" sz="1200" dirty="0" smtClean="0">
+                <a:latin typeface="나눔바른고딕" panose="020B0603020101020101" pitchFamily="34" charset="-127"/>
+                <a:ea typeface="나눔바른고딕" panose="020B0603020101020101" pitchFamily="34" charset="-127"/>
+              </a:rPr>
+              <a:t>특수 지형 전환</a:t>
+            </a:r>
+            <a:endParaRPr lang="en-US" altLang="ko-KR" sz="1200" dirty="0">
+              <a:latin typeface="나눔바른고딕" panose="020B0603020101020101" pitchFamily="34" charset="-127"/>
+              <a:ea typeface="나눔바른고딕" panose="020B0603020101020101" pitchFamily="34" charset="-127"/>
+            </a:endParaRPr>
+          </a:p>
+        </p:txBody>
+      </p:sp>
+    </p:spTree>
+    <p:extLst>
+      <p:ext uri="{BB962C8B-B14F-4D97-AF65-F5344CB8AC3E}">
+        <p14:creationId xmlns:p14="http://schemas.microsoft.com/office/powerpoint/2010/main" val="3460213692"/>
+      </p:ext>
+    </p:extLst>
+  </p:cSld>
+  <p:clrMapOvr>
+    <a:masterClrMapping/>
+  </p:clrMapOvr>
+</p:sld>
+</file>
+
+<file path=ppt/slides/slide7.xml><?xml version="1.0" encoding="utf-8"?>
+<p:sld xmlns:a="http://schemas.openxmlformats.org/drawingml/2006/main" xmlns:r="http://schemas.openxmlformats.org/officeDocument/2006/relationships" xmlns:p="http://schemas.openxmlformats.org/presentationml/2006/main">
+  <p:cSld>
+    <p:spTree>
+      <p:nvGrpSpPr>
+        <p:cNvPr id="1" name="">
+          <a:extLst>
+            <a:ext uri="{FF2B5EF4-FFF2-40B4-BE49-F238E27FC236}">
+              <a16:creationId xmlns:a16="http://schemas.microsoft.com/office/drawing/2014/main" xmlns="" id="{960F3801-1345-73B1-BC4D-455683B38EDD}"/>
+            </a:ext>
+          </a:extLst>
+        </p:cNvPr>
+        <p:cNvGrpSpPr/>
+        <p:nvPr/>
+      </p:nvGrpSpPr>
+      <p:grpSpPr>
+        <a:xfrm>
+          <a:off x="0" y="0"/>
+          <a:ext cx="0" cy="0"/>
+          <a:chOff x="0" y="0"/>
+          <a:chExt cx="0" cy="0"/>
+        </a:xfrm>
+      </p:grpSpPr>
+      <p:sp>
+        <p:nvSpPr>
+          <p:cNvPr id="8" name="TextBox 7">
+            <a:extLst>
+              <a:ext uri="{FF2B5EF4-FFF2-40B4-BE49-F238E27FC236}">
+                <a16:creationId xmlns:a16="http://schemas.microsoft.com/office/drawing/2014/main" xmlns="" id="{953A2C19-7BB6-4B8F-B088-53F2041DCA07}"/>
+              </a:ext>
+            </a:extLst>
+          </p:cNvPr>
+          <p:cNvSpPr txBox="1"/>
+          <p:nvPr/>
+        </p:nvSpPr>
+        <p:spPr>
+          <a:xfrm>
+            <a:off x="302451" y="315453"/>
+            <a:ext cx="4944140" cy="369332"/>
+          </a:xfrm>
+          <a:prstGeom prst="rect">
+            <a:avLst/>
+          </a:prstGeom>
+          <a:noFill/>
+        </p:spPr>
+        <p:txBody>
+          <a:bodyPr wrap="square" rtlCol="0">
+            <a:spAutoFit/>
+          </a:bodyPr>
+          <a:lstStyle/>
+          <a:p>
+            <a:r>
+              <a:rPr lang="ko-KR" altLang="en-US" dirty="0">
+                <a:latin typeface="나눔바른고딕" panose="020B0603020101020101" pitchFamily="34" charset="-127"/>
+                <a:ea typeface="나눔바른고딕" panose="020B0603020101020101" pitchFamily="34" charset="-127"/>
+              </a:rPr>
+              <a:t>이번 주 작업 내역</a:t>
+            </a:r>
+            <a:endParaRPr lang="en-US" altLang="ko-KR" dirty="0">
+              <a:latin typeface="나눔바른고딕" panose="020B0603020101020101" pitchFamily="34" charset="-127"/>
+              <a:ea typeface="나눔바른고딕" panose="020B0603020101020101" pitchFamily="34" charset="-127"/>
+            </a:endParaRPr>
+          </a:p>
+        </p:txBody>
+      </p:sp>
+      <p:sp>
+        <p:nvSpPr>
+          <p:cNvPr id="6" name="직사각형 5"/>
+          <p:cNvSpPr/>
+          <p:nvPr/>
+        </p:nvSpPr>
+        <p:spPr>
+          <a:xfrm>
+            <a:off x="10443172" y="118011"/>
+            <a:ext cx="1596912" cy="246221"/>
+          </a:xfrm>
+          <a:prstGeom prst="rect">
+            <a:avLst/>
+          </a:prstGeom>
+        </p:spPr>
+        <p:txBody>
+          <a:bodyPr wrap="none">
+            <a:spAutoFit/>
+          </a:bodyPr>
+          <a:lstStyle/>
+          <a:p>
+            <a:r>
+              <a:rPr lang="ko-KR" altLang="en-US" sz="1000" dirty="0" err="1">
+                <a:solidFill>
+                  <a:schemeClr val="bg1">
+                    <a:lumMod val="75000"/>
+                  </a:schemeClr>
+                </a:solidFill>
+                <a:latin typeface="나눔바른고딕" panose="020B0603020101020101" pitchFamily="34" charset="-127"/>
+                <a:ea typeface="나눔바른고딕" panose="020B0603020101020101" pitchFamily="34" charset="-127"/>
+              </a:rPr>
+              <a:t>펄어비스</a:t>
+            </a:r>
+            <a:r>
+              <a:rPr lang="ko-KR" altLang="en-US" sz="1000" dirty="0">
+                <a:solidFill>
+                  <a:schemeClr val="bg1">
+                    <a:lumMod val="75000"/>
+                  </a:schemeClr>
+                </a:solidFill>
+                <a:latin typeface="나눔바른고딕" panose="020B0603020101020101" pitchFamily="34" charset="-127"/>
+                <a:ea typeface="나눔바른고딕" panose="020B0603020101020101" pitchFamily="34" charset="-127"/>
+              </a:rPr>
+              <a:t> </a:t>
+            </a:r>
+            <a:r>
+              <a:rPr lang="en-US" altLang="ko-KR" sz="1000" dirty="0">
+                <a:solidFill>
+                  <a:schemeClr val="bg1">
+                    <a:lumMod val="75000"/>
+                  </a:schemeClr>
+                </a:solidFill>
+                <a:latin typeface="나눔바른고딕" panose="020B0603020101020101" pitchFamily="34" charset="-127"/>
+                <a:ea typeface="나눔바른고딕" panose="020B0603020101020101" pitchFamily="34" charset="-127"/>
+              </a:rPr>
+              <a:t>2026 </a:t>
+            </a:r>
+            <a:r>
+              <a:rPr lang="ko-KR" altLang="en-US" sz="1000" dirty="0">
+                <a:solidFill>
+                  <a:schemeClr val="bg1">
+                    <a:lumMod val="75000"/>
+                  </a:schemeClr>
+                </a:solidFill>
+                <a:latin typeface="나눔바른고딕" panose="020B0603020101020101" pitchFamily="34" charset="-127"/>
+                <a:ea typeface="나눔바른고딕" panose="020B0603020101020101" pitchFamily="34" charset="-127"/>
+              </a:rPr>
+              <a:t>여름 </a:t>
+            </a:r>
+            <a:r>
+              <a:rPr lang="ko-KR" altLang="en-US" sz="1000" dirty="0" err="1">
+                <a:solidFill>
+                  <a:schemeClr val="bg1">
+                    <a:lumMod val="75000"/>
+                  </a:schemeClr>
+                </a:solidFill>
+                <a:latin typeface="나눔바른고딕" panose="020B0603020101020101" pitchFamily="34" charset="-127"/>
+                <a:ea typeface="나눔바른고딕" panose="020B0603020101020101" pitchFamily="34" charset="-127"/>
+              </a:rPr>
+              <a:t>인턴십</a:t>
+            </a:r>
+            <a:endParaRPr lang="ko-KR" altLang="en-US" sz="1000" dirty="0">
+              <a:solidFill>
+                <a:schemeClr val="bg1">
+                  <a:lumMod val="75000"/>
+                </a:schemeClr>
+              </a:solidFill>
+              <a:latin typeface="나눔바른고딕" panose="020B0603020101020101" pitchFamily="34" charset="-127"/>
+              <a:ea typeface="나눔바른고딕" panose="020B0603020101020101" pitchFamily="34" charset="-127"/>
+            </a:endParaRPr>
+          </a:p>
+        </p:txBody>
+      </p:sp>
+      <p:sp>
+        <p:nvSpPr>
+          <p:cNvPr id="7" name="TextBox 6">
+            <a:extLst>
+              <a:ext uri="{FF2B5EF4-FFF2-40B4-BE49-F238E27FC236}">
+                <a16:creationId xmlns:a16="http://schemas.microsoft.com/office/drawing/2014/main" xmlns="" id="{2D538815-CBEF-E37B-5659-B5091F86B485}"/>
+              </a:ext>
+            </a:extLst>
+          </p:cNvPr>
+          <p:cNvSpPr txBox="1"/>
+          <p:nvPr/>
+        </p:nvSpPr>
+        <p:spPr>
+          <a:xfrm>
+            <a:off x="302450" y="1003762"/>
+            <a:ext cx="2694247" cy="338554"/>
+          </a:xfrm>
+          <a:prstGeom prst="rect">
+            <a:avLst/>
+          </a:prstGeom>
+          <a:noFill/>
+        </p:spPr>
+        <p:txBody>
+          <a:bodyPr wrap="square" rtlCol="0">
+            <a:spAutoFit/>
+          </a:bodyPr>
+          <a:lstStyle/>
+          <a:p>
+            <a:r>
+              <a:rPr lang="ko-KR" altLang="en-US" sz="1600" dirty="0">
+                <a:latin typeface="나눔바른고딕" panose="020B0603020101020101" pitchFamily="34" charset="-127"/>
+                <a:ea typeface="나눔바른고딕" panose="020B0603020101020101" pitchFamily="34" charset="-127"/>
+              </a:rPr>
+              <a:t>루트모션 보정</a:t>
+            </a:r>
+            <a:r>
+              <a:rPr lang="en-US" altLang="ko-KR" sz="1600" dirty="0" smtClean="0">
+                <a:latin typeface="나눔바른고딕" panose="020B0603020101020101" pitchFamily="34" charset="-127"/>
+                <a:ea typeface="나눔바른고딕" panose="020B0603020101020101" pitchFamily="34" charset="-127"/>
+              </a:rPr>
+              <a:t>2</a:t>
+            </a:r>
+            <a:endParaRPr lang="en-US" altLang="ko-KR" sz="1600" dirty="0">
+              <a:latin typeface="나눔바른고딕" panose="020B0603020101020101" pitchFamily="34" charset="-127"/>
+              <a:ea typeface="나눔바른고딕" panose="020B0603020101020101" pitchFamily="34" charset="-127"/>
+            </a:endParaRPr>
+          </a:p>
+        </p:txBody>
+      </p:sp>
+      <p:sp>
+        <p:nvSpPr>
+          <p:cNvPr id="11" name="TextBox 10">
+            <a:extLst>
+              <a:ext uri="{FF2B5EF4-FFF2-40B4-BE49-F238E27FC236}">
+                <a16:creationId xmlns:a16="http://schemas.microsoft.com/office/drawing/2014/main" xmlns="" id="{2D538815-CBEF-E37B-5659-B5091F86B485}"/>
+              </a:ext>
+            </a:extLst>
+          </p:cNvPr>
+          <p:cNvSpPr txBox="1"/>
+          <p:nvPr/>
+        </p:nvSpPr>
+        <p:spPr>
+          <a:xfrm>
+            <a:off x="302450" y="1342316"/>
+            <a:ext cx="5310950" cy="276999"/>
+          </a:xfrm>
+          <a:prstGeom prst="rect">
+            <a:avLst/>
+          </a:prstGeom>
+          <a:noFill/>
+        </p:spPr>
+        <p:txBody>
+          <a:bodyPr wrap="square" rtlCol="0">
+            <a:spAutoFit/>
+          </a:bodyPr>
+          <a:lstStyle/>
+          <a:p>
+            <a:r>
+              <a:rPr lang="ko-KR" altLang="en-US" sz="1200" dirty="0">
+                <a:latin typeface="나눔바른고딕" panose="020B0603020101020101" pitchFamily="34" charset="-127"/>
+                <a:ea typeface="나눔바른고딕" panose="020B0603020101020101" pitchFamily="34" charset="-127"/>
+              </a:rPr>
+              <a:t>디테일 문제</a:t>
+            </a:r>
+          </a:p>
+        </p:txBody>
+      </p:sp>
+      <p:cxnSp>
+        <p:nvCxnSpPr>
+          <p:cNvPr id="12" name="직선 연결선 11">
+            <a:extLst>
+              <a:ext uri="{FF2B5EF4-FFF2-40B4-BE49-F238E27FC236}">
+                <a16:creationId xmlns:a16="http://schemas.microsoft.com/office/drawing/2014/main" xmlns="" id="{76FFFECF-4B1C-95DF-32C3-2D2F19BEDAFB}"/>
+              </a:ext>
+            </a:extLst>
+          </p:cNvPr>
+          <p:cNvCxnSpPr>
+            <a:cxnSpLocks/>
+          </p:cNvCxnSpPr>
+          <p:nvPr/>
+        </p:nvCxnSpPr>
+        <p:spPr>
+          <a:xfrm>
+            <a:off x="387511" y="818707"/>
+            <a:ext cx="11308303" cy="0"/>
+          </a:xfrm>
+          <a:prstGeom prst="line">
+            <a:avLst/>
+          </a:prstGeom>
+          <a:ln>
+            <a:solidFill>
+              <a:schemeClr val="tx2"/>
+            </a:solidFill>
+          </a:ln>
+        </p:spPr>
+        <p:style>
+          <a:lnRef idx="2">
+            <a:schemeClr val="accent1"/>
+          </a:lnRef>
+          <a:fillRef idx="0">
+            <a:schemeClr val="accent1"/>
+          </a:fillRef>
+          <a:effectRef idx="1">
+            <a:schemeClr val="accent1"/>
+          </a:effectRef>
+          <a:fontRef idx="minor">
+            <a:schemeClr val="tx1"/>
+          </a:fontRef>
+        </p:style>
+      </p:cxnSp>
+      <p:sp>
+        <p:nvSpPr>
+          <p:cNvPr id="13" name="TextBox 12">
+            <a:extLst>
+              <a:ext uri="{FF2B5EF4-FFF2-40B4-BE49-F238E27FC236}">
+                <a16:creationId xmlns:a16="http://schemas.microsoft.com/office/drawing/2014/main" xmlns="" id="{2D538815-CBEF-E37B-5659-B5091F86B485}"/>
+              </a:ext>
+            </a:extLst>
+          </p:cNvPr>
+          <p:cNvSpPr txBox="1"/>
+          <p:nvPr/>
+        </p:nvSpPr>
+        <p:spPr>
+          <a:xfrm>
+            <a:off x="302450" y="2899312"/>
+            <a:ext cx="5310950" cy="461665"/>
+          </a:xfrm>
+          <a:prstGeom prst="rect">
+            <a:avLst/>
+          </a:prstGeom>
+          <a:noFill/>
+        </p:spPr>
+        <p:txBody>
+          <a:bodyPr wrap="square" rtlCol="0">
+            <a:spAutoFit/>
+          </a:bodyPr>
+          <a:lstStyle/>
+          <a:p>
+            <a:r>
+              <a:rPr lang="ko-KR" altLang="en-US" sz="1200" dirty="0" smtClean="0">
+                <a:latin typeface="나눔바른고딕" panose="020B0603020101020101" pitchFamily="34" charset="-127"/>
+                <a:ea typeface="나눔바른고딕" panose="020B0603020101020101" pitchFamily="34" charset="-127"/>
+              </a:rPr>
+              <a:t>지형이 </a:t>
+            </a:r>
+            <a:r>
+              <a:rPr lang="ko-KR" altLang="en-US" sz="1200" dirty="0">
+                <a:latin typeface="나눔바른고딕" panose="020B0603020101020101" pitchFamily="34" charset="-127"/>
+                <a:ea typeface="나눔바른고딕" panose="020B0603020101020101" pitchFamily="34" charset="-127"/>
+              </a:rPr>
+              <a:t>작아지면서 </a:t>
+            </a:r>
+            <a:r>
+              <a:rPr lang="ko-KR" altLang="en-US" sz="1200" dirty="0" smtClean="0">
+                <a:latin typeface="나눔바른고딕" panose="020B0603020101020101" pitchFamily="34" charset="-127"/>
+                <a:ea typeface="나눔바른고딕" panose="020B0603020101020101" pitchFamily="34" charset="-127"/>
+              </a:rPr>
+              <a:t>더 정확한 이동이 보장되어야 함</a:t>
+            </a:r>
+            <a:endParaRPr lang="en-US" altLang="ko-KR" sz="1200" dirty="0" smtClean="0">
+              <a:latin typeface="나눔바른고딕" panose="020B0603020101020101" pitchFamily="34" charset="-127"/>
+              <a:ea typeface="나눔바른고딕" panose="020B0603020101020101" pitchFamily="34" charset="-127"/>
+            </a:endParaRPr>
+          </a:p>
+          <a:p>
+            <a:r>
+              <a:rPr lang="ko-KR" altLang="en-US" sz="1200" dirty="0" smtClean="0">
+                <a:latin typeface="나눔바른고딕" panose="020B0603020101020101" pitchFamily="34" charset="-127"/>
+                <a:ea typeface="나눔바른고딕" panose="020B0603020101020101" pitchFamily="34" charset="-127"/>
+              </a:rPr>
+              <a:t>이를 위해서 기존 루트모션 보정 기능에 베지어 곡선을 활용하도록 구현</a:t>
+            </a:r>
+            <a:endParaRPr lang="en-US" altLang="ko-KR" sz="1200" dirty="0" smtClean="0">
+              <a:latin typeface="나눔바른고딕" panose="020B0603020101020101" pitchFamily="34" charset="-127"/>
+              <a:ea typeface="나눔바른고딕" panose="020B0603020101020101" pitchFamily="34" charset="-127"/>
+            </a:endParaRPr>
+          </a:p>
+        </p:txBody>
+      </p:sp>
+      <p:sp>
+        <p:nvSpPr>
+          <p:cNvPr id="14" name="TextBox 13">
+            <a:extLst>
+              <a:ext uri="{FF2B5EF4-FFF2-40B4-BE49-F238E27FC236}">
+                <a16:creationId xmlns:a16="http://schemas.microsoft.com/office/drawing/2014/main" xmlns="" id="{2D538815-CBEF-E37B-5659-B5091F86B485}"/>
+              </a:ext>
+            </a:extLst>
+          </p:cNvPr>
+          <p:cNvSpPr txBox="1"/>
+          <p:nvPr/>
+        </p:nvSpPr>
+        <p:spPr>
+          <a:xfrm>
+            <a:off x="302450" y="1661293"/>
+            <a:ext cx="5310950" cy="1015663"/>
+          </a:xfrm>
+          <a:prstGeom prst="rect">
+            <a:avLst/>
+          </a:prstGeom>
+          <a:noFill/>
+        </p:spPr>
+        <p:txBody>
+          <a:bodyPr wrap="square" rtlCol="0">
+            <a:spAutoFit/>
+          </a:bodyPr>
+          <a:lstStyle/>
+          <a:p>
+            <a:r>
+              <a:rPr lang="ko-KR" altLang="en-US" sz="1200" dirty="0" smtClean="0">
+                <a:latin typeface="나눔바른고딕" panose="020B0603020101020101" pitchFamily="34" charset="-127"/>
+                <a:ea typeface="나눔바른고딕" panose="020B0603020101020101" pitchFamily="34" charset="-127"/>
+              </a:rPr>
+              <a:t>루트모션의 특징</a:t>
+            </a:r>
+            <a:endParaRPr lang="en-US" altLang="ko-KR" sz="1200" dirty="0" smtClean="0">
+              <a:latin typeface="나눔바른고딕" panose="020B0603020101020101" pitchFamily="34" charset="-127"/>
+              <a:ea typeface="나눔바른고딕" panose="020B0603020101020101" pitchFamily="34" charset="-127"/>
+            </a:endParaRPr>
+          </a:p>
+          <a:p>
+            <a:pPr marL="171450" indent="-171450">
+              <a:buFont typeface="Arial" panose="020B0604020202020204" pitchFamily="34" charset="0"/>
+              <a:buChar char="•"/>
+            </a:pPr>
+            <a:r>
+              <a:rPr lang="ko-KR" altLang="en-US" sz="1200" dirty="0" smtClean="0">
+                <a:latin typeface="나눔바른고딕" panose="020B0603020101020101" pitchFamily="34" charset="-127"/>
+                <a:ea typeface="나눔바른고딕" panose="020B0603020101020101" pitchFamily="34" charset="-127"/>
+              </a:rPr>
+              <a:t>장점 </a:t>
+            </a:r>
+            <a:r>
+              <a:rPr lang="en-US" altLang="ko-KR" sz="1200" dirty="0" smtClean="0">
+                <a:latin typeface="나눔바른고딕" panose="020B0603020101020101" pitchFamily="34" charset="-127"/>
+                <a:ea typeface="나눔바른고딕" panose="020B0603020101020101" pitchFamily="34" charset="-127"/>
+              </a:rPr>
+              <a:t>: </a:t>
+            </a:r>
+            <a:r>
+              <a:rPr lang="ko-KR" altLang="en-US" sz="1200" dirty="0" smtClean="0">
+                <a:latin typeface="나눔바른고딕" panose="020B0603020101020101" pitchFamily="34" charset="-127"/>
+                <a:ea typeface="나눔바른고딕" panose="020B0603020101020101" pitchFamily="34" charset="-127"/>
+              </a:rPr>
+              <a:t>애니메이션에 맞는 정확한 움직임 구현</a:t>
+            </a:r>
+            <a:endParaRPr lang="en-US" altLang="ko-KR" sz="1200" dirty="0" smtClean="0">
+              <a:latin typeface="나눔바른고딕" panose="020B0603020101020101" pitchFamily="34" charset="-127"/>
+              <a:ea typeface="나눔바른고딕" panose="020B0603020101020101" pitchFamily="34" charset="-127"/>
+            </a:endParaRPr>
+          </a:p>
+          <a:p>
+            <a:pPr marL="171450" indent="-171450">
+              <a:buFont typeface="Arial" panose="020B0604020202020204" pitchFamily="34" charset="0"/>
+              <a:buChar char="•"/>
+            </a:pPr>
+            <a:r>
+              <a:rPr lang="ko-KR" altLang="en-US" sz="1200" dirty="0" smtClean="0">
+                <a:latin typeface="나눔바른고딕" panose="020B0603020101020101" pitchFamily="34" charset="-127"/>
+                <a:ea typeface="나눔바른고딕" panose="020B0603020101020101" pitchFamily="34" charset="-127"/>
+              </a:rPr>
+              <a:t>단점</a:t>
+            </a:r>
+            <a:r>
+              <a:rPr lang="en-US" altLang="ko-KR" sz="1200" dirty="0">
+                <a:latin typeface="나눔바른고딕" panose="020B0603020101020101" pitchFamily="34" charset="-127"/>
+                <a:ea typeface="나눔바른고딕" panose="020B0603020101020101" pitchFamily="34" charset="-127"/>
+              </a:rPr>
+              <a:t> </a:t>
+            </a:r>
+            <a:r>
+              <a:rPr lang="en-US" altLang="ko-KR" sz="1200" dirty="0" smtClean="0">
+                <a:latin typeface="나눔바른고딕" panose="020B0603020101020101" pitchFamily="34" charset="-127"/>
+                <a:ea typeface="나눔바른고딕" panose="020B0603020101020101" pitchFamily="34" charset="-127"/>
+              </a:rPr>
+              <a:t>: </a:t>
+            </a:r>
+            <a:r>
+              <a:rPr lang="ko-KR" altLang="en-US" sz="1200" dirty="0" smtClean="0">
+                <a:latin typeface="나눔바른고딕" panose="020B0603020101020101" pitchFamily="34" charset="-127"/>
+                <a:ea typeface="나눔바른고딕" panose="020B0603020101020101" pitchFamily="34" charset="-127"/>
+              </a:rPr>
+              <a:t>모션의 범위가 큰 경우 쓰기가 까다로움 </a:t>
+            </a:r>
+            <a:r>
+              <a:rPr lang="en-US" altLang="ko-KR" sz="1200" dirty="0" smtClean="0">
+                <a:latin typeface="나눔바른고딕" panose="020B0603020101020101" pitchFamily="34" charset="-127"/>
+                <a:ea typeface="나눔바른고딕" panose="020B0603020101020101" pitchFamily="34" charset="-127"/>
+              </a:rPr>
+              <a:t>(</a:t>
+            </a:r>
+            <a:r>
+              <a:rPr lang="ko-KR" altLang="en-US" sz="1200" dirty="0" smtClean="0">
+                <a:latin typeface="나눔바른고딕" panose="020B0603020101020101" pitchFamily="34" charset="-127"/>
+                <a:ea typeface="나눔바른고딕" panose="020B0603020101020101" pitchFamily="34" charset="-127"/>
+              </a:rPr>
+              <a:t>보정이 불가피</a:t>
+            </a:r>
+            <a:r>
+              <a:rPr lang="en-US" altLang="ko-KR" sz="1200" dirty="0" smtClean="0">
+                <a:latin typeface="나눔바른고딕" panose="020B0603020101020101" pitchFamily="34" charset="-127"/>
+                <a:ea typeface="나눔바른고딕" panose="020B0603020101020101" pitchFamily="34" charset="-127"/>
+              </a:rPr>
+              <a:t>)</a:t>
+            </a:r>
+          </a:p>
+          <a:p>
+            <a:pPr marL="628650" lvl="1" indent="-171450">
+              <a:buFont typeface="Arial" panose="020B0604020202020204" pitchFamily="34" charset="0"/>
+              <a:buChar char="•"/>
+            </a:pPr>
+            <a:r>
+              <a:rPr lang="ko-KR" altLang="en-US" sz="1200" dirty="0" err="1" smtClean="0">
+                <a:latin typeface="나눔바른고딕" panose="020B0603020101020101" pitchFamily="34" charset="-127"/>
+                <a:ea typeface="나눔바른고딕" panose="020B0603020101020101" pitchFamily="34" charset="-127"/>
+              </a:rPr>
+              <a:t>디테일하게</a:t>
+            </a:r>
+            <a:r>
+              <a:rPr lang="ko-KR" altLang="en-US" sz="1200" dirty="0" smtClean="0">
+                <a:latin typeface="나눔바른고딕" panose="020B0603020101020101" pitchFamily="34" charset="-127"/>
+                <a:ea typeface="나눔바른고딕" panose="020B0603020101020101" pitchFamily="34" charset="-127"/>
+              </a:rPr>
+              <a:t> 오브젝트에 닿도록 하기 위한 보정이 필요</a:t>
+            </a:r>
+            <a:endParaRPr lang="en-US" altLang="ko-KR" sz="1200" dirty="0" smtClean="0">
+              <a:latin typeface="나눔바른고딕" panose="020B0603020101020101" pitchFamily="34" charset="-127"/>
+              <a:ea typeface="나눔바른고딕" panose="020B0603020101020101" pitchFamily="34" charset="-127"/>
+            </a:endParaRPr>
+          </a:p>
+          <a:p>
+            <a:pPr marL="628650" lvl="1" indent="-171450">
+              <a:buFont typeface="Arial" panose="020B0604020202020204" pitchFamily="34" charset="0"/>
+              <a:buChar char="•"/>
+            </a:pPr>
+            <a:r>
+              <a:rPr lang="ko-KR" altLang="en-US" sz="1200" dirty="0" smtClean="0">
+                <a:latin typeface="나눔바른고딕" panose="020B0603020101020101" pitchFamily="34" charset="-127"/>
+                <a:ea typeface="나눔바른고딕" panose="020B0603020101020101" pitchFamily="34" charset="-127"/>
+              </a:rPr>
+              <a:t>하지만</a:t>
+            </a:r>
+            <a:r>
+              <a:rPr lang="en-US" altLang="ko-KR" sz="1200" dirty="0" smtClean="0">
+                <a:latin typeface="나눔바른고딕" panose="020B0603020101020101" pitchFamily="34" charset="-127"/>
+                <a:ea typeface="나눔바른고딕" panose="020B0603020101020101" pitchFamily="34" charset="-127"/>
+              </a:rPr>
+              <a:t>, </a:t>
+            </a:r>
+            <a:r>
+              <a:rPr lang="ko-KR" altLang="en-US" sz="1200" dirty="0" smtClean="0">
+                <a:latin typeface="나눔바른고딕" panose="020B0603020101020101" pitchFamily="34" charset="-127"/>
+                <a:ea typeface="나눔바른고딕" panose="020B0603020101020101" pitchFamily="34" charset="-127"/>
+              </a:rPr>
+              <a:t>모션의 움직이는 범위가 크면 클 수록 보정할 거리가 커짐</a:t>
+            </a:r>
+            <a:endParaRPr lang="en-US" altLang="ko-KR" sz="1200" dirty="0" smtClean="0">
+              <a:latin typeface="나눔바른고딕" panose="020B0603020101020101" pitchFamily="34" charset="-127"/>
+              <a:ea typeface="나눔바른고딕" panose="020B0603020101020101" pitchFamily="34" charset="-127"/>
+            </a:endParaRPr>
+          </a:p>
+        </p:txBody>
+      </p:sp>
+      <p:sp>
+        <p:nvSpPr>
+          <p:cNvPr id="17" name="TextBox 16">
+            <a:extLst>
+              <a:ext uri="{FF2B5EF4-FFF2-40B4-BE49-F238E27FC236}">
+                <a16:creationId xmlns:a16="http://schemas.microsoft.com/office/drawing/2014/main" xmlns="" id="{2D538815-CBEF-E37B-5659-B5091F86B485}"/>
+              </a:ext>
+            </a:extLst>
+          </p:cNvPr>
+          <p:cNvSpPr txBox="1"/>
+          <p:nvPr/>
+        </p:nvSpPr>
+        <p:spPr>
+          <a:xfrm>
+            <a:off x="7962033" y="5096269"/>
+            <a:ext cx="5310950" cy="276999"/>
+          </a:xfrm>
+          <a:prstGeom prst="rect">
+            <a:avLst/>
+          </a:prstGeom>
+          <a:noFill/>
+        </p:spPr>
+        <p:txBody>
+          <a:bodyPr wrap="square" rtlCol="0">
+            <a:spAutoFit/>
+          </a:bodyPr>
+          <a:lstStyle/>
+          <a:p>
+            <a:r>
+              <a:rPr lang="ko-KR" altLang="en-US" sz="1200" dirty="0" smtClean="0">
+                <a:latin typeface="나눔바른고딕" panose="020B0603020101020101" pitchFamily="34" charset="-127"/>
+                <a:ea typeface="나눔바른고딕" panose="020B0603020101020101" pitchFamily="34" charset="-127"/>
+              </a:rPr>
+              <a:t>지형 인식 결과로 도달해야 할 목표점을 알고 있음</a:t>
+            </a:r>
+            <a:endParaRPr lang="en-US" altLang="ko-KR" sz="1200" dirty="0" smtClean="0">
+              <a:latin typeface="나눔바른고딕" panose="020B0603020101020101" pitchFamily="34" charset="-127"/>
+              <a:ea typeface="나눔바른고딕" panose="020B0603020101020101" pitchFamily="34" charset="-127"/>
+            </a:endParaRPr>
+          </a:p>
+        </p:txBody>
+      </p:sp>
+      <p:sp>
+        <p:nvSpPr>
+          <p:cNvPr id="19" name="직사각형 18"/>
+          <p:cNvSpPr/>
+          <p:nvPr/>
+        </p:nvSpPr>
+        <p:spPr>
+          <a:xfrm>
+            <a:off x="3633946" y="3813127"/>
+            <a:ext cx="3958908" cy="2257252"/>
+          </a:xfrm>
+          <a:prstGeom prst="rect">
+            <a:avLst/>
+          </a:prstGeom>
+        </p:spPr>
+        <p:style>
+          <a:lnRef idx="2">
+            <a:schemeClr val="accent1">
+              <a:shade val="50000"/>
+            </a:schemeClr>
+          </a:lnRef>
+          <a:fillRef idx="1">
+            <a:schemeClr val="accent1"/>
+          </a:fillRef>
+          <a:effectRef idx="0">
+            <a:schemeClr val="accent1"/>
+          </a:effectRef>
+          <a:fontRef idx="minor">
+            <a:schemeClr val="lt1"/>
+          </a:fontRef>
+        </p:style>
+        <p:txBody>
+          <a:bodyPr rtlCol="0" anchor="ctr"/>
+          <a:lstStyle/>
+          <a:p>
+            <a:pPr algn="ctr"/>
+            <a:r>
+              <a:rPr lang="ko-KR" altLang="en-US" dirty="0">
+                <a:latin typeface="나눔바른고딕" panose="020B0603020101020101" pitchFamily="34" charset="-127"/>
+                <a:ea typeface="나눔바른고딕" panose="020B0603020101020101" pitchFamily="34" charset="-127"/>
+              </a:rPr>
+              <a:t>베지어 곡선 적용 예상도</a:t>
+            </a:r>
+            <a:endParaRPr lang="en-US" altLang="ko-KR" dirty="0">
+              <a:latin typeface="나눔바른고딕" panose="020B0603020101020101" pitchFamily="34" charset="-127"/>
+              <a:ea typeface="나눔바른고딕" panose="020B0603020101020101" pitchFamily="34" charset="-127"/>
+            </a:endParaRPr>
+          </a:p>
+        </p:txBody>
+      </p:sp>
+    </p:spTree>
+    <p:extLst>
+      <p:ext uri="{BB962C8B-B14F-4D97-AF65-F5344CB8AC3E}">
+        <p14:creationId xmlns:p14="http://schemas.microsoft.com/office/powerpoint/2010/main" val="756431288"/>
+      </p:ext>
+    </p:extLst>
+  </p:cSld>
+  <p:clrMapOvr>
+    <a:masterClrMapping/>
+  </p:clrMapOvr>
+</p:sld>
+</file>
+
+<file path=ppt/slides/slide8.xml><?xml version="1.0" encoding="utf-8"?>
+<p:sld xmlns:a="http://schemas.openxmlformats.org/drawingml/2006/main" xmlns:r="http://schemas.openxmlformats.org/officeDocument/2006/relationships" xmlns:p="http://schemas.openxmlformats.org/presentationml/2006/main">
+  <p:cSld>
+    <p:spTree>
+      <p:nvGrpSpPr>
+        <p:cNvPr id="1" name="">
+          <a:extLst>
+            <a:ext uri="{FF2B5EF4-FFF2-40B4-BE49-F238E27FC236}">
+              <a16:creationId xmlns:a16="http://schemas.microsoft.com/office/drawing/2014/main" xmlns="" id="{960F3801-1345-73B1-BC4D-455683B38EDD}"/>
+            </a:ext>
+          </a:extLst>
+        </p:cNvPr>
+        <p:cNvGrpSpPr/>
+        <p:nvPr/>
+      </p:nvGrpSpPr>
+      <p:grpSpPr>
+        <a:xfrm>
+          <a:off x="0" y="0"/>
+          <a:ext cx="0" cy="0"/>
+          <a:chOff x="0" y="0"/>
+          <a:chExt cx="0" cy="0"/>
+        </a:xfrm>
+      </p:grpSpPr>
+      <p:sp>
+        <p:nvSpPr>
+          <p:cNvPr id="8" name="TextBox 7">
+            <a:extLst>
+              <a:ext uri="{FF2B5EF4-FFF2-40B4-BE49-F238E27FC236}">
+                <a16:creationId xmlns:a16="http://schemas.microsoft.com/office/drawing/2014/main" xmlns="" id="{953A2C19-7BB6-4B8F-B088-53F2041DCA07}"/>
+              </a:ext>
+            </a:extLst>
+          </p:cNvPr>
+          <p:cNvSpPr txBox="1"/>
+          <p:nvPr/>
+        </p:nvSpPr>
+        <p:spPr>
+          <a:xfrm>
+            <a:off x="302451" y="315453"/>
+            <a:ext cx="4944140" cy="369332"/>
+          </a:xfrm>
+          <a:prstGeom prst="rect">
+            <a:avLst/>
+          </a:prstGeom>
+          <a:noFill/>
+        </p:spPr>
+        <p:txBody>
+          <a:bodyPr wrap="square" rtlCol="0">
+            <a:spAutoFit/>
+          </a:bodyPr>
+          <a:lstStyle/>
+          <a:p>
+            <a:r>
+              <a:rPr lang="ko-KR" altLang="en-US" dirty="0">
+                <a:latin typeface="나눔바른고딕" panose="020B0603020101020101" pitchFamily="34" charset="-127"/>
+                <a:ea typeface="나눔바른고딕" panose="020B0603020101020101" pitchFamily="34" charset="-127"/>
+              </a:rPr>
+              <a:t>이번 주 작업 내역</a:t>
+            </a:r>
+            <a:endParaRPr lang="en-US" altLang="ko-KR" dirty="0">
+              <a:latin typeface="나눔바른고딕" panose="020B0603020101020101" pitchFamily="34" charset="-127"/>
+              <a:ea typeface="나눔바른고딕" panose="020B0603020101020101" pitchFamily="34" charset="-127"/>
+            </a:endParaRPr>
+          </a:p>
+        </p:txBody>
+      </p:sp>
+      <p:sp>
+        <p:nvSpPr>
+          <p:cNvPr id="6" name="직사각형 5"/>
+          <p:cNvSpPr/>
+          <p:nvPr/>
+        </p:nvSpPr>
+        <p:spPr>
+          <a:xfrm>
+            <a:off x="10443172" y="118011"/>
+            <a:ext cx="1596912" cy="246221"/>
+          </a:xfrm>
+          <a:prstGeom prst="rect">
+            <a:avLst/>
+          </a:prstGeom>
+        </p:spPr>
+        <p:txBody>
+          <a:bodyPr wrap="none">
+            <a:spAutoFit/>
+          </a:bodyPr>
+          <a:lstStyle/>
+          <a:p>
+            <a:r>
+              <a:rPr lang="ko-KR" altLang="en-US" sz="1000" dirty="0" err="1">
+                <a:solidFill>
+                  <a:schemeClr val="bg1">
+                    <a:lumMod val="75000"/>
+                  </a:schemeClr>
+                </a:solidFill>
+                <a:latin typeface="나눔바른고딕" panose="020B0603020101020101" pitchFamily="34" charset="-127"/>
+                <a:ea typeface="나눔바른고딕" panose="020B0603020101020101" pitchFamily="34" charset="-127"/>
+              </a:rPr>
+              <a:t>펄어비스</a:t>
+            </a:r>
+            <a:r>
+              <a:rPr lang="ko-KR" altLang="en-US" sz="1000" dirty="0">
+                <a:solidFill>
+                  <a:schemeClr val="bg1">
+                    <a:lumMod val="75000"/>
+                  </a:schemeClr>
+                </a:solidFill>
+                <a:latin typeface="나눔바른고딕" panose="020B0603020101020101" pitchFamily="34" charset="-127"/>
+                <a:ea typeface="나눔바른고딕" panose="020B0603020101020101" pitchFamily="34" charset="-127"/>
+              </a:rPr>
+              <a:t> </a:t>
+            </a:r>
+            <a:r>
+              <a:rPr lang="en-US" altLang="ko-KR" sz="1000" dirty="0">
+                <a:solidFill>
+                  <a:schemeClr val="bg1">
+                    <a:lumMod val="75000"/>
+                  </a:schemeClr>
+                </a:solidFill>
+                <a:latin typeface="나눔바른고딕" panose="020B0603020101020101" pitchFamily="34" charset="-127"/>
+                <a:ea typeface="나눔바른고딕" panose="020B0603020101020101" pitchFamily="34" charset="-127"/>
+              </a:rPr>
+              <a:t>2026 </a:t>
+            </a:r>
+            <a:r>
+              <a:rPr lang="ko-KR" altLang="en-US" sz="1000" dirty="0">
+                <a:solidFill>
+                  <a:schemeClr val="bg1">
+                    <a:lumMod val="75000"/>
+                  </a:schemeClr>
+                </a:solidFill>
+                <a:latin typeface="나눔바른고딕" panose="020B0603020101020101" pitchFamily="34" charset="-127"/>
+                <a:ea typeface="나눔바른고딕" panose="020B0603020101020101" pitchFamily="34" charset="-127"/>
+              </a:rPr>
+              <a:t>여름 </a:t>
+            </a:r>
+            <a:r>
+              <a:rPr lang="ko-KR" altLang="en-US" sz="1000" dirty="0" err="1">
+                <a:solidFill>
+                  <a:schemeClr val="bg1">
+                    <a:lumMod val="75000"/>
+                  </a:schemeClr>
+                </a:solidFill>
+                <a:latin typeface="나눔바른고딕" panose="020B0603020101020101" pitchFamily="34" charset="-127"/>
+                <a:ea typeface="나눔바른고딕" panose="020B0603020101020101" pitchFamily="34" charset="-127"/>
+              </a:rPr>
+              <a:t>인턴십</a:t>
+            </a:r>
+            <a:endParaRPr lang="ko-KR" altLang="en-US" sz="1000" dirty="0">
+              <a:solidFill>
+                <a:schemeClr val="bg1">
+                  <a:lumMod val="75000"/>
+                </a:schemeClr>
+              </a:solidFill>
+              <a:latin typeface="나눔바른고딕" panose="020B0603020101020101" pitchFamily="34" charset="-127"/>
+              <a:ea typeface="나눔바른고딕" panose="020B0603020101020101" pitchFamily="34" charset="-127"/>
+            </a:endParaRPr>
+          </a:p>
+        </p:txBody>
+      </p:sp>
+      <p:sp>
+        <p:nvSpPr>
+          <p:cNvPr id="7" name="TextBox 6">
+            <a:extLst>
+              <a:ext uri="{FF2B5EF4-FFF2-40B4-BE49-F238E27FC236}">
+                <a16:creationId xmlns:a16="http://schemas.microsoft.com/office/drawing/2014/main" xmlns="" id="{2D538815-CBEF-E37B-5659-B5091F86B485}"/>
+              </a:ext>
+            </a:extLst>
+          </p:cNvPr>
+          <p:cNvSpPr txBox="1"/>
+          <p:nvPr/>
+        </p:nvSpPr>
+        <p:spPr>
+          <a:xfrm>
+            <a:off x="302450" y="1003762"/>
+            <a:ext cx="2694247" cy="338554"/>
+          </a:xfrm>
+          <a:prstGeom prst="rect">
+            <a:avLst/>
+          </a:prstGeom>
+          <a:noFill/>
+        </p:spPr>
+        <p:txBody>
+          <a:bodyPr wrap="square" rtlCol="0">
+            <a:spAutoFit/>
+          </a:bodyPr>
+          <a:lstStyle/>
+          <a:p>
+            <a:r>
+              <a:rPr lang="ko-KR" altLang="en-US" sz="1600" dirty="0">
+                <a:latin typeface="나눔바른고딕" panose="020B0603020101020101" pitchFamily="34" charset="-127"/>
+                <a:ea typeface="나눔바른고딕" panose="020B0603020101020101" pitchFamily="34" charset="-127"/>
+              </a:rPr>
+              <a:t>루트모션 보정</a:t>
+            </a:r>
+            <a:r>
+              <a:rPr lang="en-US" altLang="ko-KR" sz="1600" dirty="0" smtClean="0">
+                <a:latin typeface="나눔바른고딕" panose="020B0603020101020101" pitchFamily="34" charset="-127"/>
+                <a:ea typeface="나눔바른고딕" panose="020B0603020101020101" pitchFamily="34" charset="-127"/>
+              </a:rPr>
+              <a:t>2</a:t>
+            </a:r>
+            <a:endParaRPr lang="en-US" altLang="ko-KR" sz="1600" dirty="0">
+              <a:latin typeface="나눔바른고딕" panose="020B0603020101020101" pitchFamily="34" charset="-127"/>
+              <a:ea typeface="나눔바른고딕" panose="020B0603020101020101" pitchFamily="34" charset="-127"/>
+            </a:endParaRPr>
+          </a:p>
+        </p:txBody>
+      </p:sp>
+      <p:sp>
+        <p:nvSpPr>
+          <p:cNvPr id="11" name="TextBox 10">
+            <a:extLst>
+              <a:ext uri="{FF2B5EF4-FFF2-40B4-BE49-F238E27FC236}">
+                <a16:creationId xmlns:a16="http://schemas.microsoft.com/office/drawing/2014/main" xmlns="" id="{2D538815-CBEF-E37B-5659-B5091F86B485}"/>
+              </a:ext>
+            </a:extLst>
+          </p:cNvPr>
+          <p:cNvSpPr txBox="1"/>
+          <p:nvPr/>
+        </p:nvSpPr>
+        <p:spPr>
+          <a:xfrm>
+            <a:off x="302450" y="1342316"/>
+            <a:ext cx="5310950" cy="276999"/>
+          </a:xfrm>
+          <a:prstGeom prst="rect">
+            <a:avLst/>
+          </a:prstGeom>
+          <a:noFill/>
+        </p:spPr>
+        <p:txBody>
+          <a:bodyPr wrap="square" rtlCol="0">
+            <a:spAutoFit/>
+          </a:bodyPr>
+          <a:lstStyle/>
+          <a:p>
+            <a:r>
+              <a:rPr lang="ko-KR" altLang="en-US" sz="1200" dirty="0">
+                <a:latin typeface="나눔바른고딕" panose="020B0603020101020101" pitchFamily="34" charset="-127"/>
+                <a:ea typeface="나눔바른고딕" panose="020B0603020101020101" pitchFamily="34" charset="-127"/>
+              </a:rPr>
+              <a:t>디테일 문제</a:t>
+            </a:r>
+          </a:p>
+        </p:txBody>
+      </p:sp>
+      <p:cxnSp>
+        <p:nvCxnSpPr>
+          <p:cNvPr id="12" name="직선 연결선 11">
+            <a:extLst>
+              <a:ext uri="{FF2B5EF4-FFF2-40B4-BE49-F238E27FC236}">
+                <a16:creationId xmlns:a16="http://schemas.microsoft.com/office/drawing/2014/main" xmlns="" id="{76FFFECF-4B1C-95DF-32C3-2D2F19BEDAFB}"/>
+              </a:ext>
+            </a:extLst>
+          </p:cNvPr>
+          <p:cNvCxnSpPr>
+            <a:cxnSpLocks/>
+          </p:cNvCxnSpPr>
+          <p:nvPr/>
+        </p:nvCxnSpPr>
+        <p:spPr>
+          <a:xfrm>
+            <a:off x="387511" y="818707"/>
+            <a:ext cx="11308303" cy="0"/>
+          </a:xfrm>
+          <a:prstGeom prst="line">
+            <a:avLst/>
+          </a:prstGeom>
+          <a:ln>
+            <a:solidFill>
+              <a:schemeClr val="tx2"/>
+            </a:solidFill>
+          </a:ln>
+        </p:spPr>
+        <p:style>
+          <a:lnRef idx="2">
+            <a:schemeClr val="accent1"/>
+          </a:lnRef>
+          <a:fillRef idx="0">
+            <a:schemeClr val="accent1"/>
+          </a:fillRef>
+          <a:effectRef idx="1">
+            <a:schemeClr val="accent1"/>
+          </a:effectRef>
+          <a:fontRef idx="minor">
+            <a:schemeClr val="tx1"/>
+          </a:fontRef>
+        </p:style>
+      </p:cxnSp>
+      <p:sp>
+        <p:nvSpPr>
+          <p:cNvPr id="14" name="TextBox 13">
+            <a:extLst>
+              <a:ext uri="{FF2B5EF4-FFF2-40B4-BE49-F238E27FC236}">
+                <a16:creationId xmlns:a16="http://schemas.microsoft.com/office/drawing/2014/main" xmlns="" id="{2D538815-CBEF-E37B-5659-B5091F86B485}"/>
+              </a:ext>
+            </a:extLst>
+          </p:cNvPr>
+          <p:cNvSpPr txBox="1"/>
+          <p:nvPr/>
+        </p:nvSpPr>
+        <p:spPr>
+          <a:xfrm>
+            <a:off x="302450" y="1661233"/>
+            <a:ext cx="5310950" cy="1200329"/>
+          </a:xfrm>
+          <a:prstGeom prst="rect">
+            <a:avLst/>
+          </a:prstGeom>
+          <a:noFill/>
+        </p:spPr>
+        <p:txBody>
+          <a:bodyPr wrap="square" rtlCol="0">
+            <a:spAutoFit/>
+          </a:bodyPr>
+          <a:lstStyle/>
+          <a:p>
+            <a:r>
+              <a:rPr lang="ko-KR" altLang="en-US" sz="1200" dirty="0" err="1" smtClean="0">
+                <a:latin typeface="나눔바른고딕" panose="020B0603020101020101" pitchFamily="34" charset="-127"/>
+                <a:ea typeface="나눔바른고딕" panose="020B0603020101020101" pitchFamily="34" charset="-127"/>
+              </a:rPr>
+              <a:t>베지어를</a:t>
+            </a:r>
+            <a:r>
+              <a:rPr lang="ko-KR" altLang="en-US" sz="1200" dirty="0" smtClean="0">
+                <a:latin typeface="나눔바른고딕" panose="020B0603020101020101" pitchFamily="34" charset="-127"/>
+                <a:ea typeface="나눔바른고딕" panose="020B0603020101020101" pitchFamily="34" charset="-127"/>
+              </a:rPr>
+              <a:t> 활용한 보정의 조건</a:t>
+            </a:r>
+            <a:endParaRPr lang="en-US" altLang="ko-KR" sz="1200" dirty="0" smtClean="0">
+              <a:latin typeface="나눔바른고딕" panose="020B0603020101020101" pitchFamily="34" charset="-127"/>
+              <a:ea typeface="나눔바른고딕" panose="020B0603020101020101" pitchFamily="34" charset="-127"/>
+            </a:endParaRPr>
+          </a:p>
+          <a:p>
+            <a:endParaRPr lang="en-US" altLang="ko-KR" sz="1200" dirty="0" smtClean="0">
+              <a:latin typeface="나눔바른고딕" panose="020B0603020101020101" pitchFamily="34" charset="-127"/>
+              <a:ea typeface="나눔바른고딕" panose="020B0603020101020101" pitchFamily="34" charset="-127"/>
+            </a:endParaRPr>
+          </a:p>
+          <a:p>
+            <a:pPr marL="171450" indent="-171450">
+              <a:buFont typeface="Arial" panose="020B0604020202020204" pitchFamily="34" charset="0"/>
+              <a:buChar char="•"/>
+            </a:pPr>
+            <a:r>
+              <a:rPr lang="ko-KR" altLang="en-US" sz="1200" dirty="0" smtClean="0">
+                <a:latin typeface="나눔바른고딕" panose="020B0603020101020101" pitchFamily="34" charset="-127"/>
+                <a:ea typeface="나눔바른고딕" panose="020B0603020101020101" pitchFamily="34" charset="-127"/>
+              </a:rPr>
+              <a:t>모션이 간결해야 함</a:t>
+            </a:r>
+            <a:endParaRPr lang="en-US" altLang="ko-KR" sz="1200" dirty="0" smtClean="0">
+              <a:latin typeface="나눔바른고딕" panose="020B0603020101020101" pitchFamily="34" charset="-127"/>
+              <a:ea typeface="나눔바른고딕" panose="020B0603020101020101" pitchFamily="34" charset="-127"/>
+            </a:endParaRPr>
+          </a:p>
+          <a:p>
+            <a:pPr marL="628650" lvl="1" indent="-171450">
+              <a:buFont typeface="Arial" panose="020B0604020202020204" pitchFamily="34" charset="0"/>
+              <a:buChar char="•"/>
+            </a:pPr>
+            <a:r>
+              <a:rPr lang="ko-KR" altLang="en-US" sz="1200" dirty="0" smtClean="0">
+                <a:latin typeface="나눔바른고딕" panose="020B0603020101020101" pitchFamily="34" charset="-127"/>
+                <a:ea typeface="나눔바른고딕" panose="020B0603020101020101" pitchFamily="34" charset="-127"/>
+              </a:rPr>
+              <a:t>움직이는 범위가 넓은 모션은 오히려 불리</a:t>
+            </a:r>
+            <a:endParaRPr lang="en-US" altLang="ko-KR" sz="1200" dirty="0" smtClean="0">
+              <a:latin typeface="나눔바른고딕" panose="020B0603020101020101" pitchFamily="34" charset="-127"/>
+              <a:ea typeface="나눔바른고딕" panose="020B0603020101020101" pitchFamily="34" charset="-127"/>
+            </a:endParaRPr>
+          </a:p>
+          <a:p>
+            <a:pPr marL="171450" indent="-171450">
+              <a:buFont typeface="Arial" panose="020B0604020202020204" pitchFamily="34" charset="0"/>
+              <a:buChar char="•"/>
+            </a:pPr>
+            <a:r>
+              <a:rPr lang="ko-KR" altLang="en-US" sz="1200" dirty="0" smtClean="0">
+                <a:latin typeface="나눔바른고딕" panose="020B0603020101020101" pitchFamily="34" charset="-127"/>
+                <a:ea typeface="나눔바른고딕" panose="020B0603020101020101" pitchFamily="34" charset="-127"/>
+              </a:rPr>
+              <a:t>가능한 빠른 모션일 수록 유리</a:t>
+            </a:r>
+            <a:endParaRPr lang="en-US" altLang="ko-KR" sz="1200" dirty="0" smtClean="0">
+              <a:latin typeface="나눔바른고딕" panose="020B0603020101020101" pitchFamily="34" charset="-127"/>
+              <a:ea typeface="나눔바른고딕" panose="020B0603020101020101" pitchFamily="34" charset="-127"/>
+            </a:endParaRPr>
+          </a:p>
+          <a:p>
+            <a:pPr marL="628650" lvl="1" indent="-171450">
+              <a:buFont typeface="Arial" panose="020B0604020202020204" pitchFamily="34" charset="0"/>
+              <a:buChar char="•"/>
+            </a:pPr>
+            <a:r>
+              <a:rPr lang="ko-KR" altLang="en-US" sz="1200" dirty="0" smtClean="0">
+                <a:latin typeface="나눔바른고딕" panose="020B0603020101020101" pitchFamily="34" charset="-127"/>
+                <a:ea typeface="나눔바른고딕" panose="020B0603020101020101" pitchFamily="34" charset="-127"/>
+              </a:rPr>
+              <a:t>움직이는 길이가 길수록 </a:t>
+            </a:r>
+            <a:r>
+              <a:rPr lang="ko-KR" altLang="en-US" sz="1200" dirty="0" err="1" smtClean="0">
+                <a:latin typeface="나눔바른고딕" panose="020B0603020101020101" pitchFamily="34" charset="-127"/>
+                <a:ea typeface="나눔바른고딕" panose="020B0603020101020101" pitchFamily="34" charset="-127"/>
+              </a:rPr>
+              <a:t>어색해보임</a:t>
+            </a:r>
+            <a:endParaRPr lang="en-US" altLang="ko-KR" sz="1200" dirty="0" smtClean="0">
+              <a:latin typeface="나눔바른고딕" panose="020B0603020101020101" pitchFamily="34" charset="-127"/>
+              <a:ea typeface="나눔바른고딕" panose="020B0603020101020101" pitchFamily="34" charset="-127"/>
+            </a:endParaRPr>
+          </a:p>
+        </p:txBody>
+      </p:sp>
+      <p:sp>
+        <p:nvSpPr>
+          <p:cNvPr id="15" name="TextBox 14">
+            <a:extLst>
+              <a:ext uri="{FF2B5EF4-FFF2-40B4-BE49-F238E27FC236}">
+                <a16:creationId xmlns:a16="http://schemas.microsoft.com/office/drawing/2014/main" xmlns="" id="{2D538815-CBEF-E37B-5659-B5091F86B485}"/>
+              </a:ext>
+            </a:extLst>
+          </p:cNvPr>
+          <p:cNvSpPr txBox="1"/>
+          <p:nvPr/>
+        </p:nvSpPr>
+        <p:spPr>
+          <a:xfrm>
+            <a:off x="2774521" y="3216098"/>
+            <a:ext cx="1143067" cy="276999"/>
+          </a:xfrm>
+          <a:prstGeom prst="rect">
+            <a:avLst/>
+          </a:prstGeom>
+          <a:noFill/>
+        </p:spPr>
+        <p:txBody>
+          <a:bodyPr wrap="square" rtlCol="0">
+            <a:spAutoFit/>
+          </a:bodyPr>
+          <a:lstStyle/>
+          <a:p>
+            <a:pPr algn="ctr"/>
+            <a:r>
+              <a:rPr lang="ko-KR" altLang="en-US" sz="1200" dirty="0" smtClean="0">
+                <a:latin typeface="나눔바른고딕" panose="020B0603020101020101" pitchFamily="34" charset="-127"/>
+                <a:ea typeface="나눔바른고딕" panose="020B0603020101020101" pitchFamily="34" charset="-127"/>
+              </a:rPr>
+              <a:t>어색한 예시</a:t>
+            </a:r>
+            <a:endParaRPr lang="en-US" altLang="ko-KR" sz="1200" dirty="0" smtClean="0">
+              <a:latin typeface="나눔바른고딕" panose="020B0603020101020101" pitchFamily="34" charset="-127"/>
+              <a:ea typeface="나눔바른고딕" panose="020B0603020101020101" pitchFamily="34" charset="-127"/>
+            </a:endParaRPr>
+          </a:p>
+        </p:txBody>
+      </p:sp>
+      <p:sp>
+        <p:nvSpPr>
+          <p:cNvPr id="16" name="TextBox 15">
+            <a:extLst>
+              <a:ext uri="{FF2B5EF4-FFF2-40B4-BE49-F238E27FC236}">
+                <a16:creationId xmlns:a16="http://schemas.microsoft.com/office/drawing/2014/main" xmlns="" id="{2D538815-CBEF-E37B-5659-B5091F86B485}"/>
+              </a:ext>
+            </a:extLst>
+          </p:cNvPr>
+          <p:cNvSpPr txBox="1"/>
+          <p:nvPr/>
+        </p:nvSpPr>
+        <p:spPr>
+          <a:xfrm>
+            <a:off x="6905308" y="3216097"/>
+            <a:ext cx="2166773" cy="276999"/>
+          </a:xfrm>
+          <a:prstGeom prst="rect">
+            <a:avLst/>
+          </a:prstGeom>
+          <a:noFill/>
+        </p:spPr>
+        <p:txBody>
+          <a:bodyPr wrap="square" rtlCol="0">
+            <a:spAutoFit/>
+          </a:bodyPr>
+          <a:lstStyle/>
+          <a:p>
+            <a:pPr algn="ctr"/>
+            <a:r>
+              <a:rPr lang="ko-KR" altLang="en-US" sz="1200" smtClean="0">
+                <a:latin typeface="나눔바른고딕" panose="020B0603020101020101" pitchFamily="34" charset="-127"/>
+                <a:ea typeface="나눔바른고딕" panose="020B0603020101020101" pitchFamily="34" charset="-127"/>
+              </a:rPr>
+              <a:t>비교적 잘 적용된 </a:t>
+            </a:r>
+            <a:r>
+              <a:rPr lang="ko-KR" altLang="en-US" sz="1200" dirty="0" smtClean="0">
+                <a:latin typeface="나눔바른고딕" panose="020B0603020101020101" pitchFamily="34" charset="-127"/>
+                <a:ea typeface="나눔바른고딕" panose="020B0603020101020101" pitchFamily="34" charset="-127"/>
+              </a:rPr>
+              <a:t>예시</a:t>
+            </a:r>
+            <a:endParaRPr lang="en-US" altLang="ko-KR" sz="1200" dirty="0" smtClean="0">
+              <a:latin typeface="나눔바른고딕" panose="020B0603020101020101" pitchFamily="34" charset="-127"/>
+              <a:ea typeface="나눔바른고딕" panose="020B0603020101020101" pitchFamily="34" charset="-127"/>
+            </a:endParaRPr>
+          </a:p>
+        </p:txBody>
+      </p:sp>
+    </p:spTree>
+    <p:extLst>
+      <p:ext uri="{BB962C8B-B14F-4D97-AF65-F5344CB8AC3E}">
+        <p14:creationId xmlns:p14="http://schemas.microsoft.com/office/powerpoint/2010/main" val="855076074"/>
+      </p:ext>
+    </p:extLst>
+  </p:cSld>
+  <p:clrMapOvr>
+    <a:masterClrMapping/>
+  </p:clrMapOvr>
+</p:sld>
+</file>
+
+<file path=ppt/slides/slide9.xml><?xml version="1.0" encoding="utf-8"?>
+<p:sld xmlns:a="http://schemas.openxmlformats.org/drawingml/2006/main" xmlns:r="http://schemas.openxmlformats.org/officeDocument/2006/relationships" xmlns:p="http://schemas.openxmlformats.org/presentationml/2006/main">
+  <p:cSld>
+    <p:spTree>
+      <p:nvGrpSpPr>
+        <p:cNvPr id="1" name="">
+          <a:extLst>
+            <a:ext uri="{FF2B5EF4-FFF2-40B4-BE49-F238E27FC236}">
+              <a16:creationId xmlns:a16="http://schemas.microsoft.com/office/drawing/2014/main" xmlns="" id="{960F3801-1345-73B1-BC4D-455683B38EDD}"/>
+            </a:ext>
+          </a:extLst>
+        </p:cNvPr>
+        <p:cNvGrpSpPr/>
+        <p:nvPr/>
+      </p:nvGrpSpPr>
+      <p:grpSpPr>
+        <a:xfrm>
+          <a:off x="0" y="0"/>
+          <a:ext cx="0" cy="0"/>
+          <a:chOff x="0" y="0"/>
+          <a:chExt cx="0" cy="0"/>
+        </a:xfrm>
+      </p:grpSpPr>
+      <p:sp>
+        <p:nvSpPr>
+          <p:cNvPr id="8" name="TextBox 7">
+            <a:extLst>
+              <a:ext uri="{FF2B5EF4-FFF2-40B4-BE49-F238E27FC236}">
+                <a16:creationId xmlns:a16="http://schemas.microsoft.com/office/drawing/2014/main" xmlns="" id="{953A2C19-7BB6-4B8F-B088-53F2041DCA07}"/>
+              </a:ext>
+            </a:extLst>
+          </p:cNvPr>
+          <p:cNvSpPr txBox="1"/>
+          <p:nvPr/>
+        </p:nvSpPr>
+        <p:spPr>
+          <a:xfrm>
+            <a:off x="302451" y="315453"/>
+            <a:ext cx="4944140" cy="369332"/>
+          </a:xfrm>
+          <a:prstGeom prst="rect">
+            <a:avLst/>
+          </a:prstGeom>
+          <a:noFill/>
+        </p:spPr>
+        <p:txBody>
+          <a:bodyPr wrap="square" rtlCol="0">
+            <a:spAutoFit/>
+          </a:bodyPr>
+          <a:lstStyle/>
+          <a:p>
+            <a:r>
+              <a:rPr lang="ko-KR" altLang="en-US" dirty="0">
+                <a:latin typeface="나눔바른고딕" panose="020B0603020101020101" pitchFamily="34" charset="-127"/>
+                <a:ea typeface="나눔바른고딕" panose="020B0603020101020101" pitchFamily="34" charset="-127"/>
+              </a:rPr>
+              <a:t>피드백 반영</a:t>
+            </a:r>
+            <a:endParaRPr lang="en-US" altLang="ko-KR" dirty="0">
+              <a:latin typeface="나눔바른고딕" panose="020B0603020101020101" pitchFamily="34" charset="-127"/>
+              <a:ea typeface="나눔바른고딕" panose="020B0603020101020101" pitchFamily="34" charset="-127"/>
+            </a:endParaRPr>
+          </a:p>
+        </p:txBody>
+      </p:sp>
+      <p:sp>
+        <p:nvSpPr>
+          <p:cNvPr id="6" name="직사각형 5"/>
+          <p:cNvSpPr/>
+          <p:nvPr/>
+        </p:nvSpPr>
+        <p:spPr>
+          <a:xfrm>
+            <a:off x="10443172" y="118011"/>
+            <a:ext cx="1596912" cy="246221"/>
+          </a:xfrm>
+          <a:prstGeom prst="rect">
+            <a:avLst/>
+          </a:prstGeom>
+        </p:spPr>
+        <p:txBody>
+          <a:bodyPr wrap="none">
+            <a:spAutoFit/>
+          </a:bodyPr>
+          <a:lstStyle/>
+          <a:p>
+            <a:r>
+              <a:rPr lang="ko-KR" altLang="en-US" sz="1000" dirty="0" err="1">
+                <a:solidFill>
+                  <a:schemeClr val="bg1">
+                    <a:lumMod val="75000"/>
+                  </a:schemeClr>
+                </a:solidFill>
+                <a:latin typeface="나눔바른고딕" panose="020B0603020101020101" pitchFamily="34" charset="-127"/>
+                <a:ea typeface="나눔바른고딕" panose="020B0603020101020101" pitchFamily="34" charset="-127"/>
+              </a:rPr>
+              <a:t>펄어비스</a:t>
+            </a:r>
+            <a:r>
+              <a:rPr lang="ko-KR" altLang="en-US" sz="1000" dirty="0">
+                <a:solidFill>
+                  <a:schemeClr val="bg1">
+                    <a:lumMod val="75000"/>
+                  </a:schemeClr>
+                </a:solidFill>
+                <a:latin typeface="나눔바른고딕" panose="020B0603020101020101" pitchFamily="34" charset="-127"/>
+                <a:ea typeface="나눔바른고딕" panose="020B0603020101020101" pitchFamily="34" charset="-127"/>
+              </a:rPr>
+              <a:t> </a:t>
+            </a:r>
+            <a:r>
+              <a:rPr lang="en-US" altLang="ko-KR" sz="1000" dirty="0">
+                <a:solidFill>
+                  <a:schemeClr val="bg1">
+                    <a:lumMod val="75000"/>
+                  </a:schemeClr>
+                </a:solidFill>
+                <a:latin typeface="나눔바른고딕" panose="020B0603020101020101" pitchFamily="34" charset="-127"/>
+                <a:ea typeface="나눔바른고딕" panose="020B0603020101020101" pitchFamily="34" charset="-127"/>
+              </a:rPr>
+              <a:t>2026 </a:t>
+            </a:r>
+            <a:r>
+              <a:rPr lang="ko-KR" altLang="en-US" sz="1000" dirty="0">
+                <a:solidFill>
+                  <a:schemeClr val="bg1">
+                    <a:lumMod val="75000"/>
+                  </a:schemeClr>
+                </a:solidFill>
+                <a:latin typeface="나눔바른고딕" panose="020B0603020101020101" pitchFamily="34" charset="-127"/>
+                <a:ea typeface="나눔바른고딕" panose="020B0603020101020101" pitchFamily="34" charset="-127"/>
+              </a:rPr>
+              <a:t>여름 </a:t>
+            </a:r>
+            <a:r>
+              <a:rPr lang="ko-KR" altLang="en-US" sz="1000" dirty="0" err="1">
+                <a:solidFill>
+                  <a:schemeClr val="bg1">
+                    <a:lumMod val="75000"/>
+                  </a:schemeClr>
+                </a:solidFill>
+                <a:latin typeface="나눔바른고딕" panose="020B0603020101020101" pitchFamily="34" charset="-127"/>
+                <a:ea typeface="나눔바른고딕" panose="020B0603020101020101" pitchFamily="34" charset="-127"/>
+              </a:rPr>
+              <a:t>인턴십</a:t>
+            </a:r>
+            <a:endParaRPr lang="ko-KR" altLang="en-US" sz="1000" dirty="0">
+              <a:solidFill>
+                <a:schemeClr val="bg1">
+                  <a:lumMod val="75000"/>
+                </a:schemeClr>
+              </a:solidFill>
+              <a:latin typeface="나눔바른고딕" panose="020B0603020101020101" pitchFamily="34" charset="-127"/>
+              <a:ea typeface="나눔바른고딕" panose="020B0603020101020101" pitchFamily="34" charset="-127"/>
+            </a:endParaRPr>
+          </a:p>
+        </p:txBody>
+      </p:sp>
+      <p:sp>
+        <p:nvSpPr>
+          <p:cNvPr id="7" name="TextBox 6">
+            <a:extLst>
+              <a:ext uri="{FF2B5EF4-FFF2-40B4-BE49-F238E27FC236}">
+                <a16:creationId xmlns:a16="http://schemas.microsoft.com/office/drawing/2014/main" xmlns="" id="{2D538815-CBEF-E37B-5659-B5091F86B485}"/>
+              </a:ext>
+            </a:extLst>
+          </p:cNvPr>
+          <p:cNvSpPr txBox="1"/>
+          <p:nvPr/>
+        </p:nvSpPr>
+        <p:spPr>
+          <a:xfrm>
+            <a:off x="302450" y="1003762"/>
+            <a:ext cx="2694247" cy="338554"/>
+          </a:xfrm>
+          <a:prstGeom prst="rect">
+            <a:avLst/>
+          </a:prstGeom>
+          <a:noFill/>
+        </p:spPr>
+        <p:txBody>
+          <a:bodyPr wrap="square" rtlCol="0">
+            <a:spAutoFit/>
+          </a:bodyPr>
+          <a:lstStyle/>
+          <a:p>
+            <a:r>
+              <a:rPr lang="ko-KR" altLang="en-US" sz="1600" dirty="0" err="1">
+                <a:latin typeface="나눔바른고딕" panose="020B0603020101020101" pitchFamily="34" charset="-127"/>
+                <a:ea typeface="나눔바른고딕" panose="020B0603020101020101" pitchFamily="34" charset="-127"/>
+              </a:rPr>
+              <a:t>블렌드</a:t>
+            </a:r>
+            <a:r>
+              <a:rPr lang="ko-KR" altLang="en-US" sz="1600" dirty="0">
+                <a:latin typeface="나눔바른고딕" panose="020B0603020101020101" pitchFamily="34" charset="-127"/>
+                <a:ea typeface="나눔바른고딕" panose="020B0603020101020101" pitchFamily="34" charset="-127"/>
+              </a:rPr>
+              <a:t> 스페이스 보완</a:t>
+            </a:r>
+            <a:endParaRPr lang="en-US" altLang="ko-KR" sz="1600" dirty="0">
+              <a:latin typeface="나눔바른고딕" panose="020B0603020101020101" pitchFamily="34" charset="-127"/>
+              <a:ea typeface="나눔바른고딕" panose="020B0603020101020101" pitchFamily="34" charset="-127"/>
+            </a:endParaRPr>
+          </a:p>
+        </p:txBody>
+      </p:sp>
+      <p:cxnSp>
+        <p:nvCxnSpPr>
+          <p:cNvPr id="11" name="직선 연결선 10">
+            <a:extLst>
+              <a:ext uri="{FF2B5EF4-FFF2-40B4-BE49-F238E27FC236}">
+                <a16:creationId xmlns:a16="http://schemas.microsoft.com/office/drawing/2014/main" xmlns="" id="{76FFFECF-4B1C-95DF-32C3-2D2F19BEDAFB}"/>
+              </a:ext>
+            </a:extLst>
+          </p:cNvPr>
+          <p:cNvCxnSpPr>
+            <a:cxnSpLocks/>
+          </p:cNvCxnSpPr>
+          <p:nvPr/>
+        </p:nvCxnSpPr>
+        <p:spPr>
+          <a:xfrm>
+            <a:off x="387511" y="818707"/>
+            <a:ext cx="11308303" cy="0"/>
+          </a:xfrm>
+          <a:prstGeom prst="line">
+            <a:avLst/>
+          </a:prstGeom>
+          <a:ln>
+            <a:solidFill>
+              <a:schemeClr val="tx2"/>
+            </a:solidFill>
+          </a:ln>
+        </p:spPr>
+        <p:style>
+          <a:lnRef idx="2">
+            <a:schemeClr val="accent1"/>
+          </a:lnRef>
+          <a:fillRef idx="0">
+            <a:schemeClr val="accent1"/>
+          </a:fillRef>
+          <a:effectRef idx="1">
+            <a:schemeClr val="accent1"/>
+          </a:effectRef>
+          <a:fontRef idx="minor">
+            <a:schemeClr val="tx1"/>
+          </a:fontRef>
+        </p:style>
+      </p:cxnSp>
+      <p:sp>
+        <p:nvSpPr>
+          <p:cNvPr id="5" name="TextBox 4">
+            <a:extLst>
+              <a:ext uri="{FF2B5EF4-FFF2-40B4-BE49-F238E27FC236}">
+                <a16:creationId xmlns:a16="http://schemas.microsoft.com/office/drawing/2014/main" xmlns="" id="{08BA9FCF-A704-3B2E-2B03-A0A73FB521F1}"/>
+              </a:ext>
+            </a:extLst>
+          </p:cNvPr>
+          <p:cNvSpPr txBox="1"/>
+          <p:nvPr/>
+        </p:nvSpPr>
+        <p:spPr>
+          <a:xfrm>
+            <a:off x="302450" y="1342316"/>
+            <a:ext cx="3416795" cy="276999"/>
+          </a:xfrm>
+          <a:prstGeom prst="rect">
+            <a:avLst/>
+          </a:prstGeom>
+          <a:noFill/>
+        </p:spPr>
+        <p:txBody>
+          <a:bodyPr wrap="square" rtlCol="0">
+            <a:spAutoFit/>
+          </a:bodyPr>
+          <a:lstStyle/>
+          <a:p>
+            <a:r>
+              <a:rPr lang="ko-KR" altLang="en-US" sz="1200" dirty="0">
+                <a:latin typeface="나눔바른고딕" panose="020B0603020101020101" pitchFamily="34" charset="-127"/>
+                <a:ea typeface="나눔바른고딕" panose="020B0603020101020101" pitchFamily="34" charset="-127"/>
+              </a:rPr>
+              <a:t>디버깅용 </a:t>
+            </a:r>
+            <a:r>
+              <a:rPr lang="en-US" altLang="ko-KR" sz="1200" smtClean="0">
+                <a:latin typeface="나눔바른고딕" panose="020B0603020101020101" pitchFamily="34" charset="-127"/>
+                <a:ea typeface="나눔바른고딕" panose="020B0603020101020101" pitchFamily="34" charset="-127"/>
+              </a:rPr>
+              <a:t>UI</a:t>
+            </a:r>
+            <a:endParaRPr lang="ko-KR" altLang="en-US" sz="1200" dirty="0">
+              <a:latin typeface="나눔바른고딕" panose="020B0603020101020101" pitchFamily="34" charset="-127"/>
+              <a:ea typeface="나눔바른고딕" panose="020B0603020101020101" pitchFamily="34" charset="-127"/>
+            </a:endParaRPr>
+          </a:p>
+        </p:txBody>
+      </p:sp>
+      <p:sp>
+        <p:nvSpPr>
+          <p:cNvPr id="9" name="TextBox 8">
+            <a:extLst>
+              <a:ext uri="{FF2B5EF4-FFF2-40B4-BE49-F238E27FC236}">
+                <a16:creationId xmlns:a16="http://schemas.microsoft.com/office/drawing/2014/main" xmlns="" id="{08BA9FCF-A704-3B2E-2B03-A0A73FB521F1}"/>
+              </a:ext>
+            </a:extLst>
+          </p:cNvPr>
+          <p:cNvSpPr txBox="1"/>
+          <p:nvPr/>
+        </p:nvSpPr>
+        <p:spPr>
+          <a:xfrm>
+            <a:off x="-42876" y="1819369"/>
+            <a:ext cx="1692449" cy="276999"/>
+          </a:xfrm>
+          <a:prstGeom prst="rect">
+            <a:avLst/>
+          </a:prstGeom>
+          <a:noFill/>
+        </p:spPr>
+        <p:txBody>
+          <a:bodyPr wrap="square" rtlCol="0">
+            <a:spAutoFit/>
+          </a:bodyPr>
+          <a:lstStyle/>
+          <a:p>
+            <a:pPr algn="ctr"/>
+            <a:endParaRPr lang="ko-KR" altLang="en-US" sz="1200" dirty="0">
+              <a:latin typeface="나눔바른고딕" panose="020B0603020101020101" pitchFamily="34" charset="-127"/>
+              <a:ea typeface="나눔바른고딕" panose="020B0603020101020101" pitchFamily="34" charset="-127"/>
+            </a:endParaRPr>
+          </a:p>
+        </p:txBody>
+      </p:sp>
+    </p:spTree>
+    <p:extLst>
+      <p:ext uri="{BB962C8B-B14F-4D97-AF65-F5344CB8AC3E}">
+        <p14:creationId xmlns:p14="http://schemas.microsoft.com/office/powerpoint/2010/main" val="2618570220"/>
       </p:ext>
     </p:extLst>
   </p:cSld>
